--- a/01_stock_prediction_report.pptx
+++ b/01_stock_prediction_report.pptx
@@ -17,6 +17,12 @@
     <p:sldId id="262" r:id="rId9"/>
     <p:sldId id="263" r:id="rId10"/>
     <p:sldId id="264" r:id="rId11"/>
+    <p:sldId id="268" r:id="rId19"/>
+    <p:sldId id="269" r:id="rId20"/>
+    <p:sldId id="270" r:id="rId21"/>
+    <p:sldId id="271" r:id="rId22"/>
+    <p:sldId id="272" r:id="rId23"/>
+    <p:sldId id="273" r:id="rId24"/>
     <p:sldId id="265" r:id="rId12"/>
     <p:sldId id="266" r:id="rId13"/>
     <p:sldId id="267" r:id="rId14"/>
@@ -6347,6 +6353,6962 @@
               <a:t>— George E. P. Box</a:t>
             </a:r>
             <a:endParaRPr lang="en-US" sz="800" dirty="0"/>
+          </a:p>
+        </p:txBody>
+      </p:sp>
+    </p:spTree>
+  </p:cSld>
+  <p:clrMapOvr>
+    <a:masterClrMapping/>
+  </p:clrMapOvr>
+</p:sld>
+</file>
+
+<file path=ppt/slides/slide13.xml><?xml version="1.0" encoding="utf-8"?>
+<p:sld xmlns:a="http://schemas.openxmlformats.org/drawingml/2006/main" xmlns:p="http://schemas.openxmlformats.org/presentationml/2006/main" xmlns:r="http://schemas.openxmlformats.org/officeDocument/2006/relationships">
+  <p:cSld>
+    <p:bg>
+      <p:bgPr>
+        <a:solidFill>
+          <a:srgbClr val="0F172A"/>
+        </a:solidFill>
+        <a:effectLst/>
+      </p:bgPr>
+    </p:bg>
+    <p:spTree>
+      <p:nvGrpSpPr>
+        <p:cNvPr id="1" name=""/>
+        <p:cNvGrpSpPr/>
+        <p:nvPr/>
+      </p:nvGrpSpPr>
+      <p:grpSpPr/>
+      <p:sp>
+        <p:nvSpPr>
+          <p:cNvPr id="2" name="Rectangle 1"/>
+          <p:cNvSpPr/>
+          <p:nvPr/>
+        </p:nvSpPr>
+        <p:spPr>
+          <a:xfrm>
+            <a:off x="0" y="0"/>
+            <a:ext cx="9144000" cy="1005840"/>
+          </a:xfrm>
+          <a:prstGeom prst="rect">
+            <a:avLst/>
+          </a:prstGeom>
+          <a:solidFill>
+            <a:srgbClr val="EAA817"/>
+          </a:solidFill>
+          <a:ln>
+            <a:noFill/>
+          </a:ln>
+        </p:spPr>
+        <p:style>
+          <a:lnRef idx="1">
+            <a:schemeClr val="accent1"/>
+          </a:lnRef>
+          <a:fillRef idx="3">
+            <a:schemeClr val="accent1"/>
+          </a:fillRef>
+          <a:effectRef idx="2">
+            <a:schemeClr val="accent1"/>
+          </a:effectRef>
+          <a:fontRef idx="minor">
+            <a:schemeClr val="lt1"/>
+          </a:fontRef>
+        </p:style>
+        <p:txBody>
+          <a:bodyPr rtlCol="0" anchor="ctr"/>
+          <a:lstStyle/>
+          <a:p>
+            <a:pPr algn="ctr"/>
+          </a:p>
+        </p:txBody>
+      </p:sp>
+      <p:sp>
+        <p:nvSpPr>
+          <p:cNvPr id="3" name="Rectangle 2"/>
+          <p:cNvSpPr/>
+          <p:nvPr/>
+        </p:nvSpPr>
+        <p:spPr>
+          <a:xfrm>
+            <a:off x="164592" y="146304"/>
+            <a:ext cx="1188720" cy="384048"/>
+          </a:xfrm>
+          <a:prstGeom prst="rect">
+            <a:avLst/>
+          </a:prstGeom>
+          <a:solidFill>
+            <a:srgbClr val="0F172A"/>
+          </a:solidFill>
+          <a:ln>
+            <a:noFill/>
+          </a:ln>
+        </p:spPr>
+        <p:style>
+          <a:lnRef idx="1">
+            <a:schemeClr val="accent1"/>
+          </a:lnRef>
+          <a:fillRef idx="3">
+            <a:schemeClr val="accent1"/>
+          </a:fillRef>
+          <a:effectRef idx="2">
+            <a:schemeClr val="accent1"/>
+          </a:effectRef>
+          <a:fontRef idx="minor">
+            <a:schemeClr val="lt1"/>
+          </a:fontRef>
+        </p:style>
+        <p:txBody>
+          <a:bodyPr rtlCol="0" anchor="ctr"/>
+          <a:lstStyle/>
+          <a:p>
+            <a:pPr algn="ctr"/>
+          </a:p>
+        </p:txBody>
+      </p:sp>
+      <p:sp>
+        <p:nvSpPr>
+          <p:cNvPr id="4" name="TextBox 3"/>
+          <p:cNvSpPr txBox="1"/>
+          <p:nvPr/>
+        </p:nvSpPr>
+        <p:spPr>
+          <a:xfrm>
+            <a:off x="164592" y="146304"/>
+            <a:ext cx="1188720" cy="384048"/>
+          </a:xfrm>
+          <a:prstGeom prst="rect">
+            <a:avLst/>
+          </a:prstGeom>
+          <a:noFill/>
+        </p:spPr>
+        <p:txBody>
+          <a:bodyPr wrap="square">
+            <a:spAutoFit/>
+          </a:bodyPr>
+          <a:lstStyle/>
+          <a:p>
+            <a:pPr algn="ctr"/>
+            <a:r>
+              <a:rPr sz="900" b="1">
+                <a:solidFill>
+                  <a:srgbClr val="EAA817"/>
+                </a:solidFill>
+              </a:rPr>
+              <a:t>선형 계열</a:t>
+            </a:r>
+          </a:p>
+        </p:txBody>
+      </p:sp>
+      <p:sp>
+        <p:nvSpPr>
+          <p:cNvPr id="5" name="TextBox 4"/>
+          <p:cNvSpPr txBox="1"/>
+          <p:nvPr/>
+        </p:nvSpPr>
+        <p:spPr>
+          <a:xfrm>
+            <a:off x="1481328" y="73152"/>
+            <a:ext cx="6400800" cy="530352"/>
+          </a:xfrm>
+          <a:prstGeom prst="rect">
+            <a:avLst/>
+          </a:prstGeom>
+          <a:noFill/>
+        </p:spPr>
+        <p:txBody>
+          <a:bodyPr wrap="square">
+            <a:spAutoFit/>
+          </a:bodyPr>
+          <a:lstStyle/>
+          <a:p>
+            <a:pPr algn="l"/>
+            <a:r>
+              <a:rPr sz="2100" b="1">
+                <a:solidFill>
+                  <a:srgbClr val="0F172A"/>
+                </a:solidFill>
+              </a:rPr>
+              <a:t>선형 회귀 (Linear Regression)</a:t>
+            </a:r>
+          </a:p>
+        </p:txBody>
+      </p:sp>
+      <p:sp>
+        <p:nvSpPr>
+          <p:cNvPr id="6" name="TextBox 5"/>
+          <p:cNvSpPr txBox="1"/>
+          <p:nvPr/>
+        </p:nvSpPr>
+        <p:spPr>
+          <a:xfrm>
+            <a:off x="1481328" y="585216"/>
+            <a:ext cx="6400800" cy="329184"/>
+          </a:xfrm>
+          <a:prstGeom prst="rect">
+            <a:avLst/>
+          </a:prstGeom>
+          <a:noFill/>
+        </p:spPr>
+        <p:txBody>
+          <a:bodyPr wrap="square">
+            <a:spAutoFit/>
+          </a:bodyPr>
+          <a:lstStyle/>
+          <a:p>
+            <a:pPr algn="l"/>
+            <a:r>
+              <a:rPr sz="1000" b="0">
+                <a:solidFill>
+                  <a:srgbClr val="1E293B"/>
+                </a:solidFill>
+              </a:rPr>
+              <a:t>가장 단순한 예측 공식 — 다른 모델 성능의 기준선(Baseline) 역할</a:t>
+            </a:r>
+          </a:p>
+        </p:txBody>
+      </p:sp>
+      <p:sp>
+        <p:nvSpPr>
+          <p:cNvPr id="7" name="TextBox 6"/>
+          <p:cNvSpPr txBox="1"/>
+          <p:nvPr/>
+        </p:nvSpPr>
+        <p:spPr>
+          <a:xfrm>
+            <a:off x="7955279" y="73152"/>
+            <a:ext cx="1005840" cy="457200"/>
+          </a:xfrm>
+          <a:prstGeom prst="rect">
+            <a:avLst/>
+          </a:prstGeom>
+          <a:noFill/>
+        </p:spPr>
+        <p:txBody>
+          <a:bodyPr wrap="square">
+            <a:spAutoFit/>
+          </a:bodyPr>
+          <a:lstStyle/>
+          <a:p>
+            <a:pPr algn="r"/>
+            <a:r>
+              <a:rPr sz="1000" b="0">
+                <a:solidFill>
+                  <a:srgbClr val="1E293B"/>
+                </a:solidFill>
+              </a:rPr>
+              <a:t>10 / 22</a:t>
+            </a:r>
+          </a:p>
+        </p:txBody>
+      </p:sp>
+      <p:sp>
+        <p:nvSpPr>
+          <p:cNvPr id="8" name="Rectangle 7"/>
+          <p:cNvSpPr/>
+          <p:nvPr/>
+        </p:nvSpPr>
+        <p:spPr>
+          <a:xfrm>
+            <a:off x="0" y="1005840"/>
+            <a:ext cx="9144000" cy="475488"/>
+          </a:xfrm>
+          <a:prstGeom prst="rect">
+            <a:avLst/>
+          </a:prstGeom>
+          <a:solidFill>
+            <a:srgbClr val="1E293B"/>
+          </a:solidFill>
+          <a:ln>
+            <a:noFill/>
+          </a:ln>
+        </p:spPr>
+        <p:style>
+          <a:lnRef idx="1">
+            <a:schemeClr val="accent1"/>
+          </a:lnRef>
+          <a:fillRef idx="3">
+            <a:schemeClr val="accent1"/>
+          </a:fillRef>
+          <a:effectRef idx="2">
+            <a:schemeClr val="accent1"/>
+          </a:effectRef>
+          <a:fontRef idx="minor">
+            <a:schemeClr val="lt1"/>
+          </a:fontRef>
+        </p:style>
+        <p:txBody>
+          <a:bodyPr rtlCol="0" anchor="ctr"/>
+          <a:lstStyle/>
+          <a:p>
+            <a:pPr algn="ctr"/>
+          </a:p>
+        </p:txBody>
+      </p:sp>
+      <p:sp>
+        <p:nvSpPr>
+          <p:cNvPr id="9" name="TextBox 8"/>
+          <p:cNvSpPr txBox="1"/>
+          <p:nvPr/>
+        </p:nvSpPr>
+        <p:spPr>
+          <a:xfrm>
+            <a:off x="228600" y="1051560"/>
+            <a:ext cx="8686800" cy="384048"/>
+          </a:xfrm>
+          <a:prstGeom prst="rect">
+            <a:avLst/>
+          </a:prstGeom>
+          <a:noFill/>
+        </p:spPr>
+        <p:txBody>
+          <a:bodyPr wrap="square">
+            <a:spAutoFit/>
+          </a:bodyPr>
+          <a:lstStyle/>
+          <a:p>
+            <a:pPr algn="l"/>
+            <a:r>
+              <a:rPr sz="1100" b="0">
+                <a:solidFill>
+                  <a:srgbClr val="EAA817"/>
+                </a:solidFill>
+              </a:rPr>
+              <a:t>한 줄 요약   |   "각 지표에 가중치를 곱해 더하면 등락률이 나온다"</a:t>
+            </a:r>
+          </a:p>
+        </p:txBody>
+      </p:sp>
+      <p:sp>
+        <p:nvSpPr>
+          <p:cNvPr id="10" name="Rectangle 9"/>
+          <p:cNvSpPr/>
+          <p:nvPr/>
+        </p:nvSpPr>
+        <p:spPr>
+          <a:xfrm>
+            <a:off x="164592" y="1600200"/>
+            <a:ext cx="4251960" cy="2651760"/>
+          </a:xfrm>
+          <a:prstGeom prst="rect">
+            <a:avLst/>
+          </a:prstGeom>
+          <a:solidFill>
+            <a:srgbClr val="162137"/>
+          </a:solidFill>
+          <a:ln>
+            <a:noFill/>
+          </a:ln>
+        </p:spPr>
+        <p:style>
+          <a:lnRef idx="1">
+            <a:schemeClr val="accent1"/>
+          </a:lnRef>
+          <a:fillRef idx="3">
+            <a:schemeClr val="accent1"/>
+          </a:fillRef>
+          <a:effectRef idx="2">
+            <a:schemeClr val="accent1"/>
+          </a:effectRef>
+          <a:fontRef idx="minor">
+            <a:schemeClr val="lt1"/>
+          </a:fontRef>
+        </p:style>
+        <p:txBody>
+          <a:bodyPr rtlCol="0" anchor="ctr"/>
+          <a:lstStyle/>
+          <a:p>
+            <a:pPr algn="ctr"/>
+          </a:p>
+        </p:txBody>
+      </p:sp>
+      <p:sp>
+        <p:nvSpPr>
+          <p:cNvPr id="11" name="TextBox 10"/>
+          <p:cNvSpPr txBox="1"/>
+          <p:nvPr/>
+        </p:nvSpPr>
+        <p:spPr>
+          <a:xfrm>
+            <a:off x="292608" y="1664208"/>
+            <a:ext cx="3977639" cy="347472"/>
+          </a:xfrm>
+          <a:prstGeom prst="rect">
+            <a:avLst/>
+          </a:prstGeom>
+          <a:noFill/>
+        </p:spPr>
+        <p:txBody>
+          <a:bodyPr wrap="square">
+            <a:spAutoFit/>
+          </a:bodyPr>
+          <a:lstStyle/>
+          <a:p>
+            <a:pPr algn="l"/>
+            <a:r>
+              <a:rPr sz="1100" b="1">
+                <a:solidFill>
+                  <a:srgbClr val="EAA817"/>
+                </a:solidFill>
+              </a:rPr>
+              <a:t>비유로 이해하기</a:t>
+            </a:r>
+          </a:p>
+        </p:txBody>
+      </p:sp>
+      <p:sp>
+        <p:nvSpPr>
+          <p:cNvPr id="12" name="TextBox 11"/>
+          <p:cNvSpPr txBox="1"/>
+          <p:nvPr/>
+        </p:nvSpPr>
+        <p:spPr>
+          <a:xfrm>
+            <a:off x="292608" y="2048256"/>
+            <a:ext cx="3977639" cy="2121408"/>
+          </a:xfrm>
+          <a:prstGeom prst="rect">
+            <a:avLst/>
+          </a:prstGeom>
+          <a:noFill/>
+        </p:spPr>
+        <p:txBody>
+          <a:bodyPr wrap="square">
+            <a:spAutoFit/>
+          </a:bodyPr>
+          <a:lstStyle/>
+          <a:p>
+            <a:pPr algn="l"/>
+            <a:r>
+              <a:rPr sz="1050" b="0">
+                <a:solidFill>
+                  <a:srgbClr val="FFFFFF"/>
+                </a:solidFill>
+              </a:rPr>
+              <a:t>키와 몸무게의 관계처럼,
+"RSI가 1 오르면 등락률 0.03% 변화"
+이런 공식을 데이터에서 자동으로 찾습니다.
+수만 개의 과거 날짜를 보면서
+"어떤 가중치 조합이 정답에 가장
+ 가까운지"를 계산합니다.
+예:  y = 0.03×RSI + 0.02×MACD
+       + 0.01×거래량 + ...</a:t>
+            </a:r>
+          </a:p>
+        </p:txBody>
+      </p:sp>
+      <p:sp>
+        <p:nvSpPr>
+          <p:cNvPr id="13" name="Rectangle 12"/>
+          <p:cNvSpPr/>
+          <p:nvPr/>
+        </p:nvSpPr>
+        <p:spPr>
+          <a:xfrm>
+            <a:off x="4727448" y="1600200"/>
+            <a:ext cx="4251960" cy="2651760"/>
+          </a:xfrm>
+          <a:prstGeom prst="rect">
+            <a:avLst/>
+          </a:prstGeom>
+          <a:solidFill>
+            <a:srgbClr val="162137"/>
+          </a:solidFill>
+          <a:ln>
+            <a:noFill/>
+          </a:ln>
+        </p:spPr>
+        <p:style>
+          <a:lnRef idx="1">
+            <a:schemeClr val="accent1"/>
+          </a:lnRef>
+          <a:fillRef idx="3">
+            <a:schemeClr val="accent1"/>
+          </a:fillRef>
+          <a:effectRef idx="2">
+            <a:schemeClr val="accent1"/>
+          </a:effectRef>
+          <a:fontRef idx="minor">
+            <a:schemeClr val="lt1"/>
+          </a:fontRef>
+        </p:style>
+        <p:txBody>
+          <a:bodyPr rtlCol="0" anchor="ctr"/>
+          <a:lstStyle/>
+          <a:p>
+            <a:pPr algn="ctr"/>
+          </a:p>
+        </p:txBody>
+      </p:sp>
+      <p:sp>
+        <p:nvSpPr>
+          <p:cNvPr id="14" name="TextBox 13"/>
+          <p:cNvSpPr txBox="1"/>
+          <p:nvPr/>
+        </p:nvSpPr>
+        <p:spPr>
+          <a:xfrm>
+            <a:off x="4864608" y="1664208"/>
+            <a:ext cx="3977639" cy="347472"/>
+          </a:xfrm>
+          <a:prstGeom prst="rect">
+            <a:avLst/>
+          </a:prstGeom>
+          <a:noFill/>
+        </p:spPr>
+        <p:txBody>
+          <a:bodyPr wrap="square">
+            <a:spAutoFit/>
+          </a:bodyPr>
+          <a:lstStyle/>
+          <a:p>
+            <a:pPr algn="l"/>
+            <a:r>
+              <a:rPr sz="1100" b="1">
+                <a:solidFill>
+                  <a:srgbClr val="EAA817"/>
+                </a:solidFill>
+              </a:rPr>
+              <a:t>어떻게 작동하나</a:t>
+            </a:r>
+          </a:p>
+        </p:txBody>
+      </p:sp>
+      <p:sp>
+        <p:nvSpPr>
+          <p:cNvPr id="15" name="TextBox 14"/>
+          <p:cNvSpPr txBox="1"/>
+          <p:nvPr/>
+        </p:nvSpPr>
+        <p:spPr>
+          <a:xfrm>
+            <a:off x="4864608" y="2048256"/>
+            <a:ext cx="3977639" cy="365760"/>
+          </a:xfrm>
+          <a:prstGeom prst="rect">
+            <a:avLst/>
+          </a:prstGeom>
+          <a:noFill/>
+        </p:spPr>
+        <p:txBody>
+          <a:bodyPr wrap="square">
+            <a:spAutoFit/>
+          </a:bodyPr>
+          <a:lstStyle/>
+          <a:p>
+            <a:pPr algn="l"/>
+            <a:r>
+              <a:rPr sz="1000" b="0">
+                <a:solidFill>
+                  <a:srgbClr val="FFFFFF"/>
+                </a:solidFill>
+              </a:rPr>
+              <a:t>① 11개 지표 각각에 가중치를 부여</a:t>
+            </a:r>
+          </a:p>
+        </p:txBody>
+      </p:sp>
+      <p:sp>
+        <p:nvSpPr>
+          <p:cNvPr id="16" name="TextBox 15"/>
+          <p:cNvSpPr txBox="1"/>
+          <p:nvPr/>
+        </p:nvSpPr>
+        <p:spPr>
+          <a:xfrm>
+            <a:off x="4864608" y="2450592"/>
+            <a:ext cx="3977639" cy="365760"/>
+          </a:xfrm>
+          <a:prstGeom prst="rect">
+            <a:avLst/>
+          </a:prstGeom>
+          <a:noFill/>
+        </p:spPr>
+        <p:txBody>
+          <a:bodyPr wrap="square">
+            <a:spAutoFit/>
+          </a:bodyPr>
+          <a:lstStyle/>
+          <a:p>
+            <a:pPr algn="l"/>
+            <a:r>
+              <a:rPr sz="1000" b="0">
+                <a:solidFill>
+                  <a:srgbClr val="FFFFFF"/>
+                </a:solidFill>
+              </a:rPr>
+              <a:t>② 가중치×지표를 모두 더함 = 예측값</a:t>
+            </a:r>
+          </a:p>
+        </p:txBody>
+      </p:sp>
+      <p:sp>
+        <p:nvSpPr>
+          <p:cNvPr id="17" name="TextBox 16"/>
+          <p:cNvSpPr txBox="1"/>
+          <p:nvPr/>
+        </p:nvSpPr>
+        <p:spPr>
+          <a:xfrm>
+            <a:off x="4864608" y="2852928"/>
+            <a:ext cx="3977639" cy="365760"/>
+          </a:xfrm>
+          <a:prstGeom prst="rect">
+            <a:avLst/>
+          </a:prstGeom>
+          <a:noFill/>
+        </p:spPr>
+        <p:txBody>
+          <a:bodyPr wrap="square">
+            <a:spAutoFit/>
+          </a:bodyPr>
+          <a:lstStyle/>
+          <a:p>
+            <a:pPr algn="l"/>
+            <a:r>
+              <a:rPr sz="1000" b="0">
+                <a:solidFill>
+                  <a:srgbClr val="FFFFFF"/>
+                </a:solidFill>
+              </a:rPr>
+              <a:t>③ 오차를 최소화하는 가중치를 학습</a:t>
+            </a:r>
+          </a:p>
+        </p:txBody>
+      </p:sp>
+      <p:sp>
+        <p:nvSpPr>
+          <p:cNvPr id="18" name="TextBox 17"/>
+          <p:cNvSpPr txBox="1"/>
+          <p:nvPr/>
+        </p:nvSpPr>
+        <p:spPr>
+          <a:xfrm>
+            <a:off x="4864608" y="3255264"/>
+            <a:ext cx="3977639" cy="365760"/>
+          </a:xfrm>
+          <a:prstGeom prst="rect">
+            <a:avLst/>
+          </a:prstGeom>
+          <a:noFill/>
+        </p:spPr>
+        <p:txBody>
+          <a:bodyPr wrap="square">
+            <a:spAutoFit/>
+          </a:bodyPr>
+          <a:lstStyle/>
+          <a:p>
+            <a:pPr algn="l"/>
+            <a:r>
+              <a:rPr sz="1000" b="0">
+                <a:solidFill>
+                  <a:srgbClr val="FFFFFF"/>
+                </a:solidFill>
+              </a:rPr>
+              <a:t>④ 가중치를 보면 어떤 지표가</a:t>
+            </a:r>
+          </a:p>
+        </p:txBody>
+      </p:sp>
+      <p:sp>
+        <p:nvSpPr>
+          <p:cNvPr id="19" name="TextBox 18"/>
+          <p:cNvSpPr txBox="1"/>
+          <p:nvPr/>
+        </p:nvSpPr>
+        <p:spPr>
+          <a:xfrm>
+            <a:off x="4864608" y="3657600"/>
+            <a:ext cx="3977639" cy="365760"/>
+          </a:xfrm>
+          <a:prstGeom prst="rect">
+            <a:avLst/>
+          </a:prstGeom>
+          <a:noFill/>
+        </p:spPr>
+        <p:txBody>
+          <a:bodyPr wrap="square">
+            <a:spAutoFit/>
+          </a:bodyPr>
+          <a:lstStyle/>
+          <a:p>
+            <a:pPr algn="l"/>
+            <a:r>
+              <a:rPr sz="1000" b="0">
+                <a:solidFill>
+                  <a:srgbClr val="FFFFFF"/>
+                </a:solidFill>
+              </a:rPr>
+              <a:t>   중요한지 바로 알 수 있음</a:t>
+            </a:r>
+          </a:p>
+        </p:txBody>
+      </p:sp>
+      <p:sp>
+        <p:nvSpPr>
+          <p:cNvPr id="20" name="Rectangle 19"/>
+          <p:cNvSpPr/>
+          <p:nvPr/>
+        </p:nvSpPr>
+        <p:spPr>
+          <a:xfrm>
+            <a:off x="164592" y="4370832"/>
+            <a:ext cx="4251960" cy="1664208"/>
+          </a:xfrm>
+          <a:prstGeom prst="rect">
+            <a:avLst/>
+          </a:prstGeom>
+          <a:solidFill>
+            <a:srgbClr val="10261C"/>
+          </a:solidFill>
+          <a:ln>
+            <a:noFill/>
+          </a:ln>
+        </p:spPr>
+        <p:style>
+          <a:lnRef idx="1">
+            <a:schemeClr val="accent1"/>
+          </a:lnRef>
+          <a:fillRef idx="3">
+            <a:schemeClr val="accent1"/>
+          </a:fillRef>
+          <a:effectRef idx="2">
+            <a:schemeClr val="accent1"/>
+          </a:effectRef>
+          <a:fontRef idx="minor">
+            <a:schemeClr val="lt1"/>
+          </a:fontRef>
+        </p:style>
+        <p:txBody>
+          <a:bodyPr rtlCol="0" anchor="ctr"/>
+          <a:lstStyle/>
+          <a:p>
+            <a:pPr algn="ctr"/>
+          </a:p>
+        </p:txBody>
+      </p:sp>
+      <p:sp>
+        <p:nvSpPr>
+          <p:cNvPr id="21" name="TextBox 20"/>
+          <p:cNvSpPr txBox="1"/>
+          <p:nvPr/>
+        </p:nvSpPr>
+        <p:spPr>
+          <a:xfrm>
+            <a:off x="292608" y="4434840"/>
+            <a:ext cx="1828800" cy="329184"/>
+          </a:xfrm>
+          <a:prstGeom prst="rect">
+            <a:avLst/>
+          </a:prstGeom>
+          <a:noFill/>
+        </p:spPr>
+        <p:txBody>
+          <a:bodyPr wrap="square">
+            <a:spAutoFit/>
+          </a:bodyPr>
+          <a:lstStyle/>
+          <a:p>
+            <a:pPr algn="l"/>
+            <a:r>
+              <a:rPr sz="1100" b="1">
+                <a:solidFill>
+                  <a:srgbClr val="4ADE80"/>
+                </a:solidFill>
+              </a:rPr>
+              <a:t>✅  장점</a:t>
+            </a:r>
+          </a:p>
+        </p:txBody>
+      </p:sp>
+      <p:sp>
+        <p:nvSpPr>
+          <p:cNvPr id="22" name="TextBox 21"/>
+          <p:cNvSpPr txBox="1"/>
+          <p:nvPr/>
+        </p:nvSpPr>
+        <p:spPr>
+          <a:xfrm>
+            <a:off x="292608" y="4791456"/>
+            <a:ext cx="4023360" cy="347472"/>
+          </a:xfrm>
+          <a:prstGeom prst="rect">
+            <a:avLst/>
+          </a:prstGeom>
+          <a:noFill/>
+        </p:spPr>
+        <p:txBody>
+          <a:bodyPr wrap="square">
+            <a:spAutoFit/>
+          </a:bodyPr>
+          <a:lstStyle/>
+          <a:p>
+            <a:pPr algn="l"/>
+            <a:r>
+              <a:rPr sz="1000" b="0">
+                <a:solidFill>
+                  <a:srgbClr val="FFFFFF"/>
+                </a:solidFill>
+              </a:rPr>
+              <a:t>• 학습 시간 0.1초 미만 — 9개 중 가장 빠름</a:t>
+            </a:r>
+          </a:p>
+        </p:txBody>
+      </p:sp>
+      <p:sp>
+        <p:nvSpPr>
+          <p:cNvPr id="23" name="TextBox 22"/>
+          <p:cNvSpPr txBox="1"/>
+          <p:nvPr/>
+        </p:nvSpPr>
+        <p:spPr>
+          <a:xfrm>
+            <a:off x="292608" y="5157216"/>
+            <a:ext cx="4023360" cy="347472"/>
+          </a:xfrm>
+          <a:prstGeom prst="rect">
+            <a:avLst/>
+          </a:prstGeom>
+          <a:noFill/>
+        </p:spPr>
+        <p:txBody>
+          <a:bodyPr wrap="square">
+            <a:spAutoFit/>
+          </a:bodyPr>
+          <a:lstStyle/>
+          <a:p>
+            <a:pPr algn="l"/>
+            <a:r>
+              <a:rPr sz="1000" b="0">
+                <a:solidFill>
+                  <a:srgbClr val="FFFFFF"/>
+                </a:solidFill>
+              </a:rPr>
+              <a:t>• 가중치를 보면 지표별 영향력 즉시 파악</a:t>
+            </a:r>
+          </a:p>
+        </p:txBody>
+      </p:sp>
+      <p:sp>
+        <p:nvSpPr>
+          <p:cNvPr id="24" name="TextBox 23"/>
+          <p:cNvSpPr txBox="1"/>
+          <p:nvPr/>
+        </p:nvSpPr>
+        <p:spPr>
+          <a:xfrm>
+            <a:off x="292608" y="5522976"/>
+            <a:ext cx="4023360" cy="347472"/>
+          </a:xfrm>
+          <a:prstGeom prst="rect">
+            <a:avLst/>
+          </a:prstGeom>
+          <a:noFill/>
+        </p:spPr>
+        <p:txBody>
+          <a:bodyPr wrap="square">
+            <a:spAutoFit/>
+          </a:bodyPr>
+          <a:lstStyle/>
+          <a:p>
+            <a:pPr algn="l"/>
+            <a:r>
+              <a:rPr sz="1000" b="0">
+                <a:solidFill>
+                  <a:srgbClr val="FFFFFF"/>
+                </a:solidFill>
+              </a:rPr>
+              <a:t>• 다른 모델의 성능 비교 기준선 역할</a:t>
+            </a:r>
+          </a:p>
+        </p:txBody>
+      </p:sp>
+      <p:sp>
+        <p:nvSpPr>
+          <p:cNvPr id="25" name="Rectangle 24"/>
+          <p:cNvSpPr/>
+          <p:nvPr/>
+        </p:nvSpPr>
+        <p:spPr>
+          <a:xfrm>
+            <a:off x="4727448" y="4370832"/>
+            <a:ext cx="4251960" cy="1664208"/>
+          </a:xfrm>
+          <a:prstGeom prst="rect">
+            <a:avLst/>
+          </a:prstGeom>
+          <a:solidFill>
+            <a:srgbClr val="261010"/>
+          </a:solidFill>
+          <a:ln>
+            <a:noFill/>
+          </a:ln>
+        </p:spPr>
+        <p:style>
+          <a:lnRef idx="1">
+            <a:schemeClr val="accent1"/>
+          </a:lnRef>
+          <a:fillRef idx="3">
+            <a:schemeClr val="accent1"/>
+          </a:fillRef>
+          <a:effectRef idx="2">
+            <a:schemeClr val="accent1"/>
+          </a:effectRef>
+          <a:fontRef idx="minor">
+            <a:schemeClr val="lt1"/>
+          </a:fontRef>
+        </p:style>
+        <p:txBody>
+          <a:bodyPr rtlCol="0" anchor="ctr"/>
+          <a:lstStyle/>
+          <a:p>
+            <a:pPr algn="ctr"/>
+          </a:p>
+        </p:txBody>
+      </p:sp>
+      <p:sp>
+        <p:nvSpPr>
+          <p:cNvPr id="26" name="TextBox 25"/>
+          <p:cNvSpPr txBox="1"/>
+          <p:nvPr/>
+        </p:nvSpPr>
+        <p:spPr>
+          <a:xfrm>
+            <a:off x="4864608" y="4434840"/>
+            <a:ext cx="1828800" cy="329184"/>
+          </a:xfrm>
+          <a:prstGeom prst="rect">
+            <a:avLst/>
+          </a:prstGeom>
+          <a:noFill/>
+        </p:spPr>
+        <p:txBody>
+          <a:bodyPr wrap="square">
+            <a:spAutoFit/>
+          </a:bodyPr>
+          <a:lstStyle/>
+          <a:p>
+            <a:pPr algn="l"/>
+            <a:r>
+              <a:rPr sz="1100" b="1">
+                <a:solidFill>
+                  <a:srgbClr val="F87171"/>
+                </a:solidFill>
+              </a:rPr>
+              <a:t>⚠  단점</a:t>
+            </a:r>
+          </a:p>
+        </p:txBody>
+      </p:sp>
+      <p:sp>
+        <p:nvSpPr>
+          <p:cNvPr id="27" name="TextBox 26"/>
+          <p:cNvSpPr txBox="1"/>
+          <p:nvPr/>
+        </p:nvSpPr>
+        <p:spPr>
+          <a:xfrm>
+            <a:off x="4864608" y="4791456"/>
+            <a:ext cx="4023360" cy="347472"/>
+          </a:xfrm>
+          <a:prstGeom prst="rect">
+            <a:avLst/>
+          </a:prstGeom>
+          <a:noFill/>
+        </p:spPr>
+        <p:txBody>
+          <a:bodyPr wrap="square">
+            <a:spAutoFit/>
+          </a:bodyPr>
+          <a:lstStyle/>
+          <a:p>
+            <a:pPr algn="l"/>
+            <a:r>
+              <a:rPr sz="1000" b="0">
+                <a:solidFill>
+                  <a:srgbClr val="FFFFFF"/>
+                </a:solidFill>
+              </a:rPr>
+              <a:t>• "RSI 높고 거래량 급증" 같은 조합 효과 미반영</a:t>
+            </a:r>
+          </a:p>
+        </p:txBody>
+      </p:sp>
+      <p:sp>
+        <p:nvSpPr>
+          <p:cNvPr id="28" name="TextBox 27"/>
+          <p:cNvSpPr txBox="1"/>
+          <p:nvPr/>
+        </p:nvSpPr>
+        <p:spPr>
+          <a:xfrm>
+            <a:off x="4864608" y="5157216"/>
+            <a:ext cx="4023360" cy="347472"/>
+          </a:xfrm>
+          <a:prstGeom prst="rect">
+            <a:avLst/>
+          </a:prstGeom>
+          <a:noFill/>
+        </p:spPr>
+        <p:txBody>
+          <a:bodyPr wrap="square">
+            <a:spAutoFit/>
+          </a:bodyPr>
+          <a:lstStyle/>
+          <a:p>
+            <a:pPr algn="l"/>
+            <a:r>
+              <a:rPr sz="1000" b="0">
+                <a:solidFill>
+                  <a:srgbClr val="FFFFFF"/>
+                </a:solidFill>
+              </a:rPr>
+              <a:t>• 비선형 복잡한 시장 패턴 표현 한계</a:t>
+            </a:r>
+          </a:p>
+        </p:txBody>
+      </p:sp>
+      <p:sp>
+        <p:nvSpPr>
+          <p:cNvPr id="29" name="TextBox 28"/>
+          <p:cNvSpPr txBox="1"/>
+          <p:nvPr/>
+        </p:nvSpPr>
+        <p:spPr>
+          <a:xfrm>
+            <a:off x="4864608" y="5522976"/>
+            <a:ext cx="4023360" cy="347472"/>
+          </a:xfrm>
+          <a:prstGeom prst="rect">
+            <a:avLst/>
+          </a:prstGeom>
+          <a:noFill/>
+        </p:spPr>
+        <p:txBody>
+          <a:bodyPr wrap="square">
+            <a:spAutoFit/>
+          </a:bodyPr>
+          <a:lstStyle/>
+          <a:p>
+            <a:pPr algn="l"/>
+            <a:r>
+              <a:rPr sz="1000" b="0">
+                <a:solidFill>
+                  <a:srgbClr val="FFFFFF"/>
+                </a:solidFill>
+              </a:rPr>
+              <a:t>• 규제 없으면 과적합 위험 (→ Ridge/Lasso)</a:t>
+            </a:r>
+          </a:p>
+        </p:txBody>
+      </p:sp>
+      <p:sp>
+        <p:nvSpPr>
+          <p:cNvPr id="30" name="Rectangle 29"/>
+          <p:cNvSpPr/>
+          <p:nvPr/>
+        </p:nvSpPr>
+        <p:spPr>
+          <a:xfrm>
+            <a:off x="0" y="6199632"/>
+            <a:ext cx="9144000" cy="201168"/>
+          </a:xfrm>
+          <a:prstGeom prst="rect">
+            <a:avLst/>
+          </a:prstGeom>
+          <a:solidFill>
+            <a:srgbClr val="162137"/>
+          </a:solidFill>
+          <a:ln>
+            <a:noFill/>
+          </a:ln>
+        </p:spPr>
+        <p:style>
+          <a:lnRef idx="1">
+            <a:schemeClr val="accent1"/>
+          </a:lnRef>
+          <a:fillRef idx="3">
+            <a:schemeClr val="accent1"/>
+          </a:fillRef>
+          <a:effectRef idx="2">
+            <a:schemeClr val="accent1"/>
+          </a:effectRef>
+          <a:fontRef idx="minor">
+            <a:schemeClr val="lt1"/>
+          </a:fontRef>
+        </p:style>
+        <p:txBody>
+          <a:bodyPr rtlCol="0" anchor="ctr"/>
+          <a:lstStyle/>
+          <a:p>
+            <a:pPr algn="ctr"/>
+          </a:p>
+        </p:txBody>
+      </p:sp>
+      <p:sp>
+        <p:nvSpPr>
+          <p:cNvPr id="31" name="TextBox 30"/>
+          <p:cNvSpPr txBox="1"/>
+          <p:nvPr/>
+        </p:nvSpPr>
+        <p:spPr>
+          <a:xfrm>
+            <a:off x="182880" y="6217920"/>
+            <a:ext cx="6858000" cy="164592"/>
+          </a:xfrm>
+          <a:prstGeom prst="rect">
+            <a:avLst/>
+          </a:prstGeom>
+          <a:noFill/>
+        </p:spPr>
+        <p:txBody>
+          <a:bodyPr wrap="square">
+            <a:spAutoFit/>
+          </a:bodyPr>
+          <a:lstStyle/>
+          <a:p>
+            <a:pPr algn="l"/>
+            <a:r>
+              <a:rPr sz="800" b="0">
+                <a:solidFill>
+                  <a:srgbClr val="94A3B8"/>
+                </a:solidFill>
+              </a:rPr>
+              <a:t>주식 등락률 예측 AI 모델 개발</a:t>
+            </a:r>
+          </a:p>
+        </p:txBody>
+      </p:sp>
+      <p:sp>
+        <p:nvSpPr>
+          <p:cNvPr id="32" name="TextBox 31"/>
+          <p:cNvSpPr txBox="1"/>
+          <p:nvPr/>
+        </p:nvSpPr>
+        <p:spPr>
+          <a:xfrm>
+            <a:off x="7315200" y="6217920"/>
+            <a:ext cx="1645920" cy="164592"/>
+          </a:xfrm>
+          <a:prstGeom prst="rect">
+            <a:avLst/>
+          </a:prstGeom>
+          <a:noFill/>
+        </p:spPr>
+        <p:txBody>
+          <a:bodyPr wrap="square">
+            <a:spAutoFit/>
+          </a:bodyPr>
+          <a:lstStyle/>
+          <a:p>
+            <a:pPr algn="r"/>
+            <a:r>
+              <a:rPr sz="800" b="0">
+                <a:solidFill>
+                  <a:srgbClr val="94A3B8"/>
+                </a:solidFill>
+              </a:rPr>
+              <a:t>10 / 22</a:t>
+            </a:r>
+          </a:p>
+        </p:txBody>
+      </p:sp>
+    </p:spTree>
+  </p:cSld>
+  <p:clrMapOvr>
+    <a:masterClrMapping/>
+  </p:clrMapOvr>
+</p:sld>
+</file>
+
+<file path=ppt/slides/slide14.xml><?xml version="1.0" encoding="utf-8"?>
+<p:sld xmlns:a="http://schemas.openxmlformats.org/drawingml/2006/main" xmlns:p="http://schemas.openxmlformats.org/presentationml/2006/main" xmlns:r="http://schemas.openxmlformats.org/officeDocument/2006/relationships">
+  <p:cSld>
+    <p:bg>
+      <p:bgPr>
+        <a:solidFill>
+          <a:srgbClr val="0F172A"/>
+        </a:solidFill>
+        <a:effectLst/>
+      </p:bgPr>
+    </p:bg>
+    <p:spTree>
+      <p:nvGrpSpPr>
+        <p:cNvPr id="1" name=""/>
+        <p:cNvGrpSpPr/>
+        <p:nvPr/>
+      </p:nvGrpSpPr>
+      <p:grpSpPr/>
+      <p:sp>
+        <p:nvSpPr>
+          <p:cNvPr id="2" name="Rectangle 1"/>
+          <p:cNvSpPr/>
+          <p:nvPr/>
+        </p:nvSpPr>
+        <p:spPr>
+          <a:xfrm>
+            <a:off x="0" y="0"/>
+            <a:ext cx="9144000" cy="1005840"/>
+          </a:xfrm>
+          <a:prstGeom prst="rect">
+            <a:avLst/>
+          </a:prstGeom>
+          <a:solidFill>
+            <a:srgbClr val="EAA817"/>
+          </a:solidFill>
+          <a:ln>
+            <a:noFill/>
+          </a:ln>
+        </p:spPr>
+        <p:style>
+          <a:lnRef idx="1">
+            <a:schemeClr val="accent1"/>
+          </a:lnRef>
+          <a:fillRef idx="3">
+            <a:schemeClr val="accent1"/>
+          </a:fillRef>
+          <a:effectRef idx="2">
+            <a:schemeClr val="accent1"/>
+          </a:effectRef>
+          <a:fontRef idx="minor">
+            <a:schemeClr val="lt1"/>
+          </a:fontRef>
+        </p:style>
+        <p:txBody>
+          <a:bodyPr rtlCol="0" anchor="ctr"/>
+          <a:lstStyle/>
+          <a:p>
+            <a:pPr algn="ctr"/>
+          </a:p>
+        </p:txBody>
+      </p:sp>
+      <p:sp>
+        <p:nvSpPr>
+          <p:cNvPr id="3" name="Rectangle 2"/>
+          <p:cNvSpPr/>
+          <p:nvPr/>
+        </p:nvSpPr>
+        <p:spPr>
+          <a:xfrm>
+            <a:off x="164592" y="146304"/>
+            <a:ext cx="1188720" cy="384048"/>
+          </a:xfrm>
+          <a:prstGeom prst="rect">
+            <a:avLst/>
+          </a:prstGeom>
+          <a:solidFill>
+            <a:srgbClr val="0F172A"/>
+          </a:solidFill>
+          <a:ln>
+            <a:noFill/>
+          </a:ln>
+        </p:spPr>
+        <p:style>
+          <a:lnRef idx="1">
+            <a:schemeClr val="accent1"/>
+          </a:lnRef>
+          <a:fillRef idx="3">
+            <a:schemeClr val="accent1"/>
+          </a:fillRef>
+          <a:effectRef idx="2">
+            <a:schemeClr val="accent1"/>
+          </a:effectRef>
+          <a:fontRef idx="minor">
+            <a:schemeClr val="lt1"/>
+          </a:fontRef>
+        </p:style>
+        <p:txBody>
+          <a:bodyPr rtlCol="0" anchor="ctr"/>
+          <a:lstStyle/>
+          <a:p>
+            <a:pPr algn="ctr"/>
+          </a:p>
+        </p:txBody>
+      </p:sp>
+      <p:sp>
+        <p:nvSpPr>
+          <p:cNvPr id="4" name="TextBox 3"/>
+          <p:cNvSpPr txBox="1"/>
+          <p:nvPr/>
+        </p:nvSpPr>
+        <p:spPr>
+          <a:xfrm>
+            <a:off x="164592" y="146304"/>
+            <a:ext cx="1188720" cy="384048"/>
+          </a:xfrm>
+          <a:prstGeom prst="rect">
+            <a:avLst/>
+          </a:prstGeom>
+          <a:noFill/>
+        </p:spPr>
+        <p:txBody>
+          <a:bodyPr wrap="square">
+            <a:spAutoFit/>
+          </a:bodyPr>
+          <a:lstStyle/>
+          <a:p>
+            <a:pPr algn="ctr"/>
+            <a:r>
+              <a:rPr sz="900" b="1">
+                <a:solidFill>
+                  <a:srgbClr val="EAA817"/>
+                </a:solidFill>
+              </a:rPr>
+              <a:t>선형 계열</a:t>
+            </a:r>
+          </a:p>
+        </p:txBody>
+      </p:sp>
+      <p:sp>
+        <p:nvSpPr>
+          <p:cNvPr id="5" name="TextBox 4"/>
+          <p:cNvSpPr txBox="1"/>
+          <p:nvPr/>
+        </p:nvSpPr>
+        <p:spPr>
+          <a:xfrm>
+            <a:off x="1481328" y="73152"/>
+            <a:ext cx="6400800" cy="530352"/>
+          </a:xfrm>
+          <a:prstGeom prst="rect">
+            <a:avLst/>
+          </a:prstGeom>
+          <a:noFill/>
+        </p:spPr>
+        <p:txBody>
+          <a:bodyPr wrap="square">
+            <a:spAutoFit/>
+          </a:bodyPr>
+          <a:lstStyle/>
+          <a:p>
+            <a:pPr algn="l"/>
+            <a:r>
+              <a:rPr sz="2100" b="1">
+                <a:solidFill>
+                  <a:srgbClr val="0F172A"/>
+                </a:solidFill>
+              </a:rPr>
+              <a:t>Ridge 회귀</a:t>
+            </a:r>
+          </a:p>
+        </p:txBody>
+      </p:sp>
+      <p:sp>
+        <p:nvSpPr>
+          <p:cNvPr id="6" name="TextBox 5"/>
+          <p:cNvSpPr txBox="1"/>
+          <p:nvPr/>
+        </p:nvSpPr>
+        <p:spPr>
+          <a:xfrm>
+            <a:off x="1481328" y="585216"/>
+            <a:ext cx="6400800" cy="329184"/>
+          </a:xfrm>
+          <a:prstGeom prst="rect">
+            <a:avLst/>
+          </a:prstGeom>
+          <a:noFill/>
+        </p:spPr>
+        <p:txBody>
+          <a:bodyPr wrap="square">
+            <a:spAutoFit/>
+          </a:bodyPr>
+          <a:lstStyle/>
+          <a:p>
+            <a:pPr algn="l"/>
+            <a:r>
+              <a:rPr sz="1000" b="0">
+                <a:solidFill>
+                  <a:srgbClr val="1E293B"/>
+                </a:solidFill>
+              </a:rPr>
+              <a:t>선형 회귀 + "너무 극단적인 답을 내지 마" 제약</a:t>
+            </a:r>
+          </a:p>
+        </p:txBody>
+      </p:sp>
+      <p:sp>
+        <p:nvSpPr>
+          <p:cNvPr id="7" name="TextBox 6"/>
+          <p:cNvSpPr txBox="1"/>
+          <p:nvPr/>
+        </p:nvSpPr>
+        <p:spPr>
+          <a:xfrm>
+            <a:off x="7955279" y="73152"/>
+            <a:ext cx="1005840" cy="457200"/>
+          </a:xfrm>
+          <a:prstGeom prst="rect">
+            <a:avLst/>
+          </a:prstGeom>
+          <a:noFill/>
+        </p:spPr>
+        <p:txBody>
+          <a:bodyPr wrap="square">
+            <a:spAutoFit/>
+          </a:bodyPr>
+          <a:lstStyle/>
+          <a:p>
+            <a:pPr algn="r"/>
+            <a:r>
+              <a:rPr sz="1000" b="0">
+                <a:solidFill>
+                  <a:srgbClr val="1E293B"/>
+                </a:solidFill>
+              </a:rPr>
+              <a:t>11 / 22</a:t>
+            </a:r>
+          </a:p>
+        </p:txBody>
+      </p:sp>
+      <p:sp>
+        <p:nvSpPr>
+          <p:cNvPr id="8" name="Rectangle 7"/>
+          <p:cNvSpPr/>
+          <p:nvPr/>
+        </p:nvSpPr>
+        <p:spPr>
+          <a:xfrm>
+            <a:off x="0" y="1005840"/>
+            <a:ext cx="9144000" cy="475488"/>
+          </a:xfrm>
+          <a:prstGeom prst="rect">
+            <a:avLst/>
+          </a:prstGeom>
+          <a:solidFill>
+            <a:srgbClr val="1E293B"/>
+          </a:solidFill>
+          <a:ln>
+            <a:noFill/>
+          </a:ln>
+        </p:spPr>
+        <p:style>
+          <a:lnRef idx="1">
+            <a:schemeClr val="accent1"/>
+          </a:lnRef>
+          <a:fillRef idx="3">
+            <a:schemeClr val="accent1"/>
+          </a:fillRef>
+          <a:effectRef idx="2">
+            <a:schemeClr val="accent1"/>
+          </a:effectRef>
+          <a:fontRef idx="minor">
+            <a:schemeClr val="lt1"/>
+          </a:fontRef>
+        </p:style>
+        <p:txBody>
+          <a:bodyPr rtlCol="0" anchor="ctr"/>
+          <a:lstStyle/>
+          <a:p>
+            <a:pPr algn="ctr"/>
+          </a:p>
+        </p:txBody>
+      </p:sp>
+      <p:sp>
+        <p:nvSpPr>
+          <p:cNvPr id="9" name="TextBox 8"/>
+          <p:cNvSpPr txBox="1"/>
+          <p:nvPr/>
+        </p:nvSpPr>
+        <p:spPr>
+          <a:xfrm>
+            <a:off x="228600" y="1051560"/>
+            <a:ext cx="8686800" cy="384048"/>
+          </a:xfrm>
+          <a:prstGeom prst="rect">
+            <a:avLst/>
+          </a:prstGeom>
+          <a:noFill/>
+        </p:spPr>
+        <p:txBody>
+          <a:bodyPr wrap="square">
+            <a:spAutoFit/>
+          </a:bodyPr>
+          <a:lstStyle/>
+          <a:p>
+            <a:pPr algn="l"/>
+            <a:r>
+              <a:rPr sz="1100" b="0">
+                <a:solidFill>
+                  <a:srgbClr val="EAA817"/>
+                </a:solidFill>
+              </a:rPr>
+              <a:t>한 줄 요약   |   "모든 가중치를 조금씩 줄여 안정적인 예측을 만든다"</a:t>
+            </a:r>
+          </a:p>
+        </p:txBody>
+      </p:sp>
+      <p:sp>
+        <p:nvSpPr>
+          <p:cNvPr id="10" name="Rectangle 9"/>
+          <p:cNvSpPr/>
+          <p:nvPr/>
+        </p:nvSpPr>
+        <p:spPr>
+          <a:xfrm>
+            <a:off x="164592" y="1600200"/>
+            <a:ext cx="4251960" cy="2651760"/>
+          </a:xfrm>
+          <a:prstGeom prst="rect">
+            <a:avLst/>
+          </a:prstGeom>
+          <a:solidFill>
+            <a:srgbClr val="162137"/>
+          </a:solidFill>
+          <a:ln>
+            <a:noFill/>
+          </a:ln>
+        </p:spPr>
+        <p:style>
+          <a:lnRef idx="1">
+            <a:schemeClr val="accent1"/>
+          </a:lnRef>
+          <a:fillRef idx="3">
+            <a:schemeClr val="accent1"/>
+          </a:fillRef>
+          <a:effectRef idx="2">
+            <a:schemeClr val="accent1"/>
+          </a:effectRef>
+          <a:fontRef idx="minor">
+            <a:schemeClr val="lt1"/>
+          </a:fontRef>
+        </p:style>
+        <p:txBody>
+          <a:bodyPr rtlCol="0" anchor="ctr"/>
+          <a:lstStyle/>
+          <a:p>
+            <a:pPr algn="ctr"/>
+          </a:p>
+        </p:txBody>
+      </p:sp>
+      <p:sp>
+        <p:nvSpPr>
+          <p:cNvPr id="11" name="TextBox 10"/>
+          <p:cNvSpPr txBox="1"/>
+          <p:nvPr/>
+        </p:nvSpPr>
+        <p:spPr>
+          <a:xfrm>
+            <a:off x="292608" y="1664208"/>
+            <a:ext cx="3977639" cy="347472"/>
+          </a:xfrm>
+          <a:prstGeom prst="rect">
+            <a:avLst/>
+          </a:prstGeom>
+          <a:noFill/>
+        </p:spPr>
+        <p:txBody>
+          <a:bodyPr wrap="square">
+            <a:spAutoFit/>
+          </a:bodyPr>
+          <a:lstStyle/>
+          <a:p>
+            <a:pPr algn="l"/>
+            <a:r>
+              <a:rPr sz="1100" b="1">
+                <a:solidFill>
+                  <a:srgbClr val="EAA817"/>
+                </a:solidFill>
+              </a:rPr>
+              <a:t>비유로 이해하기</a:t>
+            </a:r>
+          </a:p>
+        </p:txBody>
+      </p:sp>
+      <p:sp>
+        <p:nvSpPr>
+          <p:cNvPr id="12" name="TextBox 11"/>
+          <p:cNvSpPr txBox="1"/>
+          <p:nvPr/>
+        </p:nvSpPr>
+        <p:spPr>
+          <a:xfrm>
+            <a:off x="292608" y="2048256"/>
+            <a:ext cx="3977639" cy="2121408"/>
+          </a:xfrm>
+          <a:prstGeom prst="rect">
+            <a:avLst/>
+          </a:prstGeom>
+          <a:noFill/>
+        </p:spPr>
+        <p:txBody>
+          <a:bodyPr wrap="square">
+            <a:spAutoFit/>
+          </a:bodyPr>
+          <a:lstStyle/>
+          <a:p>
+            <a:pPr algn="l"/>
+            <a:r>
+              <a:rPr sz="1050" b="0">
+                <a:solidFill>
+                  <a:srgbClr val="FFFFFF"/>
+                </a:solidFill>
+              </a:rPr>
+              <a:t>"답안을 너무 극단적으로 쓰지 마세요"
+라는 채점 규정을 상상해 보세요.
+선형 회귀는 가중치가 지나치게 클 수 있어요.
+→ "이 지표가 무조건 1,000% 중요해!"
+Ridge는 가중치가 커질수록 페널티를 주어
+"모든 지표를 균형 있게 활용"하도록 합니다.
+Alpha(α)가 클수록 가중치를 더 강하게 억제
+→ 탐색 결과: α = 0.1 선택</a:t>
+            </a:r>
+          </a:p>
+        </p:txBody>
+      </p:sp>
+      <p:sp>
+        <p:nvSpPr>
+          <p:cNvPr id="13" name="Rectangle 12"/>
+          <p:cNvSpPr/>
+          <p:nvPr/>
+        </p:nvSpPr>
+        <p:spPr>
+          <a:xfrm>
+            <a:off x="4727448" y="1600200"/>
+            <a:ext cx="4251960" cy="2651760"/>
+          </a:xfrm>
+          <a:prstGeom prst="rect">
+            <a:avLst/>
+          </a:prstGeom>
+          <a:solidFill>
+            <a:srgbClr val="162137"/>
+          </a:solidFill>
+          <a:ln>
+            <a:noFill/>
+          </a:ln>
+        </p:spPr>
+        <p:style>
+          <a:lnRef idx="1">
+            <a:schemeClr val="accent1"/>
+          </a:lnRef>
+          <a:fillRef idx="3">
+            <a:schemeClr val="accent1"/>
+          </a:fillRef>
+          <a:effectRef idx="2">
+            <a:schemeClr val="accent1"/>
+          </a:effectRef>
+          <a:fontRef idx="minor">
+            <a:schemeClr val="lt1"/>
+          </a:fontRef>
+        </p:style>
+        <p:txBody>
+          <a:bodyPr rtlCol="0" anchor="ctr"/>
+          <a:lstStyle/>
+          <a:p>
+            <a:pPr algn="ctr"/>
+          </a:p>
+        </p:txBody>
+      </p:sp>
+      <p:sp>
+        <p:nvSpPr>
+          <p:cNvPr id="14" name="TextBox 13"/>
+          <p:cNvSpPr txBox="1"/>
+          <p:nvPr/>
+        </p:nvSpPr>
+        <p:spPr>
+          <a:xfrm>
+            <a:off x="4864608" y="1664208"/>
+            <a:ext cx="3977639" cy="347472"/>
+          </a:xfrm>
+          <a:prstGeom prst="rect">
+            <a:avLst/>
+          </a:prstGeom>
+          <a:noFill/>
+        </p:spPr>
+        <p:txBody>
+          <a:bodyPr wrap="square">
+            <a:spAutoFit/>
+          </a:bodyPr>
+          <a:lstStyle/>
+          <a:p>
+            <a:pPr algn="l"/>
+            <a:r>
+              <a:rPr sz="1100" b="1">
+                <a:solidFill>
+                  <a:srgbClr val="EAA817"/>
+                </a:solidFill>
+              </a:rPr>
+              <a:t>어떻게 작동하나</a:t>
+            </a:r>
+          </a:p>
+        </p:txBody>
+      </p:sp>
+      <p:sp>
+        <p:nvSpPr>
+          <p:cNvPr id="15" name="TextBox 14"/>
+          <p:cNvSpPr txBox="1"/>
+          <p:nvPr/>
+        </p:nvSpPr>
+        <p:spPr>
+          <a:xfrm>
+            <a:off x="4864608" y="2048256"/>
+            <a:ext cx="3977639" cy="365760"/>
+          </a:xfrm>
+          <a:prstGeom prst="rect">
+            <a:avLst/>
+          </a:prstGeom>
+          <a:noFill/>
+        </p:spPr>
+        <p:txBody>
+          <a:bodyPr wrap="square">
+            <a:spAutoFit/>
+          </a:bodyPr>
+          <a:lstStyle/>
+          <a:p>
+            <a:pPr algn="l"/>
+            <a:r>
+              <a:rPr sz="1000" b="0">
+                <a:solidFill>
+                  <a:srgbClr val="FFFFFF"/>
+                </a:solidFill>
+              </a:rPr>
+              <a:t>① 선형 회귀처럼 가중치 학습</a:t>
+            </a:r>
+          </a:p>
+        </p:txBody>
+      </p:sp>
+      <p:sp>
+        <p:nvSpPr>
+          <p:cNvPr id="16" name="TextBox 15"/>
+          <p:cNvSpPr txBox="1"/>
+          <p:nvPr/>
+        </p:nvSpPr>
+        <p:spPr>
+          <a:xfrm>
+            <a:off x="4864608" y="2450592"/>
+            <a:ext cx="3977639" cy="365760"/>
+          </a:xfrm>
+          <a:prstGeom prst="rect">
+            <a:avLst/>
+          </a:prstGeom>
+          <a:noFill/>
+        </p:spPr>
+        <p:txBody>
+          <a:bodyPr wrap="square">
+            <a:spAutoFit/>
+          </a:bodyPr>
+          <a:lstStyle/>
+          <a:p>
+            <a:pPr algn="l"/>
+            <a:r>
+              <a:rPr sz="1000" b="0">
+                <a:solidFill>
+                  <a:srgbClr val="FFFFFF"/>
+                </a:solidFill>
+              </a:rPr>
+              <a:t>② 가중치² 합산에 페널티 추가</a:t>
+            </a:r>
+          </a:p>
+        </p:txBody>
+      </p:sp>
+      <p:sp>
+        <p:nvSpPr>
+          <p:cNvPr id="17" name="TextBox 16"/>
+          <p:cNvSpPr txBox="1"/>
+          <p:nvPr/>
+        </p:nvSpPr>
+        <p:spPr>
+          <a:xfrm>
+            <a:off x="4864608" y="2852928"/>
+            <a:ext cx="3977639" cy="365760"/>
+          </a:xfrm>
+          <a:prstGeom prst="rect">
+            <a:avLst/>
+          </a:prstGeom>
+          <a:noFill/>
+        </p:spPr>
+        <p:txBody>
+          <a:bodyPr wrap="square">
+            <a:spAutoFit/>
+          </a:bodyPr>
+          <a:lstStyle/>
+          <a:p>
+            <a:pPr algn="l"/>
+            <a:r>
+              <a:rPr sz="1000" b="0">
+                <a:solidFill>
+                  <a:srgbClr val="FFFFFF"/>
+                </a:solidFill>
+              </a:rPr>
+              <a:t>③ Alpha(α)로 페널티 강도 조절</a:t>
+            </a:r>
+          </a:p>
+        </p:txBody>
+      </p:sp>
+      <p:sp>
+        <p:nvSpPr>
+          <p:cNvPr id="18" name="TextBox 17"/>
+          <p:cNvSpPr txBox="1"/>
+          <p:nvPr/>
+        </p:nvSpPr>
+        <p:spPr>
+          <a:xfrm>
+            <a:off x="4864608" y="3255264"/>
+            <a:ext cx="3977639" cy="365760"/>
+          </a:xfrm>
+          <a:prstGeom prst="rect">
+            <a:avLst/>
+          </a:prstGeom>
+          <a:noFill/>
+        </p:spPr>
+        <p:txBody>
+          <a:bodyPr wrap="square">
+            <a:spAutoFit/>
+          </a:bodyPr>
+          <a:lstStyle/>
+          <a:p>
+            <a:pPr algn="l"/>
+            <a:r>
+              <a:rPr sz="1000" b="0">
+                <a:solidFill>
+                  <a:srgbClr val="FFFFFF"/>
+                </a:solidFill>
+              </a:rPr>
+              <a:t>④ 모든 가중치를 0이 아닌</a:t>
+            </a:r>
+          </a:p>
+        </p:txBody>
+      </p:sp>
+      <p:sp>
+        <p:nvSpPr>
+          <p:cNvPr id="19" name="TextBox 18"/>
+          <p:cNvSpPr txBox="1"/>
+          <p:nvPr/>
+        </p:nvSpPr>
+        <p:spPr>
+          <a:xfrm>
+            <a:off x="4864608" y="3657600"/>
+            <a:ext cx="3977639" cy="365760"/>
+          </a:xfrm>
+          <a:prstGeom prst="rect">
+            <a:avLst/>
+          </a:prstGeom>
+          <a:noFill/>
+        </p:spPr>
+        <p:txBody>
+          <a:bodyPr wrap="square">
+            <a:spAutoFit/>
+          </a:bodyPr>
+          <a:lstStyle/>
+          <a:p>
+            <a:pPr algn="l"/>
+            <a:r>
+              <a:rPr sz="1000" b="0">
+                <a:solidFill>
+                  <a:srgbClr val="FFFFFF"/>
+                </a:solidFill>
+              </a:rPr>
+              <a:t>   작은 값으로 유지 (완전 제거 X)</a:t>
+            </a:r>
+          </a:p>
+        </p:txBody>
+      </p:sp>
+      <p:sp>
+        <p:nvSpPr>
+          <p:cNvPr id="20" name="Rectangle 19"/>
+          <p:cNvSpPr/>
+          <p:nvPr/>
+        </p:nvSpPr>
+        <p:spPr>
+          <a:xfrm>
+            <a:off x="164592" y="4370832"/>
+            <a:ext cx="4251960" cy="1664208"/>
+          </a:xfrm>
+          <a:prstGeom prst="rect">
+            <a:avLst/>
+          </a:prstGeom>
+          <a:solidFill>
+            <a:srgbClr val="10261C"/>
+          </a:solidFill>
+          <a:ln>
+            <a:noFill/>
+          </a:ln>
+        </p:spPr>
+        <p:style>
+          <a:lnRef idx="1">
+            <a:schemeClr val="accent1"/>
+          </a:lnRef>
+          <a:fillRef idx="3">
+            <a:schemeClr val="accent1"/>
+          </a:fillRef>
+          <a:effectRef idx="2">
+            <a:schemeClr val="accent1"/>
+          </a:effectRef>
+          <a:fontRef idx="minor">
+            <a:schemeClr val="lt1"/>
+          </a:fontRef>
+        </p:style>
+        <p:txBody>
+          <a:bodyPr rtlCol="0" anchor="ctr"/>
+          <a:lstStyle/>
+          <a:p>
+            <a:pPr algn="ctr"/>
+          </a:p>
+        </p:txBody>
+      </p:sp>
+      <p:sp>
+        <p:nvSpPr>
+          <p:cNvPr id="21" name="TextBox 20"/>
+          <p:cNvSpPr txBox="1"/>
+          <p:nvPr/>
+        </p:nvSpPr>
+        <p:spPr>
+          <a:xfrm>
+            <a:off x="292608" y="4434840"/>
+            <a:ext cx="1828800" cy="329184"/>
+          </a:xfrm>
+          <a:prstGeom prst="rect">
+            <a:avLst/>
+          </a:prstGeom>
+          <a:noFill/>
+        </p:spPr>
+        <p:txBody>
+          <a:bodyPr wrap="square">
+            <a:spAutoFit/>
+          </a:bodyPr>
+          <a:lstStyle/>
+          <a:p>
+            <a:pPr algn="l"/>
+            <a:r>
+              <a:rPr sz="1100" b="1">
+                <a:solidFill>
+                  <a:srgbClr val="4ADE80"/>
+                </a:solidFill>
+              </a:rPr>
+              <a:t>✅  장점</a:t>
+            </a:r>
+          </a:p>
+        </p:txBody>
+      </p:sp>
+      <p:sp>
+        <p:nvSpPr>
+          <p:cNvPr id="22" name="TextBox 21"/>
+          <p:cNvSpPr txBox="1"/>
+          <p:nvPr/>
+        </p:nvSpPr>
+        <p:spPr>
+          <a:xfrm>
+            <a:off x="292608" y="4791456"/>
+            <a:ext cx="4023360" cy="347472"/>
+          </a:xfrm>
+          <a:prstGeom prst="rect">
+            <a:avLst/>
+          </a:prstGeom>
+          <a:noFill/>
+        </p:spPr>
+        <p:txBody>
+          <a:bodyPr wrap="square">
+            <a:spAutoFit/>
+          </a:bodyPr>
+          <a:lstStyle/>
+          <a:p>
+            <a:pPr algn="l"/>
+            <a:r>
+              <a:rPr sz="1000" b="0">
+                <a:solidFill>
+                  <a:srgbClr val="FFFFFF"/>
+                </a:solidFill>
+              </a:rPr>
+              <a:t>• 과적합 방지 — 선형 회귀보다 안정적</a:t>
+            </a:r>
+          </a:p>
+        </p:txBody>
+      </p:sp>
+      <p:sp>
+        <p:nvSpPr>
+          <p:cNvPr id="23" name="TextBox 22"/>
+          <p:cNvSpPr txBox="1"/>
+          <p:nvPr/>
+        </p:nvSpPr>
+        <p:spPr>
+          <a:xfrm>
+            <a:off x="292608" y="5157216"/>
+            <a:ext cx="4023360" cy="347472"/>
+          </a:xfrm>
+          <a:prstGeom prst="rect">
+            <a:avLst/>
+          </a:prstGeom>
+          <a:noFill/>
+        </p:spPr>
+        <p:txBody>
+          <a:bodyPr wrap="square">
+            <a:spAutoFit/>
+          </a:bodyPr>
+          <a:lstStyle/>
+          <a:p>
+            <a:pPr algn="l"/>
+            <a:r>
+              <a:rPr sz="1000" b="0">
+                <a:solidFill>
+                  <a:srgbClr val="FFFFFF"/>
+                </a:solidFill>
+              </a:rPr>
+              <a:t>• 모든 지표를 균형 있게 조금씩 활용</a:t>
+            </a:r>
+          </a:p>
+        </p:txBody>
+      </p:sp>
+      <p:sp>
+        <p:nvSpPr>
+          <p:cNvPr id="24" name="TextBox 23"/>
+          <p:cNvSpPr txBox="1"/>
+          <p:nvPr/>
+        </p:nvSpPr>
+        <p:spPr>
+          <a:xfrm>
+            <a:off x="292608" y="5522976"/>
+            <a:ext cx="4023360" cy="347472"/>
+          </a:xfrm>
+          <a:prstGeom prst="rect">
+            <a:avLst/>
+          </a:prstGeom>
+          <a:noFill/>
+        </p:spPr>
+        <p:txBody>
+          <a:bodyPr wrap="square">
+            <a:spAutoFit/>
+          </a:bodyPr>
+          <a:lstStyle/>
+          <a:p>
+            <a:pPr algn="l"/>
+            <a:r>
+              <a:rPr sz="1000" b="0">
+                <a:solidFill>
+                  <a:srgbClr val="FFFFFF"/>
+                </a:solidFill>
+              </a:rPr>
+              <a:t>• 학습 시간 1초 미만</a:t>
+            </a:r>
+          </a:p>
+        </p:txBody>
+      </p:sp>
+      <p:sp>
+        <p:nvSpPr>
+          <p:cNvPr id="25" name="Rectangle 24"/>
+          <p:cNvSpPr/>
+          <p:nvPr/>
+        </p:nvSpPr>
+        <p:spPr>
+          <a:xfrm>
+            <a:off x="4727448" y="4370832"/>
+            <a:ext cx="4251960" cy="1664208"/>
+          </a:xfrm>
+          <a:prstGeom prst="rect">
+            <a:avLst/>
+          </a:prstGeom>
+          <a:solidFill>
+            <a:srgbClr val="261010"/>
+          </a:solidFill>
+          <a:ln>
+            <a:noFill/>
+          </a:ln>
+        </p:spPr>
+        <p:style>
+          <a:lnRef idx="1">
+            <a:schemeClr val="accent1"/>
+          </a:lnRef>
+          <a:fillRef idx="3">
+            <a:schemeClr val="accent1"/>
+          </a:fillRef>
+          <a:effectRef idx="2">
+            <a:schemeClr val="accent1"/>
+          </a:effectRef>
+          <a:fontRef idx="minor">
+            <a:schemeClr val="lt1"/>
+          </a:fontRef>
+        </p:style>
+        <p:txBody>
+          <a:bodyPr rtlCol="0" anchor="ctr"/>
+          <a:lstStyle/>
+          <a:p>
+            <a:pPr algn="ctr"/>
+          </a:p>
+        </p:txBody>
+      </p:sp>
+      <p:sp>
+        <p:nvSpPr>
+          <p:cNvPr id="26" name="TextBox 25"/>
+          <p:cNvSpPr txBox="1"/>
+          <p:nvPr/>
+        </p:nvSpPr>
+        <p:spPr>
+          <a:xfrm>
+            <a:off x="4864608" y="4434840"/>
+            <a:ext cx="1828800" cy="329184"/>
+          </a:xfrm>
+          <a:prstGeom prst="rect">
+            <a:avLst/>
+          </a:prstGeom>
+          <a:noFill/>
+        </p:spPr>
+        <p:txBody>
+          <a:bodyPr wrap="square">
+            <a:spAutoFit/>
+          </a:bodyPr>
+          <a:lstStyle/>
+          <a:p>
+            <a:pPr algn="l"/>
+            <a:r>
+              <a:rPr sz="1100" b="1">
+                <a:solidFill>
+                  <a:srgbClr val="F87171"/>
+                </a:solidFill>
+              </a:rPr>
+              <a:t>⚠  단점</a:t>
+            </a:r>
+          </a:p>
+        </p:txBody>
+      </p:sp>
+      <p:sp>
+        <p:nvSpPr>
+          <p:cNvPr id="27" name="TextBox 26"/>
+          <p:cNvSpPr txBox="1"/>
+          <p:nvPr/>
+        </p:nvSpPr>
+        <p:spPr>
+          <a:xfrm>
+            <a:off x="4864608" y="4791456"/>
+            <a:ext cx="4023360" cy="347472"/>
+          </a:xfrm>
+          <a:prstGeom prst="rect">
+            <a:avLst/>
+          </a:prstGeom>
+          <a:noFill/>
+        </p:spPr>
+        <p:txBody>
+          <a:bodyPr wrap="square">
+            <a:spAutoFit/>
+          </a:bodyPr>
+          <a:lstStyle/>
+          <a:p>
+            <a:pPr algn="l"/>
+            <a:r>
+              <a:rPr sz="1000" b="0">
+                <a:solidFill>
+                  <a:srgbClr val="FFFFFF"/>
+                </a:solidFill>
+              </a:rPr>
+              <a:t>• 불필요한 지표도 완전히 제거하지 않음</a:t>
+            </a:r>
+          </a:p>
+        </p:txBody>
+      </p:sp>
+      <p:sp>
+        <p:nvSpPr>
+          <p:cNvPr id="28" name="TextBox 27"/>
+          <p:cNvSpPr txBox="1"/>
+          <p:nvPr/>
+        </p:nvSpPr>
+        <p:spPr>
+          <a:xfrm>
+            <a:off x="4864608" y="5157216"/>
+            <a:ext cx="4023360" cy="347472"/>
+          </a:xfrm>
+          <a:prstGeom prst="rect">
+            <a:avLst/>
+          </a:prstGeom>
+          <a:noFill/>
+        </p:spPr>
+        <p:txBody>
+          <a:bodyPr wrap="square">
+            <a:spAutoFit/>
+          </a:bodyPr>
+          <a:lstStyle/>
+          <a:p>
+            <a:pPr algn="l"/>
+            <a:r>
+              <a:rPr sz="1000" b="0">
+                <a:solidFill>
+                  <a:srgbClr val="FFFFFF"/>
+                </a:solidFill>
+              </a:rPr>
+              <a:t>• Alpha 최적값을 별도 탐색해야 함</a:t>
+            </a:r>
+          </a:p>
+        </p:txBody>
+      </p:sp>
+      <p:sp>
+        <p:nvSpPr>
+          <p:cNvPr id="29" name="TextBox 28"/>
+          <p:cNvSpPr txBox="1"/>
+          <p:nvPr/>
+        </p:nvSpPr>
+        <p:spPr>
+          <a:xfrm>
+            <a:off x="4864608" y="5522976"/>
+            <a:ext cx="4023360" cy="347472"/>
+          </a:xfrm>
+          <a:prstGeom prst="rect">
+            <a:avLst/>
+          </a:prstGeom>
+          <a:noFill/>
+        </p:spPr>
+        <p:txBody>
+          <a:bodyPr wrap="square">
+            <a:spAutoFit/>
+          </a:bodyPr>
+          <a:lstStyle/>
+          <a:p>
+            <a:pPr algn="l"/>
+            <a:r>
+              <a:rPr sz="1000" b="0">
+                <a:solidFill>
+                  <a:srgbClr val="FFFFFF"/>
+                </a:solidFill>
+              </a:rPr>
+              <a:t>• 비선형 관계 표현 불가</a:t>
+            </a:r>
+          </a:p>
+        </p:txBody>
+      </p:sp>
+      <p:sp>
+        <p:nvSpPr>
+          <p:cNvPr id="30" name="Rectangle 29"/>
+          <p:cNvSpPr/>
+          <p:nvPr/>
+        </p:nvSpPr>
+        <p:spPr>
+          <a:xfrm>
+            <a:off x="0" y="6199632"/>
+            <a:ext cx="9144000" cy="201168"/>
+          </a:xfrm>
+          <a:prstGeom prst="rect">
+            <a:avLst/>
+          </a:prstGeom>
+          <a:solidFill>
+            <a:srgbClr val="162137"/>
+          </a:solidFill>
+          <a:ln>
+            <a:noFill/>
+          </a:ln>
+        </p:spPr>
+        <p:style>
+          <a:lnRef idx="1">
+            <a:schemeClr val="accent1"/>
+          </a:lnRef>
+          <a:fillRef idx="3">
+            <a:schemeClr val="accent1"/>
+          </a:fillRef>
+          <a:effectRef idx="2">
+            <a:schemeClr val="accent1"/>
+          </a:effectRef>
+          <a:fontRef idx="minor">
+            <a:schemeClr val="lt1"/>
+          </a:fontRef>
+        </p:style>
+        <p:txBody>
+          <a:bodyPr rtlCol="0" anchor="ctr"/>
+          <a:lstStyle/>
+          <a:p>
+            <a:pPr algn="ctr"/>
+          </a:p>
+        </p:txBody>
+      </p:sp>
+      <p:sp>
+        <p:nvSpPr>
+          <p:cNvPr id="31" name="TextBox 30"/>
+          <p:cNvSpPr txBox="1"/>
+          <p:nvPr/>
+        </p:nvSpPr>
+        <p:spPr>
+          <a:xfrm>
+            <a:off x="182880" y="6217920"/>
+            <a:ext cx="6858000" cy="164592"/>
+          </a:xfrm>
+          <a:prstGeom prst="rect">
+            <a:avLst/>
+          </a:prstGeom>
+          <a:noFill/>
+        </p:spPr>
+        <p:txBody>
+          <a:bodyPr wrap="square">
+            <a:spAutoFit/>
+          </a:bodyPr>
+          <a:lstStyle/>
+          <a:p>
+            <a:pPr algn="l"/>
+            <a:r>
+              <a:rPr sz="800" b="0">
+                <a:solidFill>
+                  <a:srgbClr val="94A3B8"/>
+                </a:solidFill>
+              </a:rPr>
+              <a:t>주식 등락률 예측 AI 모델 개발</a:t>
+            </a:r>
+          </a:p>
+        </p:txBody>
+      </p:sp>
+      <p:sp>
+        <p:nvSpPr>
+          <p:cNvPr id="32" name="TextBox 31"/>
+          <p:cNvSpPr txBox="1"/>
+          <p:nvPr/>
+        </p:nvSpPr>
+        <p:spPr>
+          <a:xfrm>
+            <a:off x="7315200" y="6217920"/>
+            <a:ext cx="1645920" cy="164592"/>
+          </a:xfrm>
+          <a:prstGeom prst="rect">
+            <a:avLst/>
+          </a:prstGeom>
+          <a:noFill/>
+        </p:spPr>
+        <p:txBody>
+          <a:bodyPr wrap="square">
+            <a:spAutoFit/>
+          </a:bodyPr>
+          <a:lstStyle/>
+          <a:p>
+            <a:pPr algn="r"/>
+            <a:r>
+              <a:rPr sz="800" b="0">
+                <a:solidFill>
+                  <a:srgbClr val="94A3B8"/>
+                </a:solidFill>
+              </a:rPr>
+              <a:t>11 / 22</a:t>
+            </a:r>
+          </a:p>
+        </p:txBody>
+      </p:sp>
+    </p:spTree>
+  </p:cSld>
+  <p:clrMapOvr>
+    <a:masterClrMapping/>
+  </p:clrMapOvr>
+</p:sld>
+</file>
+
+<file path=ppt/slides/slide15.xml><?xml version="1.0" encoding="utf-8"?>
+<p:sld xmlns:a="http://schemas.openxmlformats.org/drawingml/2006/main" xmlns:p="http://schemas.openxmlformats.org/presentationml/2006/main" xmlns:r="http://schemas.openxmlformats.org/officeDocument/2006/relationships">
+  <p:cSld>
+    <p:bg>
+      <p:bgPr>
+        <a:solidFill>
+          <a:srgbClr val="0F172A"/>
+        </a:solidFill>
+        <a:effectLst/>
+      </p:bgPr>
+    </p:bg>
+    <p:spTree>
+      <p:nvGrpSpPr>
+        <p:cNvPr id="1" name=""/>
+        <p:cNvGrpSpPr/>
+        <p:nvPr/>
+      </p:nvGrpSpPr>
+      <p:grpSpPr/>
+      <p:sp>
+        <p:nvSpPr>
+          <p:cNvPr id="2" name="Rectangle 1"/>
+          <p:cNvSpPr/>
+          <p:nvPr/>
+        </p:nvSpPr>
+        <p:spPr>
+          <a:xfrm>
+            <a:off x="0" y="0"/>
+            <a:ext cx="9144000" cy="1005840"/>
+          </a:xfrm>
+          <a:prstGeom prst="rect">
+            <a:avLst/>
+          </a:prstGeom>
+          <a:solidFill>
+            <a:srgbClr val="EAA817"/>
+          </a:solidFill>
+          <a:ln>
+            <a:noFill/>
+          </a:ln>
+        </p:spPr>
+        <p:style>
+          <a:lnRef idx="1">
+            <a:schemeClr val="accent1"/>
+          </a:lnRef>
+          <a:fillRef idx="3">
+            <a:schemeClr val="accent1"/>
+          </a:fillRef>
+          <a:effectRef idx="2">
+            <a:schemeClr val="accent1"/>
+          </a:effectRef>
+          <a:fontRef idx="minor">
+            <a:schemeClr val="lt1"/>
+          </a:fontRef>
+        </p:style>
+        <p:txBody>
+          <a:bodyPr rtlCol="0" anchor="ctr"/>
+          <a:lstStyle/>
+          <a:p>
+            <a:pPr algn="ctr"/>
+          </a:p>
+        </p:txBody>
+      </p:sp>
+      <p:sp>
+        <p:nvSpPr>
+          <p:cNvPr id="3" name="Rectangle 2"/>
+          <p:cNvSpPr/>
+          <p:nvPr/>
+        </p:nvSpPr>
+        <p:spPr>
+          <a:xfrm>
+            <a:off x="164592" y="146304"/>
+            <a:ext cx="1188720" cy="384048"/>
+          </a:xfrm>
+          <a:prstGeom prst="rect">
+            <a:avLst/>
+          </a:prstGeom>
+          <a:solidFill>
+            <a:srgbClr val="0F172A"/>
+          </a:solidFill>
+          <a:ln>
+            <a:noFill/>
+          </a:ln>
+        </p:spPr>
+        <p:style>
+          <a:lnRef idx="1">
+            <a:schemeClr val="accent1"/>
+          </a:lnRef>
+          <a:fillRef idx="3">
+            <a:schemeClr val="accent1"/>
+          </a:fillRef>
+          <a:effectRef idx="2">
+            <a:schemeClr val="accent1"/>
+          </a:effectRef>
+          <a:fontRef idx="minor">
+            <a:schemeClr val="lt1"/>
+          </a:fontRef>
+        </p:style>
+        <p:txBody>
+          <a:bodyPr rtlCol="0" anchor="ctr"/>
+          <a:lstStyle/>
+          <a:p>
+            <a:pPr algn="ctr"/>
+          </a:p>
+        </p:txBody>
+      </p:sp>
+      <p:sp>
+        <p:nvSpPr>
+          <p:cNvPr id="4" name="TextBox 3"/>
+          <p:cNvSpPr txBox="1"/>
+          <p:nvPr/>
+        </p:nvSpPr>
+        <p:spPr>
+          <a:xfrm>
+            <a:off x="164592" y="146304"/>
+            <a:ext cx="1188720" cy="384048"/>
+          </a:xfrm>
+          <a:prstGeom prst="rect">
+            <a:avLst/>
+          </a:prstGeom>
+          <a:noFill/>
+        </p:spPr>
+        <p:txBody>
+          <a:bodyPr wrap="square">
+            <a:spAutoFit/>
+          </a:bodyPr>
+          <a:lstStyle/>
+          <a:p>
+            <a:pPr algn="ctr"/>
+            <a:r>
+              <a:rPr sz="900" b="1">
+                <a:solidFill>
+                  <a:srgbClr val="EAA817"/>
+                </a:solidFill>
+              </a:rPr>
+              <a:t>선형 계열</a:t>
+            </a:r>
+          </a:p>
+        </p:txBody>
+      </p:sp>
+      <p:sp>
+        <p:nvSpPr>
+          <p:cNvPr id="5" name="TextBox 4"/>
+          <p:cNvSpPr txBox="1"/>
+          <p:nvPr/>
+        </p:nvSpPr>
+        <p:spPr>
+          <a:xfrm>
+            <a:off x="1481328" y="73152"/>
+            <a:ext cx="6400800" cy="530352"/>
+          </a:xfrm>
+          <a:prstGeom prst="rect">
+            <a:avLst/>
+          </a:prstGeom>
+          <a:noFill/>
+        </p:spPr>
+        <p:txBody>
+          <a:bodyPr wrap="square">
+            <a:spAutoFit/>
+          </a:bodyPr>
+          <a:lstStyle/>
+          <a:p>
+            <a:pPr algn="l"/>
+            <a:r>
+              <a:rPr sz="2100" b="1">
+                <a:solidFill>
+                  <a:srgbClr val="0F172A"/>
+                </a:solidFill>
+              </a:rPr>
+              <a:t>Lasso 회귀</a:t>
+            </a:r>
+          </a:p>
+        </p:txBody>
+      </p:sp>
+      <p:sp>
+        <p:nvSpPr>
+          <p:cNvPr id="6" name="TextBox 5"/>
+          <p:cNvSpPr txBox="1"/>
+          <p:nvPr/>
+        </p:nvSpPr>
+        <p:spPr>
+          <a:xfrm>
+            <a:off x="1481328" y="585216"/>
+            <a:ext cx="6400800" cy="329184"/>
+          </a:xfrm>
+          <a:prstGeom prst="rect">
+            <a:avLst/>
+          </a:prstGeom>
+          <a:noFill/>
+        </p:spPr>
+        <p:txBody>
+          <a:bodyPr wrap="square">
+            <a:spAutoFit/>
+          </a:bodyPr>
+          <a:lstStyle/>
+          <a:p>
+            <a:pPr algn="l"/>
+            <a:r>
+              <a:rPr sz="1000" b="0">
+                <a:solidFill>
+                  <a:srgbClr val="1E293B"/>
+                </a:solidFill>
+              </a:rPr>
+              <a:t>중요하지 않은 지표를 완전히 0으로 만들어 자동 정리</a:t>
+            </a:r>
+          </a:p>
+        </p:txBody>
+      </p:sp>
+      <p:sp>
+        <p:nvSpPr>
+          <p:cNvPr id="7" name="TextBox 6"/>
+          <p:cNvSpPr txBox="1"/>
+          <p:nvPr/>
+        </p:nvSpPr>
+        <p:spPr>
+          <a:xfrm>
+            <a:off x="7955279" y="73152"/>
+            <a:ext cx="1005840" cy="457200"/>
+          </a:xfrm>
+          <a:prstGeom prst="rect">
+            <a:avLst/>
+          </a:prstGeom>
+          <a:noFill/>
+        </p:spPr>
+        <p:txBody>
+          <a:bodyPr wrap="square">
+            <a:spAutoFit/>
+          </a:bodyPr>
+          <a:lstStyle/>
+          <a:p>
+            <a:pPr algn="r"/>
+            <a:r>
+              <a:rPr sz="1000" b="0">
+                <a:solidFill>
+                  <a:srgbClr val="1E293B"/>
+                </a:solidFill>
+              </a:rPr>
+              <a:t>12 / 22</a:t>
+            </a:r>
+          </a:p>
+        </p:txBody>
+      </p:sp>
+      <p:sp>
+        <p:nvSpPr>
+          <p:cNvPr id="8" name="Rectangle 7"/>
+          <p:cNvSpPr/>
+          <p:nvPr/>
+        </p:nvSpPr>
+        <p:spPr>
+          <a:xfrm>
+            <a:off x="0" y="1005840"/>
+            <a:ext cx="9144000" cy="475488"/>
+          </a:xfrm>
+          <a:prstGeom prst="rect">
+            <a:avLst/>
+          </a:prstGeom>
+          <a:solidFill>
+            <a:srgbClr val="1E293B"/>
+          </a:solidFill>
+          <a:ln>
+            <a:noFill/>
+          </a:ln>
+        </p:spPr>
+        <p:style>
+          <a:lnRef idx="1">
+            <a:schemeClr val="accent1"/>
+          </a:lnRef>
+          <a:fillRef idx="3">
+            <a:schemeClr val="accent1"/>
+          </a:fillRef>
+          <a:effectRef idx="2">
+            <a:schemeClr val="accent1"/>
+          </a:effectRef>
+          <a:fontRef idx="minor">
+            <a:schemeClr val="lt1"/>
+          </a:fontRef>
+        </p:style>
+        <p:txBody>
+          <a:bodyPr rtlCol="0" anchor="ctr"/>
+          <a:lstStyle/>
+          <a:p>
+            <a:pPr algn="ctr"/>
+          </a:p>
+        </p:txBody>
+      </p:sp>
+      <p:sp>
+        <p:nvSpPr>
+          <p:cNvPr id="9" name="TextBox 8"/>
+          <p:cNvSpPr txBox="1"/>
+          <p:nvPr/>
+        </p:nvSpPr>
+        <p:spPr>
+          <a:xfrm>
+            <a:off x="228600" y="1051560"/>
+            <a:ext cx="8686800" cy="384048"/>
+          </a:xfrm>
+          <a:prstGeom prst="rect">
+            <a:avLst/>
+          </a:prstGeom>
+          <a:noFill/>
+        </p:spPr>
+        <p:txBody>
+          <a:bodyPr wrap="square">
+            <a:spAutoFit/>
+          </a:bodyPr>
+          <a:lstStyle/>
+          <a:p>
+            <a:pPr algn="l"/>
+            <a:r>
+              <a:rPr sz="1100" b="0">
+                <a:solidFill>
+                  <a:srgbClr val="EAA817"/>
+                </a:solidFill>
+              </a:rPr>
+              <a:t>한 줄 요약   |   "불필요한 지표를 자동으로 걸러내 진짜 중요한 것만 남긴다"</a:t>
+            </a:r>
+          </a:p>
+        </p:txBody>
+      </p:sp>
+      <p:sp>
+        <p:nvSpPr>
+          <p:cNvPr id="10" name="Rectangle 9"/>
+          <p:cNvSpPr/>
+          <p:nvPr/>
+        </p:nvSpPr>
+        <p:spPr>
+          <a:xfrm>
+            <a:off x="164592" y="1600200"/>
+            <a:ext cx="4251960" cy="2651760"/>
+          </a:xfrm>
+          <a:prstGeom prst="rect">
+            <a:avLst/>
+          </a:prstGeom>
+          <a:solidFill>
+            <a:srgbClr val="162137"/>
+          </a:solidFill>
+          <a:ln>
+            <a:noFill/>
+          </a:ln>
+        </p:spPr>
+        <p:style>
+          <a:lnRef idx="1">
+            <a:schemeClr val="accent1"/>
+          </a:lnRef>
+          <a:fillRef idx="3">
+            <a:schemeClr val="accent1"/>
+          </a:fillRef>
+          <a:effectRef idx="2">
+            <a:schemeClr val="accent1"/>
+          </a:effectRef>
+          <a:fontRef idx="minor">
+            <a:schemeClr val="lt1"/>
+          </a:fontRef>
+        </p:style>
+        <p:txBody>
+          <a:bodyPr rtlCol="0" anchor="ctr"/>
+          <a:lstStyle/>
+          <a:p>
+            <a:pPr algn="ctr"/>
+          </a:p>
+        </p:txBody>
+      </p:sp>
+      <p:sp>
+        <p:nvSpPr>
+          <p:cNvPr id="11" name="TextBox 10"/>
+          <p:cNvSpPr txBox="1"/>
+          <p:nvPr/>
+        </p:nvSpPr>
+        <p:spPr>
+          <a:xfrm>
+            <a:off x="292608" y="1664208"/>
+            <a:ext cx="3977639" cy="347472"/>
+          </a:xfrm>
+          <a:prstGeom prst="rect">
+            <a:avLst/>
+          </a:prstGeom>
+          <a:noFill/>
+        </p:spPr>
+        <p:txBody>
+          <a:bodyPr wrap="square">
+            <a:spAutoFit/>
+          </a:bodyPr>
+          <a:lstStyle/>
+          <a:p>
+            <a:pPr algn="l"/>
+            <a:r>
+              <a:rPr sz="1100" b="1">
+                <a:solidFill>
+                  <a:srgbClr val="EAA817"/>
+                </a:solidFill>
+              </a:rPr>
+              <a:t>비유로 이해하기</a:t>
+            </a:r>
+          </a:p>
+        </p:txBody>
+      </p:sp>
+      <p:sp>
+        <p:nvSpPr>
+          <p:cNvPr id="12" name="TextBox 11"/>
+          <p:cNvSpPr txBox="1"/>
+          <p:nvPr/>
+        </p:nvSpPr>
+        <p:spPr>
+          <a:xfrm>
+            <a:off x="292608" y="2048256"/>
+            <a:ext cx="3977639" cy="2121408"/>
+          </a:xfrm>
+          <a:prstGeom prst="rect">
+            <a:avLst/>
+          </a:prstGeom>
+          <a:noFill/>
+        </p:spPr>
+        <p:txBody>
+          <a:bodyPr wrap="square">
+            <a:spAutoFit/>
+          </a:bodyPr>
+          <a:lstStyle/>
+          <a:p>
+            <a:pPr algn="l"/>
+            <a:r>
+              <a:rPr sz="1050" b="0">
+                <a:solidFill>
+                  <a:srgbClr val="FFFFFF"/>
+                </a:solidFill>
+              </a:rPr>
+              <a:t>11명이 투자 의견을 말하는데,
+"설득력 없는 의견은 아예 발언권 0으로"
+만드는 사회자를 상상해 보세요.
+Ridge: 11명 모두 발언, 극단적 주장만 줄임
+Lasso: 핵심 멤버만 남기고 나머지 침묵
+→ Lasso 결과: 예측에 중요한 지표만 남고
+   나머지 가중치가 정확히 0이 됩니다.
+→ 탐색 결과: α = 0.001 선택</a:t>
+            </a:r>
+          </a:p>
+        </p:txBody>
+      </p:sp>
+      <p:sp>
+        <p:nvSpPr>
+          <p:cNvPr id="13" name="Rectangle 12"/>
+          <p:cNvSpPr/>
+          <p:nvPr/>
+        </p:nvSpPr>
+        <p:spPr>
+          <a:xfrm>
+            <a:off x="4727448" y="1600200"/>
+            <a:ext cx="4251960" cy="2651760"/>
+          </a:xfrm>
+          <a:prstGeom prst="rect">
+            <a:avLst/>
+          </a:prstGeom>
+          <a:solidFill>
+            <a:srgbClr val="162137"/>
+          </a:solidFill>
+          <a:ln>
+            <a:noFill/>
+          </a:ln>
+        </p:spPr>
+        <p:style>
+          <a:lnRef idx="1">
+            <a:schemeClr val="accent1"/>
+          </a:lnRef>
+          <a:fillRef idx="3">
+            <a:schemeClr val="accent1"/>
+          </a:fillRef>
+          <a:effectRef idx="2">
+            <a:schemeClr val="accent1"/>
+          </a:effectRef>
+          <a:fontRef idx="minor">
+            <a:schemeClr val="lt1"/>
+          </a:fontRef>
+        </p:style>
+        <p:txBody>
+          <a:bodyPr rtlCol="0" anchor="ctr"/>
+          <a:lstStyle/>
+          <a:p>
+            <a:pPr algn="ctr"/>
+          </a:p>
+        </p:txBody>
+      </p:sp>
+      <p:sp>
+        <p:nvSpPr>
+          <p:cNvPr id="14" name="TextBox 13"/>
+          <p:cNvSpPr txBox="1"/>
+          <p:nvPr/>
+        </p:nvSpPr>
+        <p:spPr>
+          <a:xfrm>
+            <a:off x="4864608" y="1664208"/>
+            <a:ext cx="3977639" cy="347472"/>
+          </a:xfrm>
+          <a:prstGeom prst="rect">
+            <a:avLst/>
+          </a:prstGeom>
+          <a:noFill/>
+        </p:spPr>
+        <p:txBody>
+          <a:bodyPr wrap="square">
+            <a:spAutoFit/>
+          </a:bodyPr>
+          <a:lstStyle/>
+          <a:p>
+            <a:pPr algn="l"/>
+            <a:r>
+              <a:rPr sz="1100" b="1">
+                <a:solidFill>
+                  <a:srgbClr val="EAA817"/>
+                </a:solidFill>
+              </a:rPr>
+              <a:t>어떻게 작동하나</a:t>
+            </a:r>
+          </a:p>
+        </p:txBody>
+      </p:sp>
+      <p:sp>
+        <p:nvSpPr>
+          <p:cNvPr id="15" name="TextBox 14"/>
+          <p:cNvSpPr txBox="1"/>
+          <p:nvPr/>
+        </p:nvSpPr>
+        <p:spPr>
+          <a:xfrm>
+            <a:off x="4864608" y="2048256"/>
+            <a:ext cx="3977639" cy="365760"/>
+          </a:xfrm>
+          <a:prstGeom prst="rect">
+            <a:avLst/>
+          </a:prstGeom>
+          <a:noFill/>
+        </p:spPr>
+        <p:txBody>
+          <a:bodyPr wrap="square">
+            <a:spAutoFit/>
+          </a:bodyPr>
+          <a:lstStyle/>
+          <a:p>
+            <a:pPr algn="l"/>
+            <a:r>
+              <a:rPr sz="1000" b="0">
+                <a:solidFill>
+                  <a:srgbClr val="FFFFFF"/>
+                </a:solidFill>
+              </a:rPr>
+              <a:t>① 선형 회귀처럼 가중치 학습</a:t>
+            </a:r>
+          </a:p>
+        </p:txBody>
+      </p:sp>
+      <p:sp>
+        <p:nvSpPr>
+          <p:cNvPr id="16" name="TextBox 15"/>
+          <p:cNvSpPr txBox="1"/>
+          <p:nvPr/>
+        </p:nvSpPr>
+        <p:spPr>
+          <a:xfrm>
+            <a:off x="4864608" y="2450592"/>
+            <a:ext cx="3977639" cy="365760"/>
+          </a:xfrm>
+          <a:prstGeom prst="rect">
+            <a:avLst/>
+          </a:prstGeom>
+          <a:noFill/>
+        </p:spPr>
+        <p:txBody>
+          <a:bodyPr wrap="square">
+            <a:spAutoFit/>
+          </a:bodyPr>
+          <a:lstStyle/>
+          <a:p>
+            <a:pPr algn="l"/>
+            <a:r>
+              <a:rPr sz="1000" b="0">
+                <a:solidFill>
+                  <a:srgbClr val="FFFFFF"/>
+                </a:solidFill>
+              </a:rPr>
+              <a:t>② 가중치 절댓값 합산에 페널티 추가</a:t>
+            </a:r>
+          </a:p>
+        </p:txBody>
+      </p:sp>
+      <p:sp>
+        <p:nvSpPr>
+          <p:cNvPr id="17" name="TextBox 16"/>
+          <p:cNvSpPr txBox="1"/>
+          <p:nvPr/>
+        </p:nvSpPr>
+        <p:spPr>
+          <a:xfrm>
+            <a:off x="4864608" y="2852928"/>
+            <a:ext cx="3977639" cy="365760"/>
+          </a:xfrm>
+          <a:prstGeom prst="rect">
+            <a:avLst/>
+          </a:prstGeom>
+          <a:noFill/>
+        </p:spPr>
+        <p:txBody>
+          <a:bodyPr wrap="square">
+            <a:spAutoFit/>
+          </a:bodyPr>
+          <a:lstStyle/>
+          <a:p>
+            <a:pPr algn="l"/>
+            <a:r>
+              <a:rPr sz="1000" b="0">
+                <a:solidFill>
+                  <a:srgbClr val="FFFFFF"/>
+                </a:solidFill>
+              </a:rPr>
+              <a:t>③ 페널티가 강해지면 일부 가중치 → 0</a:t>
+            </a:r>
+          </a:p>
+        </p:txBody>
+      </p:sp>
+      <p:sp>
+        <p:nvSpPr>
+          <p:cNvPr id="18" name="TextBox 17"/>
+          <p:cNvSpPr txBox="1"/>
+          <p:nvPr/>
+        </p:nvSpPr>
+        <p:spPr>
+          <a:xfrm>
+            <a:off x="4864608" y="3255264"/>
+            <a:ext cx="3977639" cy="365760"/>
+          </a:xfrm>
+          <a:prstGeom prst="rect">
+            <a:avLst/>
+          </a:prstGeom>
+          <a:noFill/>
+        </p:spPr>
+        <p:txBody>
+          <a:bodyPr wrap="square">
+            <a:spAutoFit/>
+          </a:bodyPr>
+          <a:lstStyle/>
+          <a:p>
+            <a:pPr algn="l"/>
+            <a:r>
+              <a:rPr sz="1000" b="0">
+                <a:solidFill>
+                  <a:srgbClr val="FFFFFF"/>
+                </a:solidFill>
+              </a:rPr>
+              <a:t>④ 가중치 0인 지표 = 예측에 불필요</a:t>
+            </a:r>
+          </a:p>
+        </p:txBody>
+      </p:sp>
+      <p:sp>
+        <p:nvSpPr>
+          <p:cNvPr id="19" name="TextBox 18"/>
+          <p:cNvSpPr txBox="1"/>
+          <p:nvPr/>
+        </p:nvSpPr>
+        <p:spPr>
+          <a:xfrm>
+            <a:off x="4864608" y="3657600"/>
+            <a:ext cx="3977639" cy="365760"/>
+          </a:xfrm>
+          <a:prstGeom prst="rect">
+            <a:avLst/>
+          </a:prstGeom>
+          <a:noFill/>
+        </p:spPr>
+        <p:txBody>
+          <a:bodyPr wrap="square">
+            <a:spAutoFit/>
+          </a:bodyPr>
+          <a:lstStyle/>
+          <a:p>
+            <a:pPr algn="l"/>
+            <a:r>
+              <a:rPr sz="1000" b="0">
+                <a:solidFill>
+                  <a:srgbClr val="FFFFFF"/>
+                </a:solidFill>
+              </a:rPr>
+              <a:t>   → 자동으로 변수 선택</a:t>
+            </a:r>
+          </a:p>
+        </p:txBody>
+      </p:sp>
+      <p:sp>
+        <p:nvSpPr>
+          <p:cNvPr id="20" name="Rectangle 19"/>
+          <p:cNvSpPr/>
+          <p:nvPr/>
+        </p:nvSpPr>
+        <p:spPr>
+          <a:xfrm>
+            <a:off x="164592" y="4370832"/>
+            <a:ext cx="4251960" cy="1664208"/>
+          </a:xfrm>
+          <a:prstGeom prst="rect">
+            <a:avLst/>
+          </a:prstGeom>
+          <a:solidFill>
+            <a:srgbClr val="10261C"/>
+          </a:solidFill>
+          <a:ln>
+            <a:noFill/>
+          </a:ln>
+        </p:spPr>
+        <p:style>
+          <a:lnRef idx="1">
+            <a:schemeClr val="accent1"/>
+          </a:lnRef>
+          <a:fillRef idx="3">
+            <a:schemeClr val="accent1"/>
+          </a:fillRef>
+          <a:effectRef idx="2">
+            <a:schemeClr val="accent1"/>
+          </a:effectRef>
+          <a:fontRef idx="minor">
+            <a:schemeClr val="lt1"/>
+          </a:fontRef>
+        </p:style>
+        <p:txBody>
+          <a:bodyPr rtlCol="0" anchor="ctr"/>
+          <a:lstStyle/>
+          <a:p>
+            <a:pPr algn="ctr"/>
+          </a:p>
+        </p:txBody>
+      </p:sp>
+      <p:sp>
+        <p:nvSpPr>
+          <p:cNvPr id="21" name="TextBox 20"/>
+          <p:cNvSpPr txBox="1"/>
+          <p:nvPr/>
+        </p:nvSpPr>
+        <p:spPr>
+          <a:xfrm>
+            <a:off x="292608" y="4434840"/>
+            <a:ext cx="1828800" cy="329184"/>
+          </a:xfrm>
+          <a:prstGeom prst="rect">
+            <a:avLst/>
+          </a:prstGeom>
+          <a:noFill/>
+        </p:spPr>
+        <p:txBody>
+          <a:bodyPr wrap="square">
+            <a:spAutoFit/>
+          </a:bodyPr>
+          <a:lstStyle/>
+          <a:p>
+            <a:pPr algn="l"/>
+            <a:r>
+              <a:rPr sz="1100" b="1">
+                <a:solidFill>
+                  <a:srgbClr val="4ADE80"/>
+                </a:solidFill>
+              </a:rPr>
+              <a:t>✅  장점</a:t>
+            </a:r>
+          </a:p>
+        </p:txBody>
+      </p:sp>
+      <p:sp>
+        <p:nvSpPr>
+          <p:cNvPr id="22" name="TextBox 21"/>
+          <p:cNvSpPr txBox="1"/>
+          <p:nvPr/>
+        </p:nvSpPr>
+        <p:spPr>
+          <a:xfrm>
+            <a:off x="292608" y="4791456"/>
+            <a:ext cx="4023360" cy="347472"/>
+          </a:xfrm>
+          <a:prstGeom prst="rect">
+            <a:avLst/>
+          </a:prstGeom>
+          <a:noFill/>
+        </p:spPr>
+        <p:txBody>
+          <a:bodyPr wrap="square">
+            <a:spAutoFit/>
+          </a:bodyPr>
+          <a:lstStyle/>
+          <a:p>
+            <a:pPr algn="l"/>
+            <a:r>
+              <a:rPr sz="1000" b="0">
+                <a:solidFill>
+                  <a:srgbClr val="FFFFFF"/>
+                </a:solidFill>
+              </a:rPr>
+              <a:t>• 자동 변수 선택 — 중요한 지표가 무엇인지 밝힘</a:t>
+            </a:r>
+          </a:p>
+        </p:txBody>
+      </p:sp>
+      <p:sp>
+        <p:nvSpPr>
+          <p:cNvPr id="23" name="TextBox 22"/>
+          <p:cNvSpPr txBox="1"/>
+          <p:nvPr/>
+        </p:nvSpPr>
+        <p:spPr>
+          <a:xfrm>
+            <a:off x="292608" y="5157216"/>
+            <a:ext cx="4023360" cy="347472"/>
+          </a:xfrm>
+          <a:prstGeom prst="rect">
+            <a:avLst/>
+          </a:prstGeom>
+          <a:noFill/>
+        </p:spPr>
+        <p:txBody>
+          <a:bodyPr wrap="square">
+            <a:spAutoFit/>
+          </a:bodyPr>
+          <a:lstStyle/>
+          <a:p>
+            <a:pPr algn="l"/>
+            <a:r>
+              <a:rPr sz="1000" b="0">
+                <a:solidFill>
+                  <a:srgbClr val="FFFFFF"/>
+                </a:solidFill>
+              </a:rPr>
+              <a:t>• 불필요한 지표를 완전 제거해 모델 단순화</a:t>
+            </a:r>
+          </a:p>
+        </p:txBody>
+      </p:sp>
+      <p:sp>
+        <p:nvSpPr>
+          <p:cNvPr id="24" name="TextBox 23"/>
+          <p:cNvSpPr txBox="1"/>
+          <p:nvPr/>
+        </p:nvSpPr>
+        <p:spPr>
+          <a:xfrm>
+            <a:off x="292608" y="5522976"/>
+            <a:ext cx="4023360" cy="347472"/>
+          </a:xfrm>
+          <a:prstGeom prst="rect">
+            <a:avLst/>
+          </a:prstGeom>
+          <a:noFill/>
+        </p:spPr>
+        <p:txBody>
+          <a:bodyPr wrap="square">
+            <a:spAutoFit/>
+          </a:bodyPr>
+          <a:lstStyle/>
+          <a:p>
+            <a:pPr algn="l"/>
+            <a:r>
+              <a:rPr sz="1000" b="0">
+                <a:solidFill>
+                  <a:srgbClr val="FFFFFF"/>
+                </a:solidFill>
+              </a:rPr>
+              <a:t>• 과적합 방지 + 해석 가능성 동시 확보</a:t>
+            </a:r>
+          </a:p>
+        </p:txBody>
+      </p:sp>
+      <p:sp>
+        <p:nvSpPr>
+          <p:cNvPr id="25" name="Rectangle 24"/>
+          <p:cNvSpPr/>
+          <p:nvPr/>
+        </p:nvSpPr>
+        <p:spPr>
+          <a:xfrm>
+            <a:off x="4727448" y="4370832"/>
+            <a:ext cx="4251960" cy="1664208"/>
+          </a:xfrm>
+          <a:prstGeom prst="rect">
+            <a:avLst/>
+          </a:prstGeom>
+          <a:solidFill>
+            <a:srgbClr val="261010"/>
+          </a:solidFill>
+          <a:ln>
+            <a:noFill/>
+          </a:ln>
+        </p:spPr>
+        <p:style>
+          <a:lnRef idx="1">
+            <a:schemeClr val="accent1"/>
+          </a:lnRef>
+          <a:fillRef idx="3">
+            <a:schemeClr val="accent1"/>
+          </a:fillRef>
+          <a:effectRef idx="2">
+            <a:schemeClr val="accent1"/>
+          </a:effectRef>
+          <a:fontRef idx="minor">
+            <a:schemeClr val="lt1"/>
+          </a:fontRef>
+        </p:style>
+        <p:txBody>
+          <a:bodyPr rtlCol="0" anchor="ctr"/>
+          <a:lstStyle/>
+          <a:p>
+            <a:pPr algn="ctr"/>
+          </a:p>
+        </p:txBody>
+      </p:sp>
+      <p:sp>
+        <p:nvSpPr>
+          <p:cNvPr id="26" name="TextBox 25"/>
+          <p:cNvSpPr txBox="1"/>
+          <p:nvPr/>
+        </p:nvSpPr>
+        <p:spPr>
+          <a:xfrm>
+            <a:off x="4864608" y="4434840"/>
+            <a:ext cx="1828800" cy="329184"/>
+          </a:xfrm>
+          <a:prstGeom prst="rect">
+            <a:avLst/>
+          </a:prstGeom>
+          <a:noFill/>
+        </p:spPr>
+        <p:txBody>
+          <a:bodyPr wrap="square">
+            <a:spAutoFit/>
+          </a:bodyPr>
+          <a:lstStyle/>
+          <a:p>
+            <a:pPr algn="l"/>
+            <a:r>
+              <a:rPr sz="1100" b="1">
+                <a:solidFill>
+                  <a:srgbClr val="F87171"/>
+                </a:solidFill>
+              </a:rPr>
+              <a:t>⚠  단점</a:t>
+            </a:r>
+          </a:p>
+        </p:txBody>
+      </p:sp>
+      <p:sp>
+        <p:nvSpPr>
+          <p:cNvPr id="27" name="TextBox 26"/>
+          <p:cNvSpPr txBox="1"/>
+          <p:nvPr/>
+        </p:nvSpPr>
+        <p:spPr>
+          <a:xfrm>
+            <a:off x="4864608" y="4791456"/>
+            <a:ext cx="4023360" cy="347472"/>
+          </a:xfrm>
+          <a:prstGeom prst="rect">
+            <a:avLst/>
+          </a:prstGeom>
+          <a:noFill/>
+        </p:spPr>
+        <p:txBody>
+          <a:bodyPr wrap="square">
+            <a:spAutoFit/>
+          </a:bodyPr>
+          <a:lstStyle/>
+          <a:p>
+            <a:pPr algn="l"/>
+            <a:r>
+              <a:rPr sz="1000" b="0">
+                <a:solidFill>
+                  <a:srgbClr val="FFFFFF"/>
+                </a:solidFill>
+              </a:rPr>
+              <a:t>• 상관관계 높은 지표 중 하나를 임의 제거 가능</a:t>
+            </a:r>
+          </a:p>
+        </p:txBody>
+      </p:sp>
+      <p:sp>
+        <p:nvSpPr>
+          <p:cNvPr id="28" name="TextBox 27"/>
+          <p:cNvSpPr txBox="1"/>
+          <p:nvPr/>
+        </p:nvSpPr>
+        <p:spPr>
+          <a:xfrm>
+            <a:off x="4864608" y="5157216"/>
+            <a:ext cx="4023360" cy="347472"/>
+          </a:xfrm>
+          <a:prstGeom prst="rect">
+            <a:avLst/>
+          </a:prstGeom>
+          <a:noFill/>
+        </p:spPr>
+        <p:txBody>
+          <a:bodyPr wrap="square">
+            <a:spAutoFit/>
+          </a:bodyPr>
+          <a:lstStyle/>
+          <a:p>
+            <a:pPr algn="l"/>
+            <a:r>
+              <a:rPr sz="1000" b="0">
+                <a:solidFill>
+                  <a:srgbClr val="FFFFFF"/>
+                </a:solidFill>
+              </a:rPr>
+              <a:t>• Alpha가 너무 크면 모든 가중치가 0이 됨</a:t>
+            </a:r>
+          </a:p>
+        </p:txBody>
+      </p:sp>
+      <p:sp>
+        <p:nvSpPr>
+          <p:cNvPr id="29" name="TextBox 28"/>
+          <p:cNvSpPr txBox="1"/>
+          <p:nvPr/>
+        </p:nvSpPr>
+        <p:spPr>
+          <a:xfrm>
+            <a:off x="4864608" y="5522976"/>
+            <a:ext cx="4023360" cy="347472"/>
+          </a:xfrm>
+          <a:prstGeom prst="rect">
+            <a:avLst/>
+          </a:prstGeom>
+          <a:noFill/>
+        </p:spPr>
+        <p:txBody>
+          <a:bodyPr wrap="square">
+            <a:spAutoFit/>
+          </a:bodyPr>
+          <a:lstStyle/>
+          <a:p>
+            <a:pPr algn="l"/>
+            <a:r>
+              <a:rPr sz="1000" b="0">
+                <a:solidFill>
+                  <a:srgbClr val="FFFFFF"/>
+                </a:solidFill>
+              </a:rPr>
+              <a:t>• 비선형 관계 표현 불가</a:t>
+            </a:r>
+          </a:p>
+        </p:txBody>
+      </p:sp>
+      <p:sp>
+        <p:nvSpPr>
+          <p:cNvPr id="30" name="Rectangle 29"/>
+          <p:cNvSpPr/>
+          <p:nvPr/>
+        </p:nvSpPr>
+        <p:spPr>
+          <a:xfrm>
+            <a:off x="0" y="6199632"/>
+            <a:ext cx="9144000" cy="201168"/>
+          </a:xfrm>
+          <a:prstGeom prst="rect">
+            <a:avLst/>
+          </a:prstGeom>
+          <a:solidFill>
+            <a:srgbClr val="162137"/>
+          </a:solidFill>
+          <a:ln>
+            <a:noFill/>
+          </a:ln>
+        </p:spPr>
+        <p:style>
+          <a:lnRef idx="1">
+            <a:schemeClr val="accent1"/>
+          </a:lnRef>
+          <a:fillRef idx="3">
+            <a:schemeClr val="accent1"/>
+          </a:fillRef>
+          <a:effectRef idx="2">
+            <a:schemeClr val="accent1"/>
+          </a:effectRef>
+          <a:fontRef idx="minor">
+            <a:schemeClr val="lt1"/>
+          </a:fontRef>
+        </p:style>
+        <p:txBody>
+          <a:bodyPr rtlCol="0" anchor="ctr"/>
+          <a:lstStyle/>
+          <a:p>
+            <a:pPr algn="ctr"/>
+          </a:p>
+        </p:txBody>
+      </p:sp>
+      <p:sp>
+        <p:nvSpPr>
+          <p:cNvPr id="31" name="TextBox 30"/>
+          <p:cNvSpPr txBox="1"/>
+          <p:nvPr/>
+        </p:nvSpPr>
+        <p:spPr>
+          <a:xfrm>
+            <a:off x="182880" y="6217920"/>
+            <a:ext cx="6858000" cy="164592"/>
+          </a:xfrm>
+          <a:prstGeom prst="rect">
+            <a:avLst/>
+          </a:prstGeom>
+          <a:noFill/>
+        </p:spPr>
+        <p:txBody>
+          <a:bodyPr wrap="square">
+            <a:spAutoFit/>
+          </a:bodyPr>
+          <a:lstStyle/>
+          <a:p>
+            <a:pPr algn="l"/>
+            <a:r>
+              <a:rPr sz="800" b="0">
+                <a:solidFill>
+                  <a:srgbClr val="94A3B8"/>
+                </a:solidFill>
+              </a:rPr>
+              <a:t>주식 등락률 예측 AI 모델 개발</a:t>
+            </a:r>
+          </a:p>
+        </p:txBody>
+      </p:sp>
+      <p:sp>
+        <p:nvSpPr>
+          <p:cNvPr id="32" name="TextBox 31"/>
+          <p:cNvSpPr txBox="1"/>
+          <p:nvPr/>
+        </p:nvSpPr>
+        <p:spPr>
+          <a:xfrm>
+            <a:off x="7315200" y="6217920"/>
+            <a:ext cx="1645920" cy="164592"/>
+          </a:xfrm>
+          <a:prstGeom prst="rect">
+            <a:avLst/>
+          </a:prstGeom>
+          <a:noFill/>
+        </p:spPr>
+        <p:txBody>
+          <a:bodyPr wrap="square">
+            <a:spAutoFit/>
+          </a:bodyPr>
+          <a:lstStyle/>
+          <a:p>
+            <a:pPr algn="r"/>
+            <a:r>
+              <a:rPr sz="800" b="0">
+                <a:solidFill>
+                  <a:srgbClr val="94A3B8"/>
+                </a:solidFill>
+              </a:rPr>
+              <a:t>12 / 22</a:t>
+            </a:r>
+          </a:p>
+        </p:txBody>
+      </p:sp>
+    </p:spTree>
+  </p:cSld>
+  <p:clrMapOvr>
+    <a:masterClrMapping/>
+  </p:clrMapOvr>
+</p:sld>
+</file>
+
+<file path=ppt/slides/slide16.xml><?xml version="1.0" encoding="utf-8"?>
+<p:sld xmlns:a="http://schemas.openxmlformats.org/drawingml/2006/main" xmlns:p="http://schemas.openxmlformats.org/presentationml/2006/main" xmlns:r="http://schemas.openxmlformats.org/officeDocument/2006/relationships">
+  <p:cSld>
+    <p:bg>
+      <p:bgPr>
+        <a:solidFill>
+          <a:srgbClr val="0F172A"/>
+        </a:solidFill>
+        <a:effectLst/>
+      </p:bgPr>
+    </p:bg>
+    <p:spTree>
+      <p:nvGrpSpPr>
+        <p:cNvPr id="1" name=""/>
+        <p:cNvGrpSpPr/>
+        <p:nvPr/>
+      </p:nvGrpSpPr>
+      <p:grpSpPr/>
+      <p:sp>
+        <p:nvSpPr>
+          <p:cNvPr id="2" name="Rectangle 1"/>
+          <p:cNvSpPr/>
+          <p:nvPr/>
+        </p:nvSpPr>
+        <p:spPr>
+          <a:xfrm>
+            <a:off x="0" y="0"/>
+            <a:ext cx="9144000" cy="1005840"/>
+          </a:xfrm>
+          <a:prstGeom prst="rect">
+            <a:avLst/>
+          </a:prstGeom>
+          <a:solidFill>
+            <a:srgbClr val="EAA817"/>
+          </a:solidFill>
+          <a:ln>
+            <a:noFill/>
+          </a:ln>
+        </p:spPr>
+        <p:style>
+          <a:lnRef idx="1">
+            <a:schemeClr val="accent1"/>
+          </a:lnRef>
+          <a:fillRef idx="3">
+            <a:schemeClr val="accent1"/>
+          </a:fillRef>
+          <a:effectRef idx="2">
+            <a:schemeClr val="accent1"/>
+          </a:effectRef>
+          <a:fontRef idx="minor">
+            <a:schemeClr val="lt1"/>
+          </a:fontRef>
+        </p:style>
+        <p:txBody>
+          <a:bodyPr rtlCol="0" anchor="ctr"/>
+          <a:lstStyle/>
+          <a:p>
+            <a:pPr algn="ctr"/>
+          </a:p>
+        </p:txBody>
+      </p:sp>
+      <p:sp>
+        <p:nvSpPr>
+          <p:cNvPr id="3" name="Rectangle 2"/>
+          <p:cNvSpPr/>
+          <p:nvPr/>
+        </p:nvSpPr>
+        <p:spPr>
+          <a:xfrm>
+            <a:off x="164592" y="146304"/>
+            <a:ext cx="1188720" cy="384048"/>
+          </a:xfrm>
+          <a:prstGeom prst="rect">
+            <a:avLst/>
+          </a:prstGeom>
+          <a:solidFill>
+            <a:srgbClr val="0F172A"/>
+          </a:solidFill>
+          <a:ln>
+            <a:noFill/>
+          </a:ln>
+        </p:spPr>
+        <p:style>
+          <a:lnRef idx="1">
+            <a:schemeClr val="accent1"/>
+          </a:lnRef>
+          <a:fillRef idx="3">
+            <a:schemeClr val="accent1"/>
+          </a:fillRef>
+          <a:effectRef idx="2">
+            <a:schemeClr val="accent1"/>
+          </a:effectRef>
+          <a:fontRef idx="minor">
+            <a:schemeClr val="lt1"/>
+          </a:fontRef>
+        </p:style>
+        <p:txBody>
+          <a:bodyPr rtlCol="0" anchor="ctr"/>
+          <a:lstStyle/>
+          <a:p>
+            <a:pPr algn="ctr"/>
+          </a:p>
+        </p:txBody>
+      </p:sp>
+      <p:sp>
+        <p:nvSpPr>
+          <p:cNvPr id="4" name="TextBox 3"/>
+          <p:cNvSpPr txBox="1"/>
+          <p:nvPr/>
+        </p:nvSpPr>
+        <p:spPr>
+          <a:xfrm>
+            <a:off x="164592" y="146304"/>
+            <a:ext cx="1188720" cy="384048"/>
+          </a:xfrm>
+          <a:prstGeom prst="rect">
+            <a:avLst/>
+          </a:prstGeom>
+          <a:noFill/>
+        </p:spPr>
+        <p:txBody>
+          <a:bodyPr wrap="square">
+            <a:spAutoFit/>
+          </a:bodyPr>
+          <a:lstStyle/>
+          <a:p>
+            <a:pPr algn="ctr"/>
+            <a:r>
+              <a:rPr sz="900" b="1">
+                <a:solidFill>
+                  <a:srgbClr val="EAA817"/>
+                </a:solidFill>
+              </a:rPr>
+              <a:t>선형 계열</a:t>
+            </a:r>
+          </a:p>
+        </p:txBody>
+      </p:sp>
+      <p:sp>
+        <p:nvSpPr>
+          <p:cNvPr id="5" name="TextBox 4"/>
+          <p:cNvSpPr txBox="1"/>
+          <p:nvPr/>
+        </p:nvSpPr>
+        <p:spPr>
+          <a:xfrm>
+            <a:off x="1481328" y="73152"/>
+            <a:ext cx="6400800" cy="530352"/>
+          </a:xfrm>
+          <a:prstGeom prst="rect">
+            <a:avLst/>
+          </a:prstGeom>
+          <a:noFill/>
+        </p:spPr>
+        <p:txBody>
+          <a:bodyPr wrap="square">
+            <a:spAutoFit/>
+          </a:bodyPr>
+          <a:lstStyle/>
+          <a:p>
+            <a:pPr algn="l"/>
+            <a:r>
+              <a:rPr sz="2100" b="1">
+                <a:solidFill>
+                  <a:srgbClr val="0F172A"/>
+                </a:solidFill>
+              </a:rPr>
+              <a:t>ElasticNet 회귀</a:t>
+            </a:r>
+          </a:p>
+        </p:txBody>
+      </p:sp>
+      <p:sp>
+        <p:nvSpPr>
+          <p:cNvPr id="6" name="TextBox 5"/>
+          <p:cNvSpPr txBox="1"/>
+          <p:nvPr/>
+        </p:nvSpPr>
+        <p:spPr>
+          <a:xfrm>
+            <a:off x="1481328" y="585216"/>
+            <a:ext cx="6400800" cy="329184"/>
+          </a:xfrm>
+          <a:prstGeom prst="rect">
+            <a:avLst/>
+          </a:prstGeom>
+          <a:noFill/>
+        </p:spPr>
+        <p:txBody>
+          <a:bodyPr wrap="square">
+            <a:spAutoFit/>
+          </a:bodyPr>
+          <a:lstStyle/>
+          <a:p>
+            <a:pPr algn="l"/>
+            <a:r>
+              <a:rPr sz="1000" b="0">
+                <a:solidFill>
+                  <a:srgbClr val="1E293B"/>
+                </a:solidFill>
+              </a:rPr>
+              <a:t>Ridge + Lasso를 섞은 하이브리드 모델</a:t>
+            </a:r>
+          </a:p>
+        </p:txBody>
+      </p:sp>
+      <p:sp>
+        <p:nvSpPr>
+          <p:cNvPr id="7" name="TextBox 6"/>
+          <p:cNvSpPr txBox="1"/>
+          <p:nvPr/>
+        </p:nvSpPr>
+        <p:spPr>
+          <a:xfrm>
+            <a:off x="7955279" y="73152"/>
+            <a:ext cx="1005840" cy="457200"/>
+          </a:xfrm>
+          <a:prstGeom prst="rect">
+            <a:avLst/>
+          </a:prstGeom>
+          <a:noFill/>
+        </p:spPr>
+        <p:txBody>
+          <a:bodyPr wrap="square">
+            <a:spAutoFit/>
+          </a:bodyPr>
+          <a:lstStyle/>
+          <a:p>
+            <a:pPr algn="r"/>
+            <a:r>
+              <a:rPr sz="1000" b="0">
+                <a:solidFill>
+                  <a:srgbClr val="1E293B"/>
+                </a:solidFill>
+              </a:rPr>
+              <a:t>13 / 22</a:t>
+            </a:r>
+          </a:p>
+        </p:txBody>
+      </p:sp>
+      <p:sp>
+        <p:nvSpPr>
+          <p:cNvPr id="8" name="Rectangle 7"/>
+          <p:cNvSpPr/>
+          <p:nvPr/>
+        </p:nvSpPr>
+        <p:spPr>
+          <a:xfrm>
+            <a:off x="0" y="1005840"/>
+            <a:ext cx="9144000" cy="475488"/>
+          </a:xfrm>
+          <a:prstGeom prst="rect">
+            <a:avLst/>
+          </a:prstGeom>
+          <a:solidFill>
+            <a:srgbClr val="1E293B"/>
+          </a:solidFill>
+          <a:ln>
+            <a:noFill/>
+          </a:ln>
+        </p:spPr>
+        <p:style>
+          <a:lnRef idx="1">
+            <a:schemeClr val="accent1"/>
+          </a:lnRef>
+          <a:fillRef idx="3">
+            <a:schemeClr val="accent1"/>
+          </a:fillRef>
+          <a:effectRef idx="2">
+            <a:schemeClr val="accent1"/>
+          </a:effectRef>
+          <a:fontRef idx="minor">
+            <a:schemeClr val="lt1"/>
+          </a:fontRef>
+        </p:style>
+        <p:txBody>
+          <a:bodyPr rtlCol="0" anchor="ctr"/>
+          <a:lstStyle/>
+          <a:p>
+            <a:pPr algn="ctr"/>
+          </a:p>
+        </p:txBody>
+      </p:sp>
+      <p:sp>
+        <p:nvSpPr>
+          <p:cNvPr id="9" name="TextBox 8"/>
+          <p:cNvSpPr txBox="1"/>
+          <p:nvPr/>
+        </p:nvSpPr>
+        <p:spPr>
+          <a:xfrm>
+            <a:off x="228600" y="1051560"/>
+            <a:ext cx="8686800" cy="384048"/>
+          </a:xfrm>
+          <a:prstGeom prst="rect">
+            <a:avLst/>
+          </a:prstGeom>
+          <a:noFill/>
+        </p:spPr>
+        <p:txBody>
+          <a:bodyPr wrap="square">
+            <a:spAutoFit/>
+          </a:bodyPr>
+          <a:lstStyle/>
+          <a:p>
+            <a:pPr algn="l"/>
+            <a:r>
+              <a:rPr sz="1100" b="0">
+                <a:solidFill>
+                  <a:srgbClr val="EAA817"/>
+                </a:solidFill>
+              </a:rPr>
+              <a:t>한 줄 요약   |   "Ridge의 안정성 + Lasso의 변수 선택을 동시에 얻는다"</a:t>
+            </a:r>
+          </a:p>
+        </p:txBody>
+      </p:sp>
+      <p:sp>
+        <p:nvSpPr>
+          <p:cNvPr id="10" name="Rectangle 9"/>
+          <p:cNvSpPr/>
+          <p:nvPr/>
+        </p:nvSpPr>
+        <p:spPr>
+          <a:xfrm>
+            <a:off x="164592" y="1600200"/>
+            <a:ext cx="4251960" cy="2651760"/>
+          </a:xfrm>
+          <a:prstGeom prst="rect">
+            <a:avLst/>
+          </a:prstGeom>
+          <a:solidFill>
+            <a:srgbClr val="162137"/>
+          </a:solidFill>
+          <a:ln>
+            <a:noFill/>
+          </a:ln>
+        </p:spPr>
+        <p:style>
+          <a:lnRef idx="1">
+            <a:schemeClr val="accent1"/>
+          </a:lnRef>
+          <a:fillRef idx="3">
+            <a:schemeClr val="accent1"/>
+          </a:fillRef>
+          <a:effectRef idx="2">
+            <a:schemeClr val="accent1"/>
+          </a:effectRef>
+          <a:fontRef idx="minor">
+            <a:schemeClr val="lt1"/>
+          </a:fontRef>
+        </p:style>
+        <p:txBody>
+          <a:bodyPr rtlCol="0" anchor="ctr"/>
+          <a:lstStyle/>
+          <a:p>
+            <a:pPr algn="ctr"/>
+          </a:p>
+        </p:txBody>
+      </p:sp>
+      <p:sp>
+        <p:nvSpPr>
+          <p:cNvPr id="11" name="TextBox 10"/>
+          <p:cNvSpPr txBox="1"/>
+          <p:nvPr/>
+        </p:nvSpPr>
+        <p:spPr>
+          <a:xfrm>
+            <a:off x="292608" y="1664208"/>
+            <a:ext cx="3977639" cy="347472"/>
+          </a:xfrm>
+          <a:prstGeom prst="rect">
+            <a:avLst/>
+          </a:prstGeom>
+          <a:noFill/>
+        </p:spPr>
+        <p:txBody>
+          <a:bodyPr wrap="square">
+            <a:spAutoFit/>
+          </a:bodyPr>
+          <a:lstStyle/>
+          <a:p>
+            <a:pPr algn="l"/>
+            <a:r>
+              <a:rPr sz="1100" b="1">
+                <a:solidFill>
+                  <a:srgbClr val="EAA817"/>
+                </a:solidFill>
+              </a:rPr>
+              <a:t>비유로 이해하기</a:t>
+            </a:r>
+          </a:p>
+        </p:txBody>
+      </p:sp>
+      <p:sp>
+        <p:nvSpPr>
+          <p:cNvPr id="12" name="TextBox 11"/>
+          <p:cNvSpPr txBox="1"/>
+          <p:nvPr/>
+        </p:nvSpPr>
+        <p:spPr>
+          <a:xfrm>
+            <a:off x="292608" y="2048256"/>
+            <a:ext cx="3977639" cy="2121408"/>
+          </a:xfrm>
+          <a:prstGeom prst="rect">
+            <a:avLst/>
+          </a:prstGeom>
+          <a:noFill/>
+        </p:spPr>
+        <p:txBody>
+          <a:bodyPr wrap="square">
+            <a:spAutoFit/>
+          </a:bodyPr>
+          <a:lstStyle/>
+          <a:p>
+            <a:pPr algn="l"/>
+            <a:r>
+              <a:rPr sz="1050" b="0">
+                <a:solidFill>
+                  <a:srgbClr val="FFFFFF"/>
+                </a:solidFill>
+              </a:rPr>
+              <a:t>두 가지 다이어트 방법이 있다고 해요.
+Ridge식: 모든 음식을 조금씩 줄이기
+Lasso식: 나쁜 음식은 완전히 끊기
+ElasticNet은 "둘을 반반씩" 하는 방식.
+l1_ratio = 0.5
+→ Ridge 50% + Lasso 50% 동시 적용
+→ 탐색 결과: α=0.001, l1_ratio=0.5 선택</a:t>
+            </a:r>
+          </a:p>
+        </p:txBody>
+      </p:sp>
+      <p:sp>
+        <p:nvSpPr>
+          <p:cNvPr id="13" name="Rectangle 12"/>
+          <p:cNvSpPr/>
+          <p:nvPr/>
+        </p:nvSpPr>
+        <p:spPr>
+          <a:xfrm>
+            <a:off x="4727448" y="1600200"/>
+            <a:ext cx="4251960" cy="2651760"/>
+          </a:xfrm>
+          <a:prstGeom prst="rect">
+            <a:avLst/>
+          </a:prstGeom>
+          <a:solidFill>
+            <a:srgbClr val="162137"/>
+          </a:solidFill>
+          <a:ln>
+            <a:noFill/>
+          </a:ln>
+        </p:spPr>
+        <p:style>
+          <a:lnRef idx="1">
+            <a:schemeClr val="accent1"/>
+          </a:lnRef>
+          <a:fillRef idx="3">
+            <a:schemeClr val="accent1"/>
+          </a:fillRef>
+          <a:effectRef idx="2">
+            <a:schemeClr val="accent1"/>
+          </a:effectRef>
+          <a:fontRef idx="minor">
+            <a:schemeClr val="lt1"/>
+          </a:fontRef>
+        </p:style>
+        <p:txBody>
+          <a:bodyPr rtlCol="0" anchor="ctr"/>
+          <a:lstStyle/>
+          <a:p>
+            <a:pPr algn="ctr"/>
+          </a:p>
+        </p:txBody>
+      </p:sp>
+      <p:sp>
+        <p:nvSpPr>
+          <p:cNvPr id="14" name="TextBox 13"/>
+          <p:cNvSpPr txBox="1"/>
+          <p:nvPr/>
+        </p:nvSpPr>
+        <p:spPr>
+          <a:xfrm>
+            <a:off x="4864608" y="1664208"/>
+            <a:ext cx="3977639" cy="347472"/>
+          </a:xfrm>
+          <a:prstGeom prst="rect">
+            <a:avLst/>
+          </a:prstGeom>
+          <a:noFill/>
+        </p:spPr>
+        <p:txBody>
+          <a:bodyPr wrap="square">
+            <a:spAutoFit/>
+          </a:bodyPr>
+          <a:lstStyle/>
+          <a:p>
+            <a:pPr algn="l"/>
+            <a:r>
+              <a:rPr sz="1100" b="1">
+                <a:solidFill>
+                  <a:srgbClr val="EAA817"/>
+                </a:solidFill>
+              </a:rPr>
+              <a:t>어떻게 작동하나</a:t>
+            </a:r>
+          </a:p>
+        </p:txBody>
+      </p:sp>
+      <p:sp>
+        <p:nvSpPr>
+          <p:cNvPr id="15" name="TextBox 14"/>
+          <p:cNvSpPr txBox="1"/>
+          <p:nvPr/>
+        </p:nvSpPr>
+        <p:spPr>
+          <a:xfrm>
+            <a:off x="4864608" y="2048256"/>
+            <a:ext cx="3977639" cy="365760"/>
+          </a:xfrm>
+          <a:prstGeom prst="rect">
+            <a:avLst/>
+          </a:prstGeom>
+          <a:noFill/>
+        </p:spPr>
+        <p:txBody>
+          <a:bodyPr wrap="square">
+            <a:spAutoFit/>
+          </a:bodyPr>
+          <a:lstStyle/>
+          <a:p>
+            <a:pPr algn="l"/>
+            <a:r>
+              <a:rPr sz="1000" b="0">
+                <a:solidFill>
+                  <a:srgbClr val="FFFFFF"/>
+                </a:solidFill>
+              </a:rPr>
+              <a:t>① Ridge 페널티 + Lasso 페널티 동시 적용</a:t>
+            </a:r>
+          </a:p>
+        </p:txBody>
+      </p:sp>
+      <p:sp>
+        <p:nvSpPr>
+          <p:cNvPr id="16" name="TextBox 15"/>
+          <p:cNvSpPr txBox="1"/>
+          <p:nvPr/>
+        </p:nvSpPr>
+        <p:spPr>
+          <a:xfrm>
+            <a:off x="4864608" y="2450592"/>
+            <a:ext cx="3977639" cy="365760"/>
+          </a:xfrm>
+          <a:prstGeom prst="rect">
+            <a:avLst/>
+          </a:prstGeom>
+          <a:noFill/>
+        </p:spPr>
+        <p:txBody>
+          <a:bodyPr wrap="square">
+            <a:spAutoFit/>
+          </a:bodyPr>
+          <a:lstStyle/>
+          <a:p>
+            <a:pPr algn="l"/>
+            <a:r>
+              <a:rPr sz="1000" b="0">
+                <a:solidFill>
+                  <a:srgbClr val="FFFFFF"/>
+                </a:solidFill>
+              </a:rPr>
+              <a:t>② l1_ratio로 두 방식의 비율 조절</a:t>
+            </a:r>
+          </a:p>
+        </p:txBody>
+      </p:sp>
+      <p:sp>
+        <p:nvSpPr>
+          <p:cNvPr id="17" name="TextBox 16"/>
+          <p:cNvSpPr txBox="1"/>
+          <p:nvPr/>
+        </p:nvSpPr>
+        <p:spPr>
+          <a:xfrm>
+            <a:off x="4864608" y="2852928"/>
+            <a:ext cx="3977639" cy="365760"/>
+          </a:xfrm>
+          <a:prstGeom prst="rect">
+            <a:avLst/>
+          </a:prstGeom>
+          <a:noFill/>
+        </p:spPr>
+        <p:txBody>
+          <a:bodyPr wrap="square">
+            <a:spAutoFit/>
+          </a:bodyPr>
+          <a:lstStyle/>
+          <a:p>
+            <a:pPr algn="l"/>
+            <a:r>
+              <a:rPr sz="1000" b="0">
+                <a:solidFill>
+                  <a:srgbClr val="FFFFFF"/>
+                </a:solidFill>
+              </a:rPr>
+              <a:t>③ 일부 계수 → 0 (Lasso 효과)</a:t>
+            </a:r>
+          </a:p>
+        </p:txBody>
+      </p:sp>
+      <p:sp>
+        <p:nvSpPr>
+          <p:cNvPr id="18" name="TextBox 17"/>
+          <p:cNvSpPr txBox="1"/>
+          <p:nvPr/>
+        </p:nvSpPr>
+        <p:spPr>
+          <a:xfrm>
+            <a:off x="4864608" y="3255264"/>
+            <a:ext cx="3977639" cy="365760"/>
+          </a:xfrm>
+          <a:prstGeom prst="rect">
+            <a:avLst/>
+          </a:prstGeom>
+          <a:noFill/>
+        </p:spPr>
+        <p:txBody>
+          <a:bodyPr wrap="square">
+            <a:spAutoFit/>
+          </a:bodyPr>
+          <a:lstStyle/>
+          <a:p>
+            <a:pPr algn="l"/>
+            <a:r>
+              <a:rPr sz="1000" b="0">
+                <a:solidFill>
+                  <a:srgbClr val="FFFFFF"/>
+                </a:solidFill>
+              </a:rPr>
+              <a:t>④ 나머지 계수는 고르게 억제 (Ridge 효과)</a:t>
+            </a:r>
+          </a:p>
+        </p:txBody>
+      </p:sp>
+      <p:sp>
+        <p:nvSpPr>
+          <p:cNvPr id="19" name="TextBox 18"/>
+          <p:cNvSpPr txBox="1"/>
+          <p:nvPr/>
+        </p:nvSpPr>
+        <p:spPr>
+          <a:xfrm>
+            <a:off x="4864608" y="3657600"/>
+            <a:ext cx="3977639" cy="365760"/>
+          </a:xfrm>
+          <a:prstGeom prst="rect">
+            <a:avLst/>
+          </a:prstGeom>
+          <a:noFill/>
+        </p:spPr>
+        <p:txBody>
+          <a:bodyPr wrap="square">
+            <a:spAutoFit/>
+          </a:bodyPr>
+          <a:lstStyle/>
+          <a:p>
+            <a:pPr algn="l"/>
+            <a:r>
+              <a:rPr sz="1000" b="0">
+                <a:solidFill>
+                  <a:srgbClr val="FFFFFF"/>
+                </a:solidFill>
+              </a:rPr>
+              <a:t>⑤ 두 하이퍼파라미터(α, l1_ratio) 탐색</a:t>
+            </a:r>
+          </a:p>
+        </p:txBody>
+      </p:sp>
+      <p:sp>
+        <p:nvSpPr>
+          <p:cNvPr id="20" name="Rectangle 19"/>
+          <p:cNvSpPr/>
+          <p:nvPr/>
+        </p:nvSpPr>
+        <p:spPr>
+          <a:xfrm>
+            <a:off x="164592" y="4370832"/>
+            <a:ext cx="4251960" cy="1664208"/>
+          </a:xfrm>
+          <a:prstGeom prst="rect">
+            <a:avLst/>
+          </a:prstGeom>
+          <a:solidFill>
+            <a:srgbClr val="10261C"/>
+          </a:solidFill>
+          <a:ln>
+            <a:noFill/>
+          </a:ln>
+        </p:spPr>
+        <p:style>
+          <a:lnRef idx="1">
+            <a:schemeClr val="accent1"/>
+          </a:lnRef>
+          <a:fillRef idx="3">
+            <a:schemeClr val="accent1"/>
+          </a:fillRef>
+          <a:effectRef idx="2">
+            <a:schemeClr val="accent1"/>
+          </a:effectRef>
+          <a:fontRef idx="minor">
+            <a:schemeClr val="lt1"/>
+          </a:fontRef>
+        </p:style>
+        <p:txBody>
+          <a:bodyPr rtlCol="0" anchor="ctr"/>
+          <a:lstStyle/>
+          <a:p>
+            <a:pPr algn="ctr"/>
+          </a:p>
+        </p:txBody>
+      </p:sp>
+      <p:sp>
+        <p:nvSpPr>
+          <p:cNvPr id="21" name="TextBox 20"/>
+          <p:cNvSpPr txBox="1"/>
+          <p:nvPr/>
+        </p:nvSpPr>
+        <p:spPr>
+          <a:xfrm>
+            <a:off x="292608" y="4434840"/>
+            <a:ext cx="1828800" cy="329184"/>
+          </a:xfrm>
+          <a:prstGeom prst="rect">
+            <a:avLst/>
+          </a:prstGeom>
+          <a:noFill/>
+        </p:spPr>
+        <p:txBody>
+          <a:bodyPr wrap="square">
+            <a:spAutoFit/>
+          </a:bodyPr>
+          <a:lstStyle/>
+          <a:p>
+            <a:pPr algn="l"/>
+            <a:r>
+              <a:rPr sz="1100" b="1">
+                <a:solidFill>
+                  <a:srgbClr val="4ADE80"/>
+                </a:solidFill>
+              </a:rPr>
+              <a:t>✅  장점</a:t>
+            </a:r>
+          </a:p>
+        </p:txBody>
+      </p:sp>
+      <p:sp>
+        <p:nvSpPr>
+          <p:cNvPr id="22" name="TextBox 21"/>
+          <p:cNvSpPr txBox="1"/>
+          <p:nvPr/>
+        </p:nvSpPr>
+        <p:spPr>
+          <a:xfrm>
+            <a:off x="292608" y="4791456"/>
+            <a:ext cx="4023360" cy="347472"/>
+          </a:xfrm>
+          <a:prstGeom prst="rect">
+            <a:avLst/>
+          </a:prstGeom>
+          <a:noFill/>
+        </p:spPr>
+        <p:txBody>
+          <a:bodyPr wrap="square">
+            <a:spAutoFit/>
+          </a:bodyPr>
+          <a:lstStyle/>
+          <a:p>
+            <a:pPr algn="l"/>
+            <a:r>
+              <a:rPr sz="1000" b="0">
+                <a:solidFill>
+                  <a:srgbClr val="FFFFFF"/>
+                </a:solidFill>
+              </a:rPr>
+              <a:t>• Ridge + Lasso 장점 동시에 누림</a:t>
+            </a:r>
+          </a:p>
+        </p:txBody>
+      </p:sp>
+      <p:sp>
+        <p:nvSpPr>
+          <p:cNvPr id="23" name="TextBox 22"/>
+          <p:cNvSpPr txBox="1"/>
+          <p:nvPr/>
+        </p:nvSpPr>
+        <p:spPr>
+          <a:xfrm>
+            <a:off x="292608" y="5157216"/>
+            <a:ext cx="4023360" cy="347472"/>
+          </a:xfrm>
+          <a:prstGeom prst="rect">
+            <a:avLst/>
+          </a:prstGeom>
+          <a:noFill/>
+        </p:spPr>
+        <p:txBody>
+          <a:bodyPr wrap="square">
+            <a:spAutoFit/>
+          </a:bodyPr>
+          <a:lstStyle/>
+          <a:p>
+            <a:pPr algn="l"/>
+            <a:r>
+              <a:rPr sz="1000" b="0">
+                <a:solidFill>
+                  <a:srgbClr val="FFFFFF"/>
+                </a:solidFill>
+              </a:rPr>
+              <a:t>• 지표 간 상관관계가 높을 때 특히 효과적</a:t>
+            </a:r>
+          </a:p>
+        </p:txBody>
+      </p:sp>
+      <p:sp>
+        <p:nvSpPr>
+          <p:cNvPr id="24" name="TextBox 23"/>
+          <p:cNvSpPr txBox="1"/>
+          <p:nvPr/>
+        </p:nvSpPr>
+        <p:spPr>
+          <a:xfrm>
+            <a:off x="292608" y="5522976"/>
+            <a:ext cx="4023360" cy="347472"/>
+          </a:xfrm>
+          <a:prstGeom prst="rect">
+            <a:avLst/>
+          </a:prstGeom>
+          <a:noFill/>
+        </p:spPr>
+        <p:txBody>
+          <a:bodyPr wrap="square">
+            <a:spAutoFit/>
+          </a:bodyPr>
+          <a:lstStyle/>
+          <a:p>
+            <a:pPr algn="l"/>
+            <a:r>
+              <a:rPr sz="1000" b="0">
+                <a:solidFill>
+                  <a:srgbClr val="FFFFFF"/>
+                </a:solidFill>
+              </a:rPr>
+              <a:t>• 가장 유연한 선형 모델</a:t>
+            </a:r>
+          </a:p>
+        </p:txBody>
+      </p:sp>
+      <p:sp>
+        <p:nvSpPr>
+          <p:cNvPr id="25" name="Rectangle 24"/>
+          <p:cNvSpPr/>
+          <p:nvPr/>
+        </p:nvSpPr>
+        <p:spPr>
+          <a:xfrm>
+            <a:off x="4727448" y="4370832"/>
+            <a:ext cx="4251960" cy="1664208"/>
+          </a:xfrm>
+          <a:prstGeom prst="rect">
+            <a:avLst/>
+          </a:prstGeom>
+          <a:solidFill>
+            <a:srgbClr val="261010"/>
+          </a:solidFill>
+          <a:ln>
+            <a:noFill/>
+          </a:ln>
+        </p:spPr>
+        <p:style>
+          <a:lnRef idx="1">
+            <a:schemeClr val="accent1"/>
+          </a:lnRef>
+          <a:fillRef idx="3">
+            <a:schemeClr val="accent1"/>
+          </a:fillRef>
+          <a:effectRef idx="2">
+            <a:schemeClr val="accent1"/>
+          </a:effectRef>
+          <a:fontRef idx="minor">
+            <a:schemeClr val="lt1"/>
+          </a:fontRef>
+        </p:style>
+        <p:txBody>
+          <a:bodyPr rtlCol="0" anchor="ctr"/>
+          <a:lstStyle/>
+          <a:p>
+            <a:pPr algn="ctr"/>
+          </a:p>
+        </p:txBody>
+      </p:sp>
+      <p:sp>
+        <p:nvSpPr>
+          <p:cNvPr id="26" name="TextBox 25"/>
+          <p:cNvSpPr txBox="1"/>
+          <p:nvPr/>
+        </p:nvSpPr>
+        <p:spPr>
+          <a:xfrm>
+            <a:off x="4864608" y="4434840"/>
+            <a:ext cx="1828800" cy="329184"/>
+          </a:xfrm>
+          <a:prstGeom prst="rect">
+            <a:avLst/>
+          </a:prstGeom>
+          <a:noFill/>
+        </p:spPr>
+        <p:txBody>
+          <a:bodyPr wrap="square">
+            <a:spAutoFit/>
+          </a:bodyPr>
+          <a:lstStyle/>
+          <a:p>
+            <a:pPr algn="l"/>
+            <a:r>
+              <a:rPr sz="1100" b="1">
+                <a:solidFill>
+                  <a:srgbClr val="F87171"/>
+                </a:solidFill>
+              </a:rPr>
+              <a:t>⚠  단점</a:t>
+            </a:r>
+          </a:p>
+        </p:txBody>
+      </p:sp>
+      <p:sp>
+        <p:nvSpPr>
+          <p:cNvPr id="27" name="TextBox 26"/>
+          <p:cNvSpPr txBox="1"/>
+          <p:nvPr/>
+        </p:nvSpPr>
+        <p:spPr>
+          <a:xfrm>
+            <a:off x="4864608" y="4791456"/>
+            <a:ext cx="4023360" cy="347472"/>
+          </a:xfrm>
+          <a:prstGeom prst="rect">
+            <a:avLst/>
+          </a:prstGeom>
+          <a:noFill/>
+        </p:spPr>
+        <p:txBody>
+          <a:bodyPr wrap="square">
+            <a:spAutoFit/>
+          </a:bodyPr>
+          <a:lstStyle/>
+          <a:p>
+            <a:pPr algn="l"/>
+            <a:r>
+              <a:rPr sz="1000" b="0">
+                <a:solidFill>
+                  <a:srgbClr val="FFFFFF"/>
+                </a:solidFill>
+              </a:rPr>
+              <a:t>• 탐색해야 할 하이퍼파라미터가 2개</a:t>
+            </a:r>
+          </a:p>
+        </p:txBody>
+      </p:sp>
+      <p:sp>
+        <p:nvSpPr>
+          <p:cNvPr id="28" name="TextBox 27"/>
+          <p:cNvSpPr txBox="1"/>
+          <p:nvPr/>
+        </p:nvSpPr>
+        <p:spPr>
+          <a:xfrm>
+            <a:off x="4864608" y="5157216"/>
+            <a:ext cx="4023360" cy="347472"/>
+          </a:xfrm>
+          <a:prstGeom prst="rect">
+            <a:avLst/>
+          </a:prstGeom>
+          <a:noFill/>
+        </p:spPr>
+        <p:txBody>
+          <a:bodyPr wrap="square">
+            <a:spAutoFit/>
+          </a:bodyPr>
+          <a:lstStyle/>
+          <a:p>
+            <a:pPr algn="l"/>
+            <a:r>
+              <a:rPr sz="1000" b="0">
+                <a:solidFill>
+                  <a:srgbClr val="FFFFFF"/>
+                </a:solidFill>
+              </a:rPr>
+              <a:t>• Ridge나 Lasso보다 해석이 약간 복잡</a:t>
+            </a:r>
+          </a:p>
+        </p:txBody>
+      </p:sp>
+      <p:sp>
+        <p:nvSpPr>
+          <p:cNvPr id="29" name="TextBox 28"/>
+          <p:cNvSpPr txBox="1"/>
+          <p:nvPr/>
+        </p:nvSpPr>
+        <p:spPr>
+          <a:xfrm>
+            <a:off x="4864608" y="5522976"/>
+            <a:ext cx="4023360" cy="347472"/>
+          </a:xfrm>
+          <a:prstGeom prst="rect">
+            <a:avLst/>
+          </a:prstGeom>
+          <a:noFill/>
+        </p:spPr>
+        <p:txBody>
+          <a:bodyPr wrap="square">
+            <a:spAutoFit/>
+          </a:bodyPr>
+          <a:lstStyle/>
+          <a:p>
+            <a:pPr algn="l"/>
+            <a:r>
+              <a:rPr sz="1000" b="0">
+                <a:solidFill>
+                  <a:srgbClr val="FFFFFF"/>
+                </a:solidFill>
+              </a:rPr>
+              <a:t>• 비선형 관계 표현 불가</a:t>
+            </a:r>
+          </a:p>
+        </p:txBody>
+      </p:sp>
+      <p:sp>
+        <p:nvSpPr>
+          <p:cNvPr id="30" name="Rectangle 29"/>
+          <p:cNvSpPr/>
+          <p:nvPr/>
+        </p:nvSpPr>
+        <p:spPr>
+          <a:xfrm>
+            <a:off x="0" y="6199632"/>
+            <a:ext cx="9144000" cy="201168"/>
+          </a:xfrm>
+          <a:prstGeom prst="rect">
+            <a:avLst/>
+          </a:prstGeom>
+          <a:solidFill>
+            <a:srgbClr val="162137"/>
+          </a:solidFill>
+          <a:ln>
+            <a:noFill/>
+          </a:ln>
+        </p:spPr>
+        <p:style>
+          <a:lnRef idx="1">
+            <a:schemeClr val="accent1"/>
+          </a:lnRef>
+          <a:fillRef idx="3">
+            <a:schemeClr val="accent1"/>
+          </a:fillRef>
+          <a:effectRef idx="2">
+            <a:schemeClr val="accent1"/>
+          </a:effectRef>
+          <a:fontRef idx="minor">
+            <a:schemeClr val="lt1"/>
+          </a:fontRef>
+        </p:style>
+        <p:txBody>
+          <a:bodyPr rtlCol="0" anchor="ctr"/>
+          <a:lstStyle/>
+          <a:p>
+            <a:pPr algn="ctr"/>
+          </a:p>
+        </p:txBody>
+      </p:sp>
+      <p:sp>
+        <p:nvSpPr>
+          <p:cNvPr id="31" name="TextBox 30"/>
+          <p:cNvSpPr txBox="1"/>
+          <p:nvPr/>
+        </p:nvSpPr>
+        <p:spPr>
+          <a:xfrm>
+            <a:off x="182880" y="6217920"/>
+            <a:ext cx="6858000" cy="164592"/>
+          </a:xfrm>
+          <a:prstGeom prst="rect">
+            <a:avLst/>
+          </a:prstGeom>
+          <a:noFill/>
+        </p:spPr>
+        <p:txBody>
+          <a:bodyPr wrap="square">
+            <a:spAutoFit/>
+          </a:bodyPr>
+          <a:lstStyle/>
+          <a:p>
+            <a:pPr algn="l"/>
+            <a:r>
+              <a:rPr sz="800" b="0">
+                <a:solidFill>
+                  <a:srgbClr val="94A3B8"/>
+                </a:solidFill>
+              </a:rPr>
+              <a:t>주식 등락률 예측 AI 모델 개발</a:t>
+            </a:r>
+          </a:p>
+        </p:txBody>
+      </p:sp>
+      <p:sp>
+        <p:nvSpPr>
+          <p:cNvPr id="32" name="TextBox 31"/>
+          <p:cNvSpPr txBox="1"/>
+          <p:nvPr/>
+        </p:nvSpPr>
+        <p:spPr>
+          <a:xfrm>
+            <a:off x="7315200" y="6217920"/>
+            <a:ext cx="1645920" cy="164592"/>
+          </a:xfrm>
+          <a:prstGeom prst="rect">
+            <a:avLst/>
+          </a:prstGeom>
+          <a:noFill/>
+        </p:spPr>
+        <p:txBody>
+          <a:bodyPr wrap="square">
+            <a:spAutoFit/>
+          </a:bodyPr>
+          <a:lstStyle/>
+          <a:p>
+            <a:pPr algn="r"/>
+            <a:r>
+              <a:rPr sz="800" b="0">
+                <a:solidFill>
+                  <a:srgbClr val="94A3B8"/>
+                </a:solidFill>
+              </a:rPr>
+              <a:t>13 / 22</a:t>
+            </a:r>
+          </a:p>
+        </p:txBody>
+      </p:sp>
+    </p:spTree>
+  </p:cSld>
+  <p:clrMapOvr>
+    <a:masterClrMapping/>
+  </p:clrMapOvr>
+</p:sld>
+</file>
+
+<file path=ppt/slides/slide17.xml><?xml version="1.0" encoding="utf-8"?>
+<p:sld xmlns:a="http://schemas.openxmlformats.org/drawingml/2006/main" xmlns:p="http://schemas.openxmlformats.org/presentationml/2006/main" xmlns:r="http://schemas.openxmlformats.org/officeDocument/2006/relationships">
+  <p:cSld>
+    <p:bg>
+      <p:bgPr>
+        <a:solidFill>
+          <a:srgbClr val="0F172A"/>
+        </a:solidFill>
+        <a:effectLst/>
+      </p:bgPr>
+    </p:bg>
+    <p:spTree>
+      <p:nvGrpSpPr>
+        <p:cNvPr id="1" name=""/>
+        <p:cNvGrpSpPr/>
+        <p:nvPr/>
+      </p:nvGrpSpPr>
+      <p:grpSpPr/>
+      <p:sp>
+        <p:nvSpPr>
+          <p:cNvPr id="2" name="Rectangle 1"/>
+          <p:cNvSpPr/>
+          <p:nvPr/>
+        </p:nvSpPr>
+        <p:spPr>
+          <a:xfrm>
+            <a:off x="0" y="0"/>
+            <a:ext cx="9144000" cy="1005840"/>
+          </a:xfrm>
+          <a:prstGeom prst="rect">
+            <a:avLst/>
+          </a:prstGeom>
+          <a:solidFill>
+            <a:srgbClr val="A78BFA"/>
+          </a:solidFill>
+          <a:ln>
+            <a:noFill/>
+          </a:ln>
+        </p:spPr>
+        <p:style>
+          <a:lnRef idx="1">
+            <a:schemeClr val="accent1"/>
+          </a:lnRef>
+          <a:fillRef idx="3">
+            <a:schemeClr val="accent1"/>
+          </a:fillRef>
+          <a:effectRef idx="2">
+            <a:schemeClr val="accent1"/>
+          </a:effectRef>
+          <a:fontRef idx="minor">
+            <a:schemeClr val="lt1"/>
+          </a:fontRef>
+        </p:style>
+        <p:txBody>
+          <a:bodyPr rtlCol="0" anchor="ctr"/>
+          <a:lstStyle/>
+          <a:p>
+            <a:pPr algn="ctr"/>
+          </a:p>
+        </p:txBody>
+      </p:sp>
+      <p:sp>
+        <p:nvSpPr>
+          <p:cNvPr id="3" name="Rectangle 2"/>
+          <p:cNvSpPr/>
+          <p:nvPr/>
+        </p:nvSpPr>
+        <p:spPr>
+          <a:xfrm>
+            <a:off x="164592" y="146304"/>
+            <a:ext cx="1188720" cy="384048"/>
+          </a:xfrm>
+          <a:prstGeom prst="rect">
+            <a:avLst/>
+          </a:prstGeom>
+          <a:solidFill>
+            <a:srgbClr val="0F172A"/>
+          </a:solidFill>
+          <a:ln>
+            <a:noFill/>
+          </a:ln>
+        </p:spPr>
+        <p:style>
+          <a:lnRef idx="1">
+            <a:schemeClr val="accent1"/>
+          </a:lnRef>
+          <a:fillRef idx="3">
+            <a:schemeClr val="accent1"/>
+          </a:fillRef>
+          <a:effectRef idx="2">
+            <a:schemeClr val="accent1"/>
+          </a:effectRef>
+          <a:fontRef idx="minor">
+            <a:schemeClr val="lt1"/>
+          </a:fontRef>
+        </p:style>
+        <p:txBody>
+          <a:bodyPr rtlCol="0" anchor="ctr"/>
+          <a:lstStyle/>
+          <a:p>
+            <a:pPr algn="ctr"/>
+          </a:p>
+        </p:txBody>
+      </p:sp>
+      <p:sp>
+        <p:nvSpPr>
+          <p:cNvPr id="4" name="TextBox 3"/>
+          <p:cNvSpPr txBox="1"/>
+          <p:nvPr/>
+        </p:nvSpPr>
+        <p:spPr>
+          <a:xfrm>
+            <a:off x="164592" y="146304"/>
+            <a:ext cx="1188720" cy="384048"/>
+          </a:xfrm>
+          <a:prstGeom prst="rect">
+            <a:avLst/>
+          </a:prstGeom>
+          <a:noFill/>
+        </p:spPr>
+        <p:txBody>
+          <a:bodyPr wrap="square">
+            <a:spAutoFit/>
+          </a:bodyPr>
+          <a:lstStyle/>
+          <a:p>
+            <a:pPr algn="ctr"/>
+            <a:r>
+              <a:rPr sz="900" b="1">
+                <a:solidFill>
+                  <a:srgbClr val="A78BFA"/>
+                </a:solidFill>
+              </a:rPr>
+              <a:t>트리 계열</a:t>
+            </a:r>
+          </a:p>
+        </p:txBody>
+      </p:sp>
+      <p:sp>
+        <p:nvSpPr>
+          <p:cNvPr id="5" name="TextBox 4"/>
+          <p:cNvSpPr txBox="1"/>
+          <p:nvPr/>
+        </p:nvSpPr>
+        <p:spPr>
+          <a:xfrm>
+            <a:off x="1481328" y="73152"/>
+            <a:ext cx="6400800" cy="530352"/>
+          </a:xfrm>
+          <a:prstGeom prst="rect">
+            <a:avLst/>
+          </a:prstGeom>
+          <a:noFill/>
+        </p:spPr>
+        <p:txBody>
+          <a:bodyPr wrap="square">
+            <a:spAutoFit/>
+          </a:bodyPr>
+          <a:lstStyle/>
+          <a:p>
+            <a:pPr algn="l"/>
+            <a:r>
+              <a:rPr sz="2100" b="1">
+                <a:solidFill>
+                  <a:srgbClr val="0F172A"/>
+                </a:solidFill>
+              </a:rPr>
+              <a:t>결정 트리 (Decision Tree)</a:t>
+            </a:r>
+          </a:p>
+        </p:txBody>
+      </p:sp>
+      <p:sp>
+        <p:nvSpPr>
+          <p:cNvPr id="6" name="TextBox 5"/>
+          <p:cNvSpPr txBox="1"/>
+          <p:nvPr/>
+        </p:nvSpPr>
+        <p:spPr>
+          <a:xfrm>
+            <a:off x="1481328" y="585216"/>
+            <a:ext cx="6400800" cy="329184"/>
+          </a:xfrm>
+          <a:prstGeom prst="rect">
+            <a:avLst/>
+          </a:prstGeom>
+          <a:noFill/>
+        </p:spPr>
+        <p:txBody>
+          <a:bodyPr wrap="square">
+            <a:spAutoFit/>
+          </a:bodyPr>
+          <a:lstStyle/>
+          <a:p>
+            <a:pPr algn="l"/>
+            <a:r>
+              <a:rPr sz="1000" b="0">
+                <a:solidFill>
+                  <a:srgbClr val="1E293B"/>
+                </a:solidFill>
+              </a:rPr>
+              <a:t>조건 분기를 반복해 예측하는 규칙 기반 모델</a:t>
+            </a:r>
+          </a:p>
+        </p:txBody>
+      </p:sp>
+      <p:sp>
+        <p:nvSpPr>
+          <p:cNvPr id="7" name="TextBox 6"/>
+          <p:cNvSpPr txBox="1"/>
+          <p:nvPr/>
+        </p:nvSpPr>
+        <p:spPr>
+          <a:xfrm>
+            <a:off x="7955279" y="73152"/>
+            <a:ext cx="1005840" cy="457200"/>
+          </a:xfrm>
+          <a:prstGeom prst="rect">
+            <a:avLst/>
+          </a:prstGeom>
+          <a:noFill/>
+        </p:spPr>
+        <p:txBody>
+          <a:bodyPr wrap="square">
+            <a:spAutoFit/>
+          </a:bodyPr>
+          <a:lstStyle/>
+          <a:p>
+            <a:pPr algn="r"/>
+            <a:r>
+              <a:rPr sz="1000" b="0">
+                <a:solidFill>
+                  <a:srgbClr val="1E293B"/>
+                </a:solidFill>
+              </a:rPr>
+              <a:t>14 / 22</a:t>
+            </a:r>
+          </a:p>
+        </p:txBody>
+      </p:sp>
+      <p:sp>
+        <p:nvSpPr>
+          <p:cNvPr id="8" name="Rectangle 7"/>
+          <p:cNvSpPr/>
+          <p:nvPr/>
+        </p:nvSpPr>
+        <p:spPr>
+          <a:xfrm>
+            <a:off x="0" y="1005840"/>
+            <a:ext cx="9144000" cy="475488"/>
+          </a:xfrm>
+          <a:prstGeom prst="rect">
+            <a:avLst/>
+          </a:prstGeom>
+          <a:solidFill>
+            <a:srgbClr val="1E293B"/>
+          </a:solidFill>
+          <a:ln>
+            <a:noFill/>
+          </a:ln>
+        </p:spPr>
+        <p:style>
+          <a:lnRef idx="1">
+            <a:schemeClr val="accent1"/>
+          </a:lnRef>
+          <a:fillRef idx="3">
+            <a:schemeClr val="accent1"/>
+          </a:fillRef>
+          <a:effectRef idx="2">
+            <a:schemeClr val="accent1"/>
+          </a:effectRef>
+          <a:fontRef idx="minor">
+            <a:schemeClr val="lt1"/>
+          </a:fontRef>
+        </p:style>
+        <p:txBody>
+          <a:bodyPr rtlCol="0" anchor="ctr"/>
+          <a:lstStyle/>
+          <a:p>
+            <a:pPr algn="ctr"/>
+          </a:p>
+        </p:txBody>
+      </p:sp>
+      <p:sp>
+        <p:nvSpPr>
+          <p:cNvPr id="9" name="TextBox 8"/>
+          <p:cNvSpPr txBox="1"/>
+          <p:nvPr/>
+        </p:nvSpPr>
+        <p:spPr>
+          <a:xfrm>
+            <a:off x="228600" y="1051560"/>
+            <a:ext cx="8686800" cy="384048"/>
+          </a:xfrm>
+          <a:prstGeom prst="rect">
+            <a:avLst/>
+          </a:prstGeom>
+          <a:noFill/>
+        </p:spPr>
+        <p:txBody>
+          <a:bodyPr wrap="square">
+            <a:spAutoFit/>
+          </a:bodyPr>
+          <a:lstStyle/>
+          <a:p>
+            <a:pPr algn="l"/>
+            <a:r>
+              <a:rPr sz="1100" b="0">
+                <a:solidFill>
+                  <a:srgbClr val="A78BFA"/>
+                </a:solidFill>
+              </a:rPr>
+              <a:t>한 줄 요약   |   "RSI가 낮고 거래량이 높으면 상승" — 사람이 읽을 수 있는 규칙</a:t>
+            </a:r>
+          </a:p>
+        </p:txBody>
+      </p:sp>
+      <p:sp>
+        <p:nvSpPr>
+          <p:cNvPr id="10" name="Rectangle 9"/>
+          <p:cNvSpPr/>
+          <p:nvPr/>
+        </p:nvSpPr>
+        <p:spPr>
+          <a:xfrm>
+            <a:off x="164592" y="1600200"/>
+            <a:ext cx="4251960" cy="2651760"/>
+          </a:xfrm>
+          <a:prstGeom prst="rect">
+            <a:avLst/>
+          </a:prstGeom>
+          <a:solidFill>
+            <a:srgbClr val="162137"/>
+          </a:solidFill>
+          <a:ln>
+            <a:noFill/>
+          </a:ln>
+        </p:spPr>
+        <p:style>
+          <a:lnRef idx="1">
+            <a:schemeClr val="accent1"/>
+          </a:lnRef>
+          <a:fillRef idx="3">
+            <a:schemeClr val="accent1"/>
+          </a:fillRef>
+          <a:effectRef idx="2">
+            <a:schemeClr val="accent1"/>
+          </a:effectRef>
+          <a:fontRef idx="minor">
+            <a:schemeClr val="lt1"/>
+          </a:fontRef>
+        </p:style>
+        <p:txBody>
+          <a:bodyPr rtlCol="0" anchor="ctr"/>
+          <a:lstStyle/>
+          <a:p>
+            <a:pPr algn="ctr"/>
+          </a:p>
+        </p:txBody>
+      </p:sp>
+      <p:sp>
+        <p:nvSpPr>
+          <p:cNvPr id="11" name="TextBox 10"/>
+          <p:cNvSpPr txBox="1"/>
+          <p:nvPr/>
+        </p:nvSpPr>
+        <p:spPr>
+          <a:xfrm>
+            <a:off x="292608" y="1664208"/>
+            <a:ext cx="3977639" cy="347472"/>
+          </a:xfrm>
+          <a:prstGeom prst="rect">
+            <a:avLst/>
+          </a:prstGeom>
+          <a:noFill/>
+        </p:spPr>
+        <p:txBody>
+          <a:bodyPr wrap="square">
+            <a:spAutoFit/>
+          </a:bodyPr>
+          <a:lstStyle/>
+          <a:p>
+            <a:pPr algn="l"/>
+            <a:r>
+              <a:rPr sz="1100" b="1">
+                <a:solidFill>
+                  <a:srgbClr val="A78BFA"/>
+                </a:solidFill>
+              </a:rPr>
+              <a:t>비유로 이해하기</a:t>
+            </a:r>
+          </a:p>
+        </p:txBody>
+      </p:sp>
+      <p:sp>
+        <p:nvSpPr>
+          <p:cNvPr id="12" name="TextBox 11"/>
+          <p:cNvSpPr txBox="1"/>
+          <p:nvPr/>
+        </p:nvSpPr>
+        <p:spPr>
+          <a:xfrm>
+            <a:off x="292608" y="2048256"/>
+            <a:ext cx="3977639" cy="2121408"/>
+          </a:xfrm>
+          <a:prstGeom prst="rect">
+            <a:avLst/>
+          </a:prstGeom>
+          <a:noFill/>
+        </p:spPr>
+        <p:txBody>
+          <a:bodyPr wrap="square">
+            <a:spAutoFit/>
+          </a:bodyPr>
+          <a:lstStyle/>
+          <a:p>
+            <a:pPr algn="l"/>
+            <a:r>
+              <a:rPr sz="1050" b="0">
+                <a:solidFill>
+                  <a:srgbClr val="FFFFFF"/>
+                </a:solidFill>
+              </a:rPr>
+              <a:t>병원 응급실 환자 분류를 떠올려 보세요.
+"체온 &gt; 38도?"
+  Yes → "혈압 정상?"
+          No → "즉시 입원"
+주식도 마찬가지:
+"RSI &lt; 30?" (과매도)
+  Yes → "거래량 급증?"
+          Yes → "상승 +2.3% 예측"
+max_depth=8: 분기를 8번으로 제한
+→ 너무 깊어지면 훈련 데이터만 외움</a:t>
+            </a:r>
+          </a:p>
+        </p:txBody>
+      </p:sp>
+      <p:sp>
+        <p:nvSpPr>
+          <p:cNvPr id="13" name="Rectangle 12"/>
+          <p:cNvSpPr/>
+          <p:nvPr/>
+        </p:nvSpPr>
+        <p:spPr>
+          <a:xfrm>
+            <a:off x="4727448" y="1600200"/>
+            <a:ext cx="4251960" cy="2651760"/>
+          </a:xfrm>
+          <a:prstGeom prst="rect">
+            <a:avLst/>
+          </a:prstGeom>
+          <a:solidFill>
+            <a:srgbClr val="162137"/>
+          </a:solidFill>
+          <a:ln>
+            <a:noFill/>
+          </a:ln>
+        </p:spPr>
+        <p:style>
+          <a:lnRef idx="1">
+            <a:schemeClr val="accent1"/>
+          </a:lnRef>
+          <a:fillRef idx="3">
+            <a:schemeClr val="accent1"/>
+          </a:fillRef>
+          <a:effectRef idx="2">
+            <a:schemeClr val="accent1"/>
+          </a:effectRef>
+          <a:fontRef idx="minor">
+            <a:schemeClr val="lt1"/>
+          </a:fontRef>
+        </p:style>
+        <p:txBody>
+          <a:bodyPr rtlCol="0" anchor="ctr"/>
+          <a:lstStyle/>
+          <a:p>
+            <a:pPr algn="ctr"/>
+          </a:p>
+        </p:txBody>
+      </p:sp>
+      <p:sp>
+        <p:nvSpPr>
+          <p:cNvPr id="14" name="TextBox 13"/>
+          <p:cNvSpPr txBox="1"/>
+          <p:nvPr/>
+        </p:nvSpPr>
+        <p:spPr>
+          <a:xfrm>
+            <a:off x="4864608" y="1664208"/>
+            <a:ext cx="3977639" cy="347472"/>
+          </a:xfrm>
+          <a:prstGeom prst="rect">
+            <a:avLst/>
+          </a:prstGeom>
+          <a:noFill/>
+        </p:spPr>
+        <p:txBody>
+          <a:bodyPr wrap="square">
+            <a:spAutoFit/>
+          </a:bodyPr>
+          <a:lstStyle/>
+          <a:p>
+            <a:pPr algn="l"/>
+            <a:r>
+              <a:rPr sz="1100" b="1">
+                <a:solidFill>
+                  <a:srgbClr val="A78BFA"/>
+                </a:solidFill>
+              </a:rPr>
+              <a:t>어떻게 작동하나</a:t>
+            </a:r>
+          </a:p>
+        </p:txBody>
+      </p:sp>
+      <p:sp>
+        <p:nvSpPr>
+          <p:cNvPr id="15" name="TextBox 14"/>
+          <p:cNvSpPr txBox="1"/>
+          <p:nvPr/>
+        </p:nvSpPr>
+        <p:spPr>
+          <a:xfrm>
+            <a:off x="4864608" y="2048256"/>
+            <a:ext cx="3977639" cy="365760"/>
+          </a:xfrm>
+          <a:prstGeom prst="rect">
+            <a:avLst/>
+          </a:prstGeom>
+          <a:noFill/>
+        </p:spPr>
+        <p:txBody>
+          <a:bodyPr wrap="square">
+            <a:spAutoFit/>
+          </a:bodyPr>
+          <a:lstStyle/>
+          <a:p>
+            <a:pPr algn="l"/>
+            <a:r>
+              <a:rPr sz="1000" b="0">
+                <a:solidFill>
+                  <a:srgbClr val="FFFFFF"/>
+                </a:solidFill>
+              </a:rPr>
+              <a:t>① 어떤 지표를 어떤 기준으로 나눌지 학습</a:t>
+            </a:r>
+          </a:p>
+        </p:txBody>
+      </p:sp>
+      <p:sp>
+        <p:nvSpPr>
+          <p:cNvPr id="16" name="TextBox 15"/>
+          <p:cNvSpPr txBox="1"/>
+          <p:nvPr/>
+        </p:nvSpPr>
+        <p:spPr>
+          <a:xfrm>
+            <a:off x="4864608" y="2450592"/>
+            <a:ext cx="3977639" cy="365760"/>
+          </a:xfrm>
+          <a:prstGeom prst="rect">
+            <a:avLst/>
+          </a:prstGeom>
+          <a:noFill/>
+        </p:spPr>
+        <p:txBody>
+          <a:bodyPr wrap="square">
+            <a:spAutoFit/>
+          </a:bodyPr>
+          <a:lstStyle/>
+          <a:p>
+            <a:pPr algn="l"/>
+            <a:r>
+              <a:rPr sz="1000" b="0">
+                <a:solidFill>
+                  <a:srgbClr val="FFFFFF"/>
+                </a:solidFill>
+              </a:rPr>
+              <a:t>② 나눌 때마다 오차가 가장 줄어드는 분기</a:t>
+            </a:r>
+          </a:p>
+        </p:txBody>
+      </p:sp>
+      <p:sp>
+        <p:nvSpPr>
+          <p:cNvPr id="17" name="TextBox 16"/>
+          <p:cNvSpPr txBox="1"/>
+          <p:nvPr/>
+        </p:nvSpPr>
+        <p:spPr>
+          <a:xfrm>
+            <a:off x="4864608" y="2852928"/>
+            <a:ext cx="3977639" cy="365760"/>
+          </a:xfrm>
+          <a:prstGeom prst="rect">
+            <a:avLst/>
+          </a:prstGeom>
+          <a:noFill/>
+        </p:spPr>
+        <p:txBody>
+          <a:bodyPr wrap="square">
+            <a:spAutoFit/>
+          </a:bodyPr>
+          <a:lstStyle/>
+          <a:p>
+            <a:pPr algn="l"/>
+            <a:r>
+              <a:rPr sz="1000" b="0">
+                <a:solidFill>
+                  <a:srgbClr val="FFFFFF"/>
+                </a:solidFill>
+              </a:rPr>
+              <a:t>③ max_depth=8 에서 분기 중단</a:t>
+            </a:r>
+          </a:p>
+        </p:txBody>
+      </p:sp>
+      <p:sp>
+        <p:nvSpPr>
+          <p:cNvPr id="18" name="TextBox 17"/>
+          <p:cNvSpPr txBox="1"/>
+          <p:nvPr/>
+        </p:nvSpPr>
+        <p:spPr>
+          <a:xfrm>
+            <a:off x="4864608" y="3255264"/>
+            <a:ext cx="3977639" cy="365760"/>
+          </a:xfrm>
+          <a:prstGeom prst="rect">
+            <a:avLst/>
+          </a:prstGeom>
+          <a:noFill/>
+        </p:spPr>
+        <p:txBody>
+          <a:bodyPr wrap="square">
+            <a:spAutoFit/>
+          </a:bodyPr>
+          <a:lstStyle/>
+          <a:p>
+            <a:pPr algn="l"/>
+            <a:r>
+              <a:rPr sz="1000" b="0">
+                <a:solidFill>
+                  <a:srgbClr val="FFFFFF"/>
+                </a:solidFill>
+              </a:rPr>
+              <a:t>④ 마지막 그룹(Leaf)의 평균 = 예측값</a:t>
+            </a:r>
+          </a:p>
+        </p:txBody>
+      </p:sp>
+      <p:sp>
+        <p:nvSpPr>
+          <p:cNvPr id="19" name="TextBox 18"/>
+          <p:cNvSpPr txBox="1"/>
+          <p:nvPr/>
+        </p:nvSpPr>
+        <p:spPr>
+          <a:xfrm>
+            <a:off x="4864608" y="3657600"/>
+            <a:ext cx="3977639" cy="365760"/>
+          </a:xfrm>
+          <a:prstGeom prst="rect">
+            <a:avLst/>
+          </a:prstGeom>
+          <a:noFill/>
+        </p:spPr>
+        <p:txBody>
+          <a:bodyPr wrap="square">
+            <a:spAutoFit/>
+          </a:bodyPr>
+          <a:lstStyle/>
+          <a:p>
+            <a:pPr algn="l"/>
+            <a:r>
+              <a:rPr sz="1000" b="0">
+                <a:solidFill>
+                  <a:srgbClr val="FFFFFF"/>
+                </a:solidFill>
+              </a:rPr>
+              <a:t>⑤ 규칙을 출력하면 사람이 직접 읽기 가능</a:t>
+            </a:r>
+          </a:p>
+        </p:txBody>
+      </p:sp>
+      <p:sp>
+        <p:nvSpPr>
+          <p:cNvPr id="20" name="Rectangle 19"/>
+          <p:cNvSpPr/>
+          <p:nvPr/>
+        </p:nvSpPr>
+        <p:spPr>
+          <a:xfrm>
+            <a:off x="164592" y="4370832"/>
+            <a:ext cx="4251960" cy="1664208"/>
+          </a:xfrm>
+          <a:prstGeom prst="rect">
+            <a:avLst/>
+          </a:prstGeom>
+          <a:solidFill>
+            <a:srgbClr val="10261C"/>
+          </a:solidFill>
+          <a:ln>
+            <a:noFill/>
+          </a:ln>
+        </p:spPr>
+        <p:style>
+          <a:lnRef idx="1">
+            <a:schemeClr val="accent1"/>
+          </a:lnRef>
+          <a:fillRef idx="3">
+            <a:schemeClr val="accent1"/>
+          </a:fillRef>
+          <a:effectRef idx="2">
+            <a:schemeClr val="accent1"/>
+          </a:effectRef>
+          <a:fontRef idx="minor">
+            <a:schemeClr val="lt1"/>
+          </a:fontRef>
+        </p:style>
+        <p:txBody>
+          <a:bodyPr rtlCol="0" anchor="ctr"/>
+          <a:lstStyle/>
+          <a:p>
+            <a:pPr algn="ctr"/>
+          </a:p>
+        </p:txBody>
+      </p:sp>
+      <p:sp>
+        <p:nvSpPr>
+          <p:cNvPr id="21" name="TextBox 20"/>
+          <p:cNvSpPr txBox="1"/>
+          <p:nvPr/>
+        </p:nvSpPr>
+        <p:spPr>
+          <a:xfrm>
+            <a:off x="292608" y="4434840"/>
+            <a:ext cx="1828800" cy="329184"/>
+          </a:xfrm>
+          <a:prstGeom prst="rect">
+            <a:avLst/>
+          </a:prstGeom>
+          <a:noFill/>
+        </p:spPr>
+        <p:txBody>
+          <a:bodyPr wrap="square">
+            <a:spAutoFit/>
+          </a:bodyPr>
+          <a:lstStyle/>
+          <a:p>
+            <a:pPr algn="l"/>
+            <a:r>
+              <a:rPr sz="1100" b="1">
+                <a:solidFill>
+                  <a:srgbClr val="4ADE80"/>
+                </a:solidFill>
+              </a:rPr>
+              <a:t>✅  장점</a:t>
+            </a:r>
+          </a:p>
+        </p:txBody>
+      </p:sp>
+      <p:sp>
+        <p:nvSpPr>
+          <p:cNvPr id="22" name="TextBox 21"/>
+          <p:cNvSpPr txBox="1"/>
+          <p:nvPr/>
+        </p:nvSpPr>
+        <p:spPr>
+          <a:xfrm>
+            <a:off x="292608" y="4791456"/>
+            <a:ext cx="4023360" cy="347472"/>
+          </a:xfrm>
+          <a:prstGeom prst="rect">
+            <a:avLst/>
+          </a:prstGeom>
+          <a:noFill/>
+        </p:spPr>
+        <p:txBody>
+          <a:bodyPr wrap="square">
+            <a:spAutoFit/>
+          </a:bodyPr>
+          <a:lstStyle/>
+          <a:p>
+            <a:pPr algn="l"/>
+            <a:r>
+              <a:rPr sz="1000" b="0">
+                <a:solidFill>
+                  <a:srgbClr val="FFFFFF"/>
+                </a:solidFill>
+              </a:rPr>
+              <a:t>• 예측 규칙을 직접 읽을 수 있어 해석성 최고</a:t>
+            </a:r>
+          </a:p>
+        </p:txBody>
+      </p:sp>
+      <p:sp>
+        <p:nvSpPr>
+          <p:cNvPr id="23" name="TextBox 22"/>
+          <p:cNvSpPr txBox="1"/>
+          <p:nvPr/>
+        </p:nvSpPr>
+        <p:spPr>
+          <a:xfrm>
+            <a:off x="292608" y="5157216"/>
+            <a:ext cx="4023360" cy="347472"/>
+          </a:xfrm>
+          <a:prstGeom prst="rect">
+            <a:avLst/>
+          </a:prstGeom>
+          <a:noFill/>
+        </p:spPr>
+        <p:txBody>
+          <a:bodyPr wrap="square">
+            <a:spAutoFit/>
+          </a:bodyPr>
+          <a:lstStyle/>
+          <a:p>
+            <a:pPr algn="l"/>
+            <a:r>
+              <a:rPr sz="1000" b="0">
+                <a:solidFill>
+                  <a:srgbClr val="FFFFFF"/>
+                </a:solidFill>
+              </a:rPr>
+              <a:t>• 데이터 전처리(정규화 등) 불필요</a:t>
+            </a:r>
+          </a:p>
+        </p:txBody>
+      </p:sp>
+      <p:sp>
+        <p:nvSpPr>
+          <p:cNvPr id="24" name="TextBox 23"/>
+          <p:cNvSpPr txBox="1"/>
+          <p:nvPr/>
+        </p:nvSpPr>
+        <p:spPr>
+          <a:xfrm>
+            <a:off x="292608" y="5522976"/>
+            <a:ext cx="4023360" cy="347472"/>
+          </a:xfrm>
+          <a:prstGeom prst="rect">
+            <a:avLst/>
+          </a:prstGeom>
+          <a:noFill/>
+        </p:spPr>
+        <p:txBody>
+          <a:bodyPr wrap="square">
+            <a:spAutoFit/>
+          </a:bodyPr>
+          <a:lstStyle/>
+          <a:p>
+            <a:pPr algn="l"/>
+            <a:r>
+              <a:rPr sz="1000" b="0">
+                <a:solidFill>
+                  <a:srgbClr val="FFFFFF"/>
+                </a:solidFill>
+              </a:rPr>
+              <a:t>• 비선형 관계 및 지표 간 조합 포착 가능</a:t>
+            </a:r>
+          </a:p>
+        </p:txBody>
+      </p:sp>
+      <p:sp>
+        <p:nvSpPr>
+          <p:cNvPr id="25" name="Rectangle 24"/>
+          <p:cNvSpPr/>
+          <p:nvPr/>
+        </p:nvSpPr>
+        <p:spPr>
+          <a:xfrm>
+            <a:off x="4727448" y="4370832"/>
+            <a:ext cx="4251960" cy="1664208"/>
+          </a:xfrm>
+          <a:prstGeom prst="rect">
+            <a:avLst/>
+          </a:prstGeom>
+          <a:solidFill>
+            <a:srgbClr val="261010"/>
+          </a:solidFill>
+          <a:ln>
+            <a:noFill/>
+          </a:ln>
+        </p:spPr>
+        <p:style>
+          <a:lnRef idx="1">
+            <a:schemeClr val="accent1"/>
+          </a:lnRef>
+          <a:fillRef idx="3">
+            <a:schemeClr val="accent1"/>
+          </a:fillRef>
+          <a:effectRef idx="2">
+            <a:schemeClr val="accent1"/>
+          </a:effectRef>
+          <a:fontRef idx="minor">
+            <a:schemeClr val="lt1"/>
+          </a:fontRef>
+        </p:style>
+        <p:txBody>
+          <a:bodyPr rtlCol="0" anchor="ctr"/>
+          <a:lstStyle/>
+          <a:p>
+            <a:pPr algn="ctr"/>
+          </a:p>
+        </p:txBody>
+      </p:sp>
+      <p:sp>
+        <p:nvSpPr>
+          <p:cNvPr id="26" name="TextBox 25"/>
+          <p:cNvSpPr txBox="1"/>
+          <p:nvPr/>
+        </p:nvSpPr>
+        <p:spPr>
+          <a:xfrm>
+            <a:off x="4864608" y="4434840"/>
+            <a:ext cx="1828800" cy="329184"/>
+          </a:xfrm>
+          <a:prstGeom prst="rect">
+            <a:avLst/>
+          </a:prstGeom>
+          <a:noFill/>
+        </p:spPr>
+        <p:txBody>
+          <a:bodyPr wrap="square">
+            <a:spAutoFit/>
+          </a:bodyPr>
+          <a:lstStyle/>
+          <a:p>
+            <a:pPr algn="l"/>
+            <a:r>
+              <a:rPr sz="1100" b="1">
+                <a:solidFill>
+                  <a:srgbClr val="F87171"/>
+                </a:solidFill>
+              </a:rPr>
+              <a:t>⚠  단점</a:t>
+            </a:r>
+          </a:p>
+        </p:txBody>
+      </p:sp>
+      <p:sp>
+        <p:nvSpPr>
+          <p:cNvPr id="27" name="TextBox 26"/>
+          <p:cNvSpPr txBox="1"/>
+          <p:nvPr/>
+        </p:nvSpPr>
+        <p:spPr>
+          <a:xfrm>
+            <a:off x="4864608" y="4791456"/>
+            <a:ext cx="4023360" cy="347472"/>
+          </a:xfrm>
+          <a:prstGeom prst="rect">
+            <a:avLst/>
+          </a:prstGeom>
+          <a:noFill/>
+        </p:spPr>
+        <p:txBody>
+          <a:bodyPr wrap="square">
+            <a:spAutoFit/>
+          </a:bodyPr>
+          <a:lstStyle/>
+          <a:p>
+            <a:pPr algn="l"/>
+            <a:r>
+              <a:rPr sz="1000" b="0">
+                <a:solidFill>
+                  <a:srgbClr val="FFFFFF"/>
+                </a:solidFill>
+              </a:rPr>
+              <a:t>• 깊어질수록 훈련 데이터를 외워버림 (과적합)</a:t>
+            </a:r>
+          </a:p>
+        </p:txBody>
+      </p:sp>
+      <p:sp>
+        <p:nvSpPr>
+          <p:cNvPr id="28" name="TextBox 27"/>
+          <p:cNvSpPr txBox="1"/>
+          <p:nvPr/>
+        </p:nvSpPr>
+        <p:spPr>
+          <a:xfrm>
+            <a:off x="4864608" y="5157216"/>
+            <a:ext cx="4023360" cy="347472"/>
+          </a:xfrm>
+          <a:prstGeom prst="rect">
+            <a:avLst/>
+          </a:prstGeom>
+          <a:noFill/>
+        </p:spPr>
+        <p:txBody>
+          <a:bodyPr wrap="square">
+            <a:spAutoFit/>
+          </a:bodyPr>
+          <a:lstStyle/>
+          <a:p>
+            <a:pPr algn="l"/>
+            <a:r>
+              <a:rPr sz="1000" b="0">
+                <a:solidFill>
+                  <a:srgbClr val="FFFFFF"/>
+                </a:solidFill>
+              </a:rPr>
+              <a:t>• 9개 모델 중 2025년 실전 과적합 갭 가장 큼 (+0.7%p)</a:t>
+            </a:r>
+          </a:p>
+        </p:txBody>
+      </p:sp>
+      <p:sp>
+        <p:nvSpPr>
+          <p:cNvPr id="29" name="TextBox 28"/>
+          <p:cNvSpPr txBox="1"/>
+          <p:nvPr/>
+        </p:nvSpPr>
+        <p:spPr>
+          <a:xfrm>
+            <a:off x="4864608" y="5522976"/>
+            <a:ext cx="4023360" cy="347472"/>
+          </a:xfrm>
+          <a:prstGeom prst="rect">
+            <a:avLst/>
+          </a:prstGeom>
+          <a:noFill/>
+        </p:spPr>
+        <p:txBody>
+          <a:bodyPr wrap="square">
+            <a:spAutoFit/>
+          </a:bodyPr>
+          <a:lstStyle/>
+          <a:p>
+            <a:pPr algn="l"/>
+            <a:r>
+              <a:rPr sz="1000" b="0">
+                <a:solidFill>
+                  <a:srgbClr val="FFFFFF"/>
+                </a:solidFill>
+              </a:rPr>
+              <a:t>• RF/XGB보다 성능 낮음 (트리 1개의 한계)</a:t>
+            </a:r>
+          </a:p>
+        </p:txBody>
+      </p:sp>
+      <p:sp>
+        <p:nvSpPr>
+          <p:cNvPr id="30" name="Rectangle 29"/>
+          <p:cNvSpPr/>
+          <p:nvPr/>
+        </p:nvSpPr>
+        <p:spPr>
+          <a:xfrm>
+            <a:off x="0" y="6199632"/>
+            <a:ext cx="9144000" cy="201168"/>
+          </a:xfrm>
+          <a:prstGeom prst="rect">
+            <a:avLst/>
+          </a:prstGeom>
+          <a:solidFill>
+            <a:srgbClr val="162137"/>
+          </a:solidFill>
+          <a:ln>
+            <a:noFill/>
+          </a:ln>
+        </p:spPr>
+        <p:style>
+          <a:lnRef idx="1">
+            <a:schemeClr val="accent1"/>
+          </a:lnRef>
+          <a:fillRef idx="3">
+            <a:schemeClr val="accent1"/>
+          </a:fillRef>
+          <a:effectRef idx="2">
+            <a:schemeClr val="accent1"/>
+          </a:effectRef>
+          <a:fontRef idx="minor">
+            <a:schemeClr val="lt1"/>
+          </a:fontRef>
+        </p:style>
+        <p:txBody>
+          <a:bodyPr rtlCol="0" anchor="ctr"/>
+          <a:lstStyle/>
+          <a:p>
+            <a:pPr algn="ctr"/>
+          </a:p>
+        </p:txBody>
+      </p:sp>
+      <p:sp>
+        <p:nvSpPr>
+          <p:cNvPr id="31" name="TextBox 30"/>
+          <p:cNvSpPr txBox="1"/>
+          <p:nvPr/>
+        </p:nvSpPr>
+        <p:spPr>
+          <a:xfrm>
+            <a:off x="182880" y="6217920"/>
+            <a:ext cx="6858000" cy="164592"/>
+          </a:xfrm>
+          <a:prstGeom prst="rect">
+            <a:avLst/>
+          </a:prstGeom>
+          <a:noFill/>
+        </p:spPr>
+        <p:txBody>
+          <a:bodyPr wrap="square">
+            <a:spAutoFit/>
+          </a:bodyPr>
+          <a:lstStyle/>
+          <a:p>
+            <a:pPr algn="l"/>
+            <a:r>
+              <a:rPr sz="800" b="0">
+                <a:solidFill>
+                  <a:srgbClr val="94A3B8"/>
+                </a:solidFill>
+              </a:rPr>
+              <a:t>주식 등락률 예측 AI 모델 개발</a:t>
+            </a:r>
+          </a:p>
+        </p:txBody>
+      </p:sp>
+      <p:sp>
+        <p:nvSpPr>
+          <p:cNvPr id="32" name="TextBox 31"/>
+          <p:cNvSpPr txBox="1"/>
+          <p:nvPr/>
+        </p:nvSpPr>
+        <p:spPr>
+          <a:xfrm>
+            <a:off x="7315200" y="6217920"/>
+            <a:ext cx="1645920" cy="164592"/>
+          </a:xfrm>
+          <a:prstGeom prst="rect">
+            <a:avLst/>
+          </a:prstGeom>
+          <a:noFill/>
+        </p:spPr>
+        <p:txBody>
+          <a:bodyPr wrap="square">
+            <a:spAutoFit/>
+          </a:bodyPr>
+          <a:lstStyle/>
+          <a:p>
+            <a:pPr algn="r"/>
+            <a:r>
+              <a:rPr sz="800" b="0">
+                <a:solidFill>
+                  <a:srgbClr val="94A3B8"/>
+                </a:solidFill>
+              </a:rPr>
+              <a:t>14 / 22</a:t>
+            </a:r>
+          </a:p>
+        </p:txBody>
+      </p:sp>
+    </p:spTree>
+  </p:cSld>
+  <p:clrMapOvr>
+    <a:masterClrMapping/>
+  </p:clrMapOvr>
+</p:sld>
+</file>
+
+<file path=ppt/slides/slide18.xml><?xml version="1.0" encoding="utf-8"?>
+<p:sld xmlns:a="http://schemas.openxmlformats.org/drawingml/2006/main" xmlns:p="http://schemas.openxmlformats.org/presentationml/2006/main" xmlns:r="http://schemas.openxmlformats.org/officeDocument/2006/relationships">
+  <p:cSld>
+    <p:bg>
+      <p:bgPr>
+        <a:solidFill>
+          <a:srgbClr val="0F172A"/>
+        </a:solidFill>
+        <a:effectLst/>
+      </p:bgPr>
+    </p:bg>
+    <p:spTree>
+      <p:nvGrpSpPr>
+        <p:cNvPr id="1" name=""/>
+        <p:cNvGrpSpPr/>
+        <p:nvPr/>
+      </p:nvGrpSpPr>
+      <p:grpSpPr/>
+      <p:sp>
+        <p:nvSpPr>
+          <p:cNvPr id="2" name="Rectangle 1"/>
+          <p:cNvSpPr/>
+          <p:nvPr/>
+        </p:nvSpPr>
+        <p:spPr>
+          <a:xfrm>
+            <a:off x="0" y="0"/>
+            <a:ext cx="9144000" cy="1005840"/>
+          </a:xfrm>
+          <a:prstGeom prst="rect">
+            <a:avLst/>
+          </a:prstGeom>
+          <a:solidFill>
+            <a:srgbClr val="22D3EE"/>
+          </a:solidFill>
+          <a:ln>
+            <a:noFill/>
+          </a:ln>
+        </p:spPr>
+        <p:style>
+          <a:lnRef idx="1">
+            <a:schemeClr val="accent1"/>
+          </a:lnRef>
+          <a:fillRef idx="3">
+            <a:schemeClr val="accent1"/>
+          </a:fillRef>
+          <a:effectRef idx="2">
+            <a:schemeClr val="accent1"/>
+          </a:effectRef>
+          <a:fontRef idx="minor">
+            <a:schemeClr val="lt1"/>
+          </a:fontRef>
+        </p:style>
+        <p:txBody>
+          <a:bodyPr rtlCol="0" anchor="ctr"/>
+          <a:lstStyle/>
+          <a:p>
+            <a:pPr algn="ctr"/>
+          </a:p>
+        </p:txBody>
+      </p:sp>
+      <p:sp>
+        <p:nvSpPr>
+          <p:cNvPr id="3" name="Rectangle 2"/>
+          <p:cNvSpPr/>
+          <p:nvPr/>
+        </p:nvSpPr>
+        <p:spPr>
+          <a:xfrm>
+            <a:off x="164592" y="146304"/>
+            <a:ext cx="1188720" cy="384048"/>
+          </a:xfrm>
+          <a:prstGeom prst="rect">
+            <a:avLst/>
+          </a:prstGeom>
+          <a:solidFill>
+            <a:srgbClr val="0F172A"/>
+          </a:solidFill>
+          <a:ln>
+            <a:noFill/>
+          </a:ln>
+        </p:spPr>
+        <p:style>
+          <a:lnRef idx="1">
+            <a:schemeClr val="accent1"/>
+          </a:lnRef>
+          <a:fillRef idx="3">
+            <a:schemeClr val="accent1"/>
+          </a:fillRef>
+          <a:effectRef idx="2">
+            <a:schemeClr val="accent1"/>
+          </a:effectRef>
+          <a:fontRef idx="minor">
+            <a:schemeClr val="lt1"/>
+          </a:fontRef>
+        </p:style>
+        <p:txBody>
+          <a:bodyPr rtlCol="0" anchor="ctr"/>
+          <a:lstStyle/>
+          <a:p>
+            <a:pPr algn="ctr"/>
+          </a:p>
+        </p:txBody>
+      </p:sp>
+      <p:sp>
+        <p:nvSpPr>
+          <p:cNvPr id="4" name="TextBox 3"/>
+          <p:cNvSpPr txBox="1"/>
+          <p:nvPr/>
+        </p:nvSpPr>
+        <p:spPr>
+          <a:xfrm>
+            <a:off x="164592" y="146304"/>
+            <a:ext cx="1188720" cy="384048"/>
+          </a:xfrm>
+          <a:prstGeom prst="rect">
+            <a:avLst/>
+          </a:prstGeom>
+          <a:noFill/>
+        </p:spPr>
+        <p:txBody>
+          <a:bodyPr wrap="square">
+            <a:spAutoFit/>
+          </a:bodyPr>
+          <a:lstStyle/>
+          <a:p>
+            <a:pPr algn="ctr"/>
+            <a:r>
+              <a:rPr sz="900" b="1">
+                <a:solidFill>
+                  <a:srgbClr val="22D3EE"/>
+                </a:solidFill>
+              </a:rPr>
+              <a:t>거리 기반</a:t>
+            </a:r>
+          </a:p>
+        </p:txBody>
+      </p:sp>
+      <p:sp>
+        <p:nvSpPr>
+          <p:cNvPr id="5" name="TextBox 4"/>
+          <p:cNvSpPr txBox="1"/>
+          <p:nvPr/>
+        </p:nvSpPr>
+        <p:spPr>
+          <a:xfrm>
+            <a:off x="1481328" y="73152"/>
+            <a:ext cx="6400800" cy="530352"/>
+          </a:xfrm>
+          <a:prstGeom prst="rect">
+            <a:avLst/>
+          </a:prstGeom>
+          <a:noFill/>
+        </p:spPr>
+        <p:txBody>
+          <a:bodyPr wrap="square">
+            <a:spAutoFit/>
+          </a:bodyPr>
+          <a:lstStyle/>
+          <a:p>
+            <a:pPr algn="l"/>
+            <a:r>
+              <a:rPr sz="2100" b="1">
+                <a:solidFill>
+                  <a:srgbClr val="0F172A"/>
+                </a:solidFill>
+              </a:rPr>
+              <a:t>KNN 회귀 (K-Nearest Neighbors)</a:t>
+            </a:r>
+          </a:p>
+        </p:txBody>
+      </p:sp>
+      <p:sp>
+        <p:nvSpPr>
+          <p:cNvPr id="6" name="TextBox 5"/>
+          <p:cNvSpPr txBox="1"/>
+          <p:nvPr/>
+        </p:nvSpPr>
+        <p:spPr>
+          <a:xfrm>
+            <a:off x="1481328" y="585216"/>
+            <a:ext cx="6400800" cy="329184"/>
+          </a:xfrm>
+          <a:prstGeom prst="rect">
+            <a:avLst/>
+          </a:prstGeom>
+          <a:noFill/>
+        </p:spPr>
+        <p:txBody>
+          <a:bodyPr wrap="square">
+            <a:spAutoFit/>
+          </a:bodyPr>
+          <a:lstStyle/>
+          <a:p>
+            <a:pPr algn="l"/>
+            <a:r>
+              <a:rPr sz="1000" b="0">
+                <a:solidFill>
+                  <a:srgbClr val="1E293B"/>
+                </a:solidFill>
+              </a:rPr>
+              <a:t>"오늘과 가장 비슷했던 과거 날들의 결과 평균" = 예측</a:t>
+            </a:r>
+          </a:p>
+        </p:txBody>
+      </p:sp>
+      <p:sp>
+        <p:nvSpPr>
+          <p:cNvPr id="7" name="TextBox 6"/>
+          <p:cNvSpPr txBox="1"/>
+          <p:nvPr/>
+        </p:nvSpPr>
+        <p:spPr>
+          <a:xfrm>
+            <a:off x="7955279" y="73152"/>
+            <a:ext cx="1005840" cy="457200"/>
+          </a:xfrm>
+          <a:prstGeom prst="rect">
+            <a:avLst/>
+          </a:prstGeom>
+          <a:noFill/>
+        </p:spPr>
+        <p:txBody>
+          <a:bodyPr wrap="square">
+            <a:spAutoFit/>
+          </a:bodyPr>
+          <a:lstStyle/>
+          <a:p>
+            <a:pPr algn="r"/>
+            <a:r>
+              <a:rPr sz="1000" b="0">
+                <a:solidFill>
+                  <a:srgbClr val="1E293B"/>
+                </a:solidFill>
+              </a:rPr>
+              <a:t>15 / 22</a:t>
+            </a:r>
+          </a:p>
+        </p:txBody>
+      </p:sp>
+      <p:sp>
+        <p:nvSpPr>
+          <p:cNvPr id="8" name="Rectangle 7"/>
+          <p:cNvSpPr/>
+          <p:nvPr/>
+        </p:nvSpPr>
+        <p:spPr>
+          <a:xfrm>
+            <a:off x="0" y="1005840"/>
+            <a:ext cx="9144000" cy="475488"/>
+          </a:xfrm>
+          <a:prstGeom prst="rect">
+            <a:avLst/>
+          </a:prstGeom>
+          <a:solidFill>
+            <a:srgbClr val="1E293B"/>
+          </a:solidFill>
+          <a:ln>
+            <a:noFill/>
+          </a:ln>
+        </p:spPr>
+        <p:style>
+          <a:lnRef idx="1">
+            <a:schemeClr val="accent1"/>
+          </a:lnRef>
+          <a:fillRef idx="3">
+            <a:schemeClr val="accent1"/>
+          </a:fillRef>
+          <a:effectRef idx="2">
+            <a:schemeClr val="accent1"/>
+          </a:effectRef>
+          <a:fontRef idx="minor">
+            <a:schemeClr val="lt1"/>
+          </a:fontRef>
+        </p:style>
+        <p:txBody>
+          <a:bodyPr rtlCol="0" anchor="ctr"/>
+          <a:lstStyle/>
+          <a:p>
+            <a:pPr algn="ctr"/>
+          </a:p>
+        </p:txBody>
+      </p:sp>
+      <p:sp>
+        <p:nvSpPr>
+          <p:cNvPr id="9" name="TextBox 8"/>
+          <p:cNvSpPr txBox="1"/>
+          <p:nvPr/>
+        </p:nvSpPr>
+        <p:spPr>
+          <a:xfrm>
+            <a:off x="228600" y="1051560"/>
+            <a:ext cx="8686800" cy="384048"/>
+          </a:xfrm>
+          <a:prstGeom prst="rect">
+            <a:avLst/>
+          </a:prstGeom>
+          <a:noFill/>
+        </p:spPr>
+        <p:txBody>
+          <a:bodyPr wrap="square">
+            <a:spAutoFit/>
+          </a:bodyPr>
+          <a:lstStyle/>
+          <a:p>
+            <a:pPr algn="l"/>
+            <a:r>
+              <a:rPr sz="1100" b="0">
+                <a:solidFill>
+                  <a:srgbClr val="22D3EE"/>
+                </a:solidFill>
+              </a:rPr>
+              <a:t>한 줄 요약   |   "오늘 날씨 같은 날 다음엔 어땠지?" — 유사한 과거 k개를 참조</a:t>
+            </a:r>
+          </a:p>
+        </p:txBody>
+      </p:sp>
+      <p:sp>
+        <p:nvSpPr>
+          <p:cNvPr id="10" name="Rectangle 9"/>
+          <p:cNvSpPr/>
+          <p:nvPr/>
+        </p:nvSpPr>
+        <p:spPr>
+          <a:xfrm>
+            <a:off x="164592" y="1600200"/>
+            <a:ext cx="4251960" cy="2651760"/>
+          </a:xfrm>
+          <a:prstGeom prst="rect">
+            <a:avLst/>
+          </a:prstGeom>
+          <a:solidFill>
+            <a:srgbClr val="162137"/>
+          </a:solidFill>
+          <a:ln>
+            <a:noFill/>
+          </a:ln>
+        </p:spPr>
+        <p:style>
+          <a:lnRef idx="1">
+            <a:schemeClr val="accent1"/>
+          </a:lnRef>
+          <a:fillRef idx="3">
+            <a:schemeClr val="accent1"/>
+          </a:fillRef>
+          <a:effectRef idx="2">
+            <a:schemeClr val="accent1"/>
+          </a:effectRef>
+          <a:fontRef idx="minor">
+            <a:schemeClr val="lt1"/>
+          </a:fontRef>
+        </p:style>
+        <p:txBody>
+          <a:bodyPr rtlCol="0" anchor="ctr"/>
+          <a:lstStyle/>
+          <a:p>
+            <a:pPr algn="ctr"/>
+          </a:p>
+        </p:txBody>
+      </p:sp>
+      <p:sp>
+        <p:nvSpPr>
+          <p:cNvPr id="11" name="TextBox 10"/>
+          <p:cNvSpPr txBox="1"/>
+          <p:nvPr/>
+        </p:nvSpPr>
+        <p:spPr>
+          <a:xfrm>
+            <a:off x="292608" y="1664208"/>
+            <a:ext cx="3977639" cy="347472"/>
+          </a:xfrm>
+          <a:prstGeom prst="rect">
+            <a:avLst/>
+          </a:prstGeom>
+          <a:noFill/>
+        </p:spPr>
+        <p:txBody>
+          <a:bodyPr wrap="square">
+            <a:spAutoFit/>
+          </a:bodyPr>
+          <a:lstStyle/>
+          <a:p>
+            <a:pPr algn="l"/>
+            <a:r>
+              <a:rPr sz="1100" b="1">
+                <a:solidFill>
+                  <a:srgbClr val="22D3EE"/>
+                </a:solidFill>
+              </a:rPr>
+              <a:t>비유로 이해하기</a:t>
+            </a:r>
+          </a:p>
+        </p:txBody>
+      </p:sp>
+      <p:sp>
+        <p:nvSpPr>
+          <p:cNvPr id="12" name="TextBox 11"/>
+          <p:cNvSpPr txBox="1"/>
+          <p:nvPr/>
+        </p:nvSpPr>
+        <p:spPr>
+          <a:xfrm>
+            <a:off x="292608" y="2048256"/>
+            <a:ext cx="3977639" cy="2121408"/>
+          </a:xfrm>
+          <a:prstGeom prst="rect">
+            <a:avLst/>
+          </a:prstGeom>
+          <a:noFill/>
+        </p:spPr>
+        <p:txBody>
+          <a:bodyPr wrap="square">
+            <a:spAutoFit/>
+          </a:bodyPr>
+          <a:lstStyle/>
+          <a:p>
+            <a:pPr algn="l"/>
+            <a:r>
+              <a:rPr sz="1050" b="0">
+                <a:solidFill>
+                  <a:srgbClr val="FFFFFF"/>
+                </a:solidFill>
+              </a:rPr>
+              <a:t>동네 부동산 가격 예측을 생각해 보세요.
+"이 집과 비슷한 집 20채를 찾아보자.
+ 그 집들의 실거래가 평균이 이 집 가격."
+주식도 마찬가지:
+오늘: RSI=42, 거래량=1.2배, MACD=0.3...
+→ 과거에 이런 상황이었던 날 20개 검색
+→ 그 날들의 5일 후 등락률 평균 = 예측
+k=20: 가장 비슷한 20개 날 참조
+(탐색에서 k=20일 때 MAE 최소)</a:t>
+            </a:r>
+          </a:p>
+        </p:txBody>
+      </p:sp>
+      <p:sp>
+        <p:nvSpPr>
+          <p:cNvPr id="13" name="Rectangle 12"/>
+          <p:cNvSpPr/>
+          <p:nvPr/>
+        </p:nvSpPr>
+        <p:spPr>
+          <a:xfrm>
+            <a:off x="4727448" y="1600200"/>
+            <a:ext cx="4251960" cy="2651760"/>
+          </a:xfrm>
+          <a:prstGeom prst="rect">
+            <a:avLst/>
+          </a:prstGeom>
+          <a:solidFill>
+            <a:srgbClr val="162137"/>
+          </a:solidFill>
+          <a:ln>
+            <a:noFill/>
+          </a:ln>
+        </p:spPr>
+        <p:style>
+          <a:lnRef idx="1">
+            <a:schemeClr val="accent1"/>
+          </a:lnRef>
+          <a:fillRef idx="3">
+            <a:schemeClr val="accent1"/>
+          </a:fillRef>
+          <a:effectRef idx="2">
+            <a:schemeClr val="accent1"/>
+          </a:effectRef>
+          <a:fontRef idx="minor">
+            <a:schemeClr val="lt1"/>
+          </a:fontRef>
+        </p:style>
+        <p:txBody>
+          <a:bodyPr rtlCol="0" anchor="ctr"/>
+          <a:lstStyle/>
+          <a:p>
+            <a:pPr algn="ctr"/>
+          </a:p>
+        </p:txBody>
+      </p:sp>
+      <p:sp>
+        <p:nvSpPr>
+          <p:cNvPr id="14" name="TextBox 13"/>
+          <p:cNvSpPr txBox="1"/>
+          <p:nvPr/>
+        </p:nvSpPr>
+        <p:spPr>
+          <a:xfrm>
+            <a:off x="4864608" y="1664208"/>
+            <a:ext cx="3977639" cy="347472"/>
+          </a:xfrm>
+          <a:prstGeom prst="rect">
+            <a:avLst/>
+          </a:prstGeom>
+          <a:noFill/>
+        </p:spPr>
+        <p:txBody>
+          <a:bodyPr wrap="square">
+            <a:spAutoFit/>
+          </a:bodyPr>
+          <a:lstStyle/>
+          <a:p>
+            <a:pPr algn="l"/>
+            <a:r>
+              <a:rPr sz="1100" b="1">
+                <a:solidFill>
+                  <a:srgbClr val="22D3EE"/>
+                </a:solidFill>
+              </a:rPr>
+              <a:t>어떻게 작동하나</a:t>
+            </a:r>
+          </a:p>
+        </p:txBody>
+      </p:sp>
+      <p:sp>
+        <p:nvSpPr>
+          <p:cNvPr id="15" name="TextBox 14"/>
+          <p:cNvSpPr txBox="1"/>
+          <p:nvPr/>
+        </p:nvSpPr>
+        <p:spPr>
+          <a:xfrm>
+            <a:off x="4864608" y="2048256"/>
+            <a:ext cx="3977639" cy="365760"/>
+          </a:xfrm>
+          <a:prstGeom prst="rect">
+            <a:avLst/>
+          </a:prstGeom>
+          <a:noFill/>
+        </p:spPr>
+        <p:txBody>
+          <a:bodyPr wrap="square">
+            <a:spAutoFit/>
+          </a:bodyPr>
+          <a:lstStyle/>
+          <a:p>
+            <a:pPr algn="l"/>
+            <a:r>
+              <a:rPr sz="1000" b="0">
+                <a:solidFill>
+                  <a:srgbClr val="FFFFFF"/>
+                </a:solidFill>
+              </a:rPr>
+              <a:t>① 학습 = 훈련 데이터를 통째로 저장</a:t>
+            </a:r>
+          </a:p>
+        </p:txBody>
+      </p:sp>
+      <p:sp>
+        <p:nvSpPr>
+          <p:cNvPr id="16" name="TextBox 15"/>
+          <p:cNvSpPr txBox="1"/>
+          <p:nvPr/>
+        </p:nvSpPr>
+        <p:spPr>
+          <a:xfrm>
+            <a:off x="4864608" y="2450592"/>
+            <a:ext cx="3977639" cy="365760"/>
+          </a:xfrm>
+          <a:prstGeom prst="rect">
+            <a:avLst/>
+          </a:prstGeom>
+          <a:noFill/>
+        </p:spPr>
+        <p:txBody>
+          <a:bodyPr wrap="square">
+            <a:spAutoFit/>
+          </a:bodyPr>
+          <a:lstStyle/>
+          <a:p>
+            <a:pPr algn="l"/>
+            <a:r>
+              <a:rPr sz="1000" b="0">
+                <a:solidFill>
+                  <a:srgbClr val="FFFFFF"/>
+                </a:solidFill>
+              </a:rPr>
+              <a:t>② 예측 = 오늘과 거리 가장 가까운</a:t>
+            </a:r>
+          </a:p>
+        </p:txBody>
+      </p:sp>
+      <p:sp>
+        <p:nvSpPr>
+          <p:cNvPr id="17" name="TextBox 16"/>
+          <p:cNvSpPr txBox="1"/>
+          <p:nvPr/>
+        </p:nvSpPr>
+        <p:spPr>
+          <a:xfrm>
+            <a:off x="4864608" y="2852928"/>
+            <a:ext cx="3977639" cy="365760"/>
+          </a:xfrm>
+          <a:prstGeom prst="rect">
+            <a:avLst/>
+          </a:prstGeom>
+          <a:noFill/>
+        </p:spPr>
+        <p:txBody>
+          <a:bodyPr wrap="square">
+            <a:spAutoFit/>
+          </a:bodyPr>
+          <a:lstStyle/>
+          <a:p>
+            <a:pPr algn="l"/>
+            <a:r>
+              <a:rPr sz="1000" b="0">
+                <a:solidFill>
+                  <a:srgbClr val="FFFFFF"/>
+                </a:solidFill>
+              </a:rPr>
+              <a:t>   k=20개 날 탐색 (11개 지표 기준)</a:t>
+            </a:r>
+          </a:p>
+        </p:txBody>
+      </p:sp>
+      <p:sp>
+        <p:nvSpPr>
+          <p:cNvPr id="18" name="TextBox 17"/>
+          <p:cNvSpPr txBox="1"/>
+          <p:nvPr/>
+        </p:nvSpPr>
+        <p:spPr>
+          <a:xfrm>
+            <a:off x="4864608" y="3255264"/>
+            <a:ext cx="3977639" cy="365760"/>
+          </a:xfrm>
+          <a:prstGeom prst="rect">
+            <a:avLst/>
+          </a:prstGeom>
+          <a:noFill/>
+        </p:spPr>
+        <p:txBody>
+          <a:bodyPr wrap="square">
+            <a:spAutoFit/>
+          </a:bodyPr>
+          <a:lstStyle/>
+          <a:p>
+            <a:pPr algn="l"/>
+            <a:r>
+              <a:rPr sz="1000" b="0">
+                <a:solidFill>
+                  <a:srgbClr val="FFFFFF"/>
+                </a:solidFill>
+              </a:rPr>
+              <a:t>③ 20개 날의 5일 후 등락률 평균 = 예측</a:t>
+            </a:r>
+          </a:p>
+        </p:txBody>
+      </p:sp>
+      <p:sp>
+        <p:nvSpPr>
+          <p:cNvPr id="19" name="TextBox 18"/>
+          <p:cNvSpPr txBox="1"/>
+          <p:nvPr/>
+        </p:nvSpPr>
+        <p:spPr>
+          <a:xfrm>
+            <a:off x="4864608" y="3657600"/>
+            <a:ext cx="3977639" cy="365760"/>
+          </a:xfrm>
+          <a:prstGeom prst="rect">
+            <a:avLst/>
+          </a:prstGeom>
+          <a:noFill/>
+        </p:spPr>
+        <p:txBody>
+          <a:bodyPr wrap="square">
+            <a:spAutoFit/>
+          </a:bodyPr>
+          <a:lstStyle/>
+          <a:p>
+            <a:pPr algn="l"/>
+            <a:r>
+              <a:rPr sz="1000" b="0">
+                <a:solidFill>
+                  <a:srgbClr val="FFFFFF"/>
+                </a:solidFill>
+              </a:rPr>
+              <a:t>④ 데이터 많을수록 참조 후보 증가</a:t>
+            </a:r>
+          </a:p>
+        </p:txBody>
+      </p:sp>
+      <p:sp>
+        <p:nvSpPr>
+          <p:cNvPr id="20" name="Rectangle 19"/>
+          <p:cNvSpPr/>
+          <p:nvPr/>
+        </p:nvSpPr>
+        <p:spPr>
+          <a:xfrm>
+            <a:off x="164592" y="4370832"/>
+            <a:ext cx="4251960" cy="1664208"/>
+          </a:xfrm>
+          <a:prstGeom prst="rect">
+            <a:avLst/>
+          </a:prstGeom>
+          <a:solidFill>
+            <a:srgbClr val="10261C"/>
+          </a:solidFill>
+          <a:ln>
+            <a:noFill/>
+          </a:ln>
+        </p:spPr>
+        <p:style>
+          <a:lnRef idx="1">
+            <a:schemeClr val="accent1"/>
+          </a:lnRef>
+          <a:fillRef idx="3">
+            <a:schemeClr val="accent1"/>
+          </a:fillRef>
+          <a:effectRef idx="2">
+            <a:schemeClr val="accent1"/>
+          </a:effectRef>
+          <a:fontRef idx="minor">
+            <a:schemeClr val="lt1"/>
+          </a:fontRef>
+        </p:style>
+        <p:txBody>
+          <a:bodyPr rtlCol="0" anchor="ctr"/>
+          <a:lstStyle/>
+          <a:p>
+            <a:pPr algn="ctr"/>
+          </a:p>
+        </p:txBody>
+      </p:sp>
+      <p:sp>
+        <p:nvSpPr>
+          <p:cNvPr id="21" name="TextBox 20"/>
+          <p:cNvSpPr txBox="1"/>
+          <p:nvPr/>
+        </p:nvSpPr>
+        <p:spPr>
+          <a:xfrm>
+            <a:off x="292608" y="4434840"/>
+            <a:ext cx="1828800" cy="329184"/>
+          </a:xfrm>
+          <a:prstGeom prst="rect">
+            <a:avLst/>
+          </a:prstGeom>
+          <a:noFill/>
+        </p:spPr>
+        <p:txBody>
+          <a:bodyPr wrap="square">
+            <a:spAutoFit/>
+          </a:bodyPr>
+          <a:lstStyle/>
+          <a:p>
+            <a:pPr algn="l"/>
+            <a:r>
+              <a:rPr sz="1100" b="1">
+                <a:solidFill>
+                  <a:srgbClr val="4ADE80"/>
+                </a:solidFill>
+              </a:rPr>
+              <a:t>✅  장점</a:t>
+            </a:r>
+          </a:p>
+        </p:txBody>
+      </p:sp>
+      <p:sp>
+        <p:nvSpPr>
+          <p:cNvPr id="22" name="TextBox 21"/>
+          <p:cNvSpPr txBox="1"/>
+          <p:nvPr/>
+        </p:nvSpPr>
+        <p:spPr>
+          <a:xfrm>
+            <a:off x="292608" y="4791456"/>
+            <a:ext cx="4023360" cy="347472"/>
+          </a:xfrm>
+          <a:prstGeom prst="rect">
+            <a:avLst/>
+          </a:prstGeom>
+          <a:noFill/>
+        </p:spPr>
+        <p:txBody>
+          <a:bodyPr wrap="square">
+            <a:spAutoFit/>
+          </a:bodyPr>
+          <a:lstStyle/>
+          <a:p>
+            <a:pPr algn="l"/>
+            <a:r>
+              <a:rPr sz="1000" b="0">
+                <a:solidFill>
+                  <a:srgbClr val="FFFFFF"/>
+                </a:solidFill>
+              </a:rPr>
+              <a:t>• 학습 과정 없음 — 즉시 사용 가능</a:t>
+            </a:r>
+          </a:p>
+        </p:txBody>
+      </p:sp>
+      <p:sp>
+        <p:nvSpPr>
+          <p:cNvPr id="23" name="TextBox 22"/>
+          <p:cNvSpPr txBox="1"/>
+          <p:nvPr/>
+        </p:nvSpPr>
+        <p:spPr>
+          <a:xfrm>
+            <a:off x="292608" y="5157216"/>
+            <a:ext cx="4023360" cy="347472"/>
+          </a:xfrm>
+          <a:prstGeom prst="rect">
+            <a:avLst/>
+          </a:prstGeom>
+          <a:noFill/>
+        </p:spPr>
+        <p:txBody>
+          <a:bodyPr wrap="square">
+            <a:spAutoFit/>
+          </a:bodyPr>
+          <a:lstStyle/>
+          <a:p>
+            <a:pPr algn="l"/>
+            <a:r>
+              <a:rPr sz="1000" b="0">
+                <a:solidFill>
+                  <a:srgbClr val="FFFFFF"/>
+                </a:solidFill>
+              </a:rPr>
+              <a:t>• "비슷한 과거 = 비슷한 미래" 직관적 원리</a:t>
+            </a:r>
+          </a:p>
+        </p:txBody>
+      </p:sp>
+      <p:sp>
+        <p:nvSpPr>
+          <p:cNvPr id="24" name="TextBox 23"/>
+          <p:cNvSpPr txBox="1"/>
+          <p:nvPr/>
+        </p:nvSpPr>
+        <p:spPr>
+          <a:xfrm>
+            <a:off x="292608" y="5522976"/>
+            <a:ext cx="4023360" cy="347472"/>
+          </a:xfrm>
+          <a:prstGeom prst="rect">
+            <a:avLst/>
+          </a:prstGeom>
+          <a:noFill/>
+        </p:spPr>
+        <p:txBody>
+          <a:bodyPr wrap="square">
+            <a:spAutoFit/>
+          </a:bodyPr>
+          <a:lstStyle/>
+          <a:p>
+            <a:pPr algn="l"/>
+            <a:r>
+              <a:rPr sz="1000" b="0">
+                <a:solidFill>
+                  <a:srgbClr val="FFFFFF"/>
+                </a:solidFill>
+              </a:rPr>
+              <a:t>• 데이터 추가만 하면 자동으로 모델 개선</a:t>
+            </a:r>
+          </a:p>
+        </p:txBody>
+      </p:sp>
+      <p:sp>
+        <p:nvSpPr>
+          <p:cNvPr id="25" name="Rectangle 24"/>
+          <p:cNvSpPr/>
+          <p:nvPr/>
+        </p:nvSpPr>
+        <p:spPr>
+          <a:xfrm>
+            <a:off x="4727448" y="4370832"/>
+            <a:ext cx="4251960" cy="1664208"/>
+          </a:xfrm>
+          <a:prstGeom prst="rect">
+            <a:avLst/>
+          </a:prstGeom>
+          <a:solidFill>
+            <a:srgbClr val="261010"/>
+          </a:solidFill>
+          <a:ln>
+            <a:noFill/>
+          </a:ln>
+        </p:spPr>
+        <p:style>
+          <a:lnRef idx="1">
+            <a:schemeClr val="accent1"/>
+          </a:lnRef>
+          <a:fillRef idx="3">
+            <a:schemeClr val="accent1"/>
+          </a:fillRef>
+          <a:effectRef idx="2">
+            <a:schemeClr val="accent1"/>
+          </a:effectRef>
+          <a:fontRef idx="minor">
+            <a:schemeClr val="lt1"/>
+          </a:fontRef>
+        </p:style>
+        <p:txBody>
+          <a:bodyPr rtlCol="0" anchor="ctr"/>
+          <a:lstStyle/>
+          <a:p>
+            <a:pPr algn="ctr"/>
+          </a:p>
+        </p:txBody>
+      </p:sp>
+      <p:sp>
+        <p:nvSpPr>
+          <p:cNvPr id="26" name="TextBox 25"/>
+          <p:cNvSpPr txBox="1"/>
+          <p:nvPr/>
+        </p:nvSpPr>
+        <p:spPr>
+          <a:xfrm>
+            <a:off x="4864608" y="4434840"/>
+            <a:ext cx="1828800" cy="329184"/>
+          </a:xfrm>
+          <a:prstGeom prst="rect">
+            <a:avLst/>
+          </a:prstGeom>
+          <a:noFill/>
+        </p:spPr>
+        <p:txBody>
+          <a:bodyPr wrap="square">
+            <a:spAutoFit/>
+          </a:bodyPr>
+          <a:lstStyle/>
+          <a:p>
+            <a:pPr algn="l"/>
+            <a:r>
+              <a:rPr sz="1100" b="1">
+                <a:solidFill>
+                  <a:srgbClr val="F87171"/>
+                </a:solidFill>
+              </a:rPr>
+              <a:t>⚠  단점</a:t>
+            </a:r>
+          </a:p>
+        </p:txBody>
+      </p:sp>
+      <p:sp>
+        <p:nvSpPr>
+          <p:cNvPr id="27" name="TextBox 26"/>
+          <p:cNvSpPr txBox="1"/>
+          <p:nvPr/>
+        </p:nvSpPr>
+        <p:spPr>
+          <a:xfrm>
+            <a:off x="4864608" y="4791456"/>
+            <a:ext cx="4023360" cy="347472"/>
+          </a:xfrm>
+          <a:prstGeom prst="rect">
+            <a:avLst/>
+          </a:prstGeom>
+          <a:noFill/>
+        </p:spPr>
+        <p:txBody>
+          <a:bodyPr wrap="square">
+            <a:spAutoFit/>
+          </a:bodyPr>
+          <a:lstStyle/>
+          <a:p>
+            <a:pPr algn="l"/>
+            <a:r>
+              <a:rPr sz="1000" b="0">
+                <a:solidFill>
+                  <a:srgbClr val="FFFFFF"/>
+                </a:solidFill>
+              </a:rPr>
+              <a:t>• 예측마다 전체 훈련 데이터 탐색 → 느림</a:t>
+            </a:r>
+          </a:p>
+        </p:txBody>
+      </p:sp>
+      <p:sp>
+        <p:nvSpPr>
+          <p:cNvPr id="28" name="TextBox 27"/>
+          <p:cNvSpPr txBox="1"/>
+          <p:nvPr/>
+        </p:nvSpPr>
+        <p:spPr>
+          <a:xfrm>
+            <a:off x="4864608" y="5157216"/>
+            <a:ext cx="4023360" cy="347472"/>
+          </a:xfrm>
+          <a:prstGeom prst="rect">
+            <a:avLst/>
+          </a:prstGeom>
+          <a:noFill/>
+        </p:spPr>
+        <p:txBody>
+          <a:bodyPr wrap="square">
+            <a:spAutoFit/>
+          </a:bodyPr>
+          <a:lstStyle/>
+          <a:p>
+            <a:pPr algn="l"/>
+            <a:r>
+              <a:rPr sz="1000" b="0">
+                <a:solidFill>
+                  <a:srgbClr val="FFFFFF"/>
+                </a:solidFill>
+              </a:rPr>
+              <a:t>• 11개 지표가 모두 동등하게 취급됨</a:t>
+            </a:r>
+          </a:p>
+        </p:txBody>
+      </p:sp>
+      <p:sp>
+        <p:nvSpPr>
+          <p:cNvPr id="29" name="TextBox 28"/>
+          <p:cNvSpPr txBox="1"/>
+          <p:nvPr/>
+        </p:nvSpPr>
+        <p:spPr>
+          <a:xfrm>
+            <a:off x="4864608" y="5522976"/>
+            <a:ext cx="4023360" cy="347472"/>
+          </a:xfrm>
+          <a:prstGeom prst="rect">
+            <a:avLst/>
+          </a:prstGeom>
+          <a:noFill/>
+        </p:spPr>
+        <p:txBody>
+          <a:bodyPr wrap="square">
+            <a:spAutoFit/>
+          </a:bodyPr>
+          <a:lstStyle/>
+          <a:p>
+            <a:pPr algn="l"/>
+            <a:r>
+              <a:rPr sz="1000" b="0">
+                <a:solidFill>
+                  <a:srgbClr val="FFFFFF"/>
+                </a:solidFill>
+              </a:rPr>
+              <a:t>• 지표 수가 늘면 거리 의미 희석 (차원의 저주)</a:t>
+            </a:r>
+          </a:p>
+        </p:txBody>
+      </p:sp>
+      <p:sp>
+        <p:nvSpPr>
+          <p:cNvPr id="30" name="Rectangle 29"/>
+          <p:cNvSpPr/>
+          <p:nvPr/>
+        </p:nvSpPr>
+        <p:spPr>
+          <a:xfrm>
+            <a:off x="0" y="6199632"/>
+            <a:ext cx="9144000" cy="201168"/>
+          </a:xfrm>
+          <a:prstGeom prst="rect">
+            <a:avLst/>
+          </a:prstGeom>
+          <a:solidFill>
+            <a:srgbClr val="162137"/>
+          </a:solidFill>
+          <a:ln>
+            <a:noFill/>
+          </a:ln>
+        </p:spPr>
+        <p:style>
+          <a:lnRef idx="1">
+            <a:schemeClr val="accent1"/>
+          </a:lnRef>
+          <a:fillRef idx="3">
+            <a:schemeClr val="accent1"/>
+          </a:fillRef>
+          <a:effectRef idx="2">
+            <a:schemeClr val="accent1"/>
+          </a:effectRef>
+          <a:fontRef idx="minor">
+            <a:schemeClr val="lt1"/>
+          </a:fontRef>
+        </p:style>
+        <p:txBody>
+          <a:bodyPr rtlCol="0" anchor="ctr"/>
+          <a:lstStyle/>
+          <a:p>
+            <a:pPr algn="ctr"/>
+          </a:p>
+        </p:txBody>
+      </p:sp>
+      <p:sp>
+        <p:nvSpPr>
+          <p:cNvPr id="31" name="TextBox 30"/>
+          <p:cNvSpPr txBox="1"/>
+          <p:nvPr/>
+        </p:nvSpPr>
+        <p:spPr>
+          <a:xfrm>
+            <a:off x="182880" y="6217920"/>
+            <a:ext cx="6858000" cy="164592"/>
+          </a:xfrm>
+          <a:prstGeom prst="rect">
+            <a:avLst/>
+          </a:prstGeom>
+          <a:noFill/>
+        </p:spPr>
+        <p:txBody>
+          <a:bodyPr wrap="square">
+            <a:spAutoFit/>
+          </a:bodyPr>
+          <a:lstStyle/>
+          <a:p>
+            <a:pPr algn="l"/>
+            <a:r>
+              <a:rPr sz="800" b="0">
+                <a:solidFill>
+                  <a:srgbClr val="94A3B8"/>
+                </a:solidFill>
+              </a:rPr>
+              <a:t>주식 등락률 예측 AI 모델 개발</a:t>
+            </a:r>
+          </a:p>
+        </p:txBody>
+      </p:sp>
+      <p:sp>
+        <p:nvSpPr>
+          <p:cNvPr id="32" name="TextBox 31"/>
+          <p:cNvSpPr txBox="1"/>
+          <p:nvPr/>
+        </p:nvSpPr>
+        <p:spPr>
+          <a:xfrm>
+            <a:off x="7315200" y="6217920"/>
+            <a:ext cx="1645920" cy="164592"/>
+          </a:xfrm>
+          <a:prstGeom prst="rect">
+            <a:avLst/>
+          </a:prstGeom>
+          <a:noFill/>
+        </p:spPr>
+        <p:txBody>
+          <a:bodyPr wrap="square">
+            <a:spAutoFit/>
+          </a:bodyPr>
+          <a:lstStyle/>
+          <a:p>
+            <a:pPr algn="r"/>
+            <a:r>
+              <a:rPr sz="800" b="0">
+                <a:solidFill>
+                  <a:srgbClr val="94A3B8"/>
+                </a:solidFill>
+              </a:rPr>
+              <a:t>15 / 22</a:t>
+            </a:r>
           </a:p>
         </p:txBody>
       </p:sp>
